--- a/KP/Blitzlicht_Kotlin.pptx
+++ b/KP/Blitzlicht_Kotlin.pptx
@@ -1115,7 +1115,7 @@
           <a:effectLst/>
           <a:extLst>
             <a:ext uri="{91240B29-F687-4f45-9708-019B960494DF}">
-              <a14:hiddenLine xmlns="" xmlns:a14="http://schemas.microsoft.com/office/drawing/2010/main" w="9525">
+              <a14:hiddenLine xmlns:a14="http://schemas.microsoft.com/office/drawing/2010/main" xmlns="" w="9525">
                 <a:solidFill>
                   <a:srgbClr val="000000"/>
                 </a:solidFill>
@@ -2659,7 +2659,7 @@
           <a:ln/>
           <a:extLst>
             <a:ext uri="{91240B29-F687-4f45-9708-019B960494DF}">
-              <a14:hiddenLine xmlns="" xmlns:a14="http://schemas.microsoft.com/office/drawing/2010/main" w="9525">
+              <a14:hiddenLine xmlns:a14="http://schemas.microsoft.com/office/drawing/2010/main" xmlns="" w="9525">
                 <a:solidFill>
                   <a:srgbClr val="000000"/>
                 </a:solidFill>
@@ -2941,7 +2941,7 @@
           <a:ln/>
           <a:extLst>
             <a:ext uri="{91240B29-F687-4f45-9708-019B960494DF}">
-              <a14:hiddenLine xmlns="" xmlns:a14="http://schemas.microsoft.com/office/drawing/2010/main" w="9525">
+              <a14:hiddenLine xmlns:a14="http://schemas.microsoft.com/office/drawing/2010/main" xmlns="" w="9525">
                 <a:solidFill>
                   <a:srgbClr val="000000"/>
                 </a:solidFill>
@@ -3231,7 +3231,7 @@
           <a:ln/>
           <a:extLst>
             <a:ext uri="{91240B29-F687-4f45-9708-019B960494DF}">
-              <a14:hiddenLine xmlns="" xmlns:a14="http://schemas.microsoft.com/office/drawing/2010/main" w="9525">
+              <a14:hiddenLine xmlns:a14="http://schemas.microsoft.com/office/drawing/2010/main" xmlns="" w="9525">
                 <a:solidFill>
                   <a:srgbClr val="000000"/>
                 </a:solidFill>
@@ -3871,7 +3871,7 @@
           <a:ln/>
           <a:extLst>
             <a:ext uri="{91240B29-F687-4f45-9708-019B960494DF}">
-              <a14:hiddenLine xmlns="" xmlns:a14="http://schemas.microsoft.com/office/drawing/2010/main" w="9525">
+              <a14:hiddenLine xmlns:a14="http://schemas.microsoft.com/office/drawing/2010/main" xmlns="" w="9525">
                 <a:solidFill>
                   <a:srgbClr val="000000"/>
                 </a:solidFill>
@@ -4217,7 +4217,7 @@
           <a:ln/>
           <a:extLst>
             <a:ext uri="{91240B29-F687-4f45-9708-019B960494DF}">
-              <a14:hiddenLine xmlns="" xmlns:a14="http://schemas.microsoft.com/office/drawing/2010/main" w="9525">
+              <a14:hiddenLine xmlns:a14="http://schemas.microsoft.com/office/drawing/2010/main" xmlns="" w="9525">
                 <a:solidFill>
                   <a:srgbClr val="000000"/>
                 </a:solidFill>
@@ -4701,7 +4701,7 @@
           <a:ln/>
           <a:extLst>
             <a:ext uri="{91240B29-F687-4f45-9708-019B960494DF}">
-              <a14:hiddenLine xmlns="" xmlns:a14="http://schemas.microsoft.com/office/drawing/2010/main" w="9525">
+              <a14:hiddenLine xmlns:a14="http://schemas.microsoft.com/office/drawing/2010/main" xmlns="" w="9525">
                 <a:solidFill>
                   <a:srgbClr val="000000"/>
                 </a:solidFill>
@@ -5137,7 +5137,7 @@
           <a:ln/>
           <a:extLst>
             <a:ext uri="{91240B29-F687-4f45-9708-019B960494DF}">
-              <a14:hiddenLine xmlns="" xmlns:a14="http://schemas.microsoft.com/office/drawing/2010/main" w="9525">
+              <a14:hiddenLine xmlns:a14="http://schemas.microsoft.com/office/drawing/2010/main" xmlns="" w="9525">
                 <a:solidFill>
                   <a:srgbClr val="000000"/>
                 </a:solidFill>
@@ -6569,7 +6569,7 @@
         <p:grpSpPr>
           <a:xfrm>
             <a:off x="85444" y="101035"/>
-            <a:ext cx="4120648" cy="406964"/>
+            <a:ext cx="2796301" cy="406964"/>
             <a:chOff x="689746" y="1254252"/>
             <a:chExt cx="10812505" cy="1415319"/>
           </a:xfrm>
@@ -6964,89 +6964,6 @@
   <p:clrMapOvr>
     <a:masterClrMapping/>
   </p:clrMapOvr>
-  <p:timing>
-    <p:tnLst>
-      <p:par>
-        <p:cTn id="1" dur="indefinite" restart="never" nodeType="tmRoot">
-          <p:childTnLst>
-            <p:seq concurrent="1" nextAc="seek">
-              <p:cTn id="2" dur="indefinite" nodeType="mainSeq">
-                <p:childTnLst>
-                  <p:par>
-                    <p:cTn id="3" fill="hold">
-                      <p:stCondLst>
-                        <p:cond delay="indefinite"/>
-                      </p:stCondLst>
-                      <p:childTnLst>
-                        <p:par>
-                          <p:cTn id="4" fill="hold">
-                            <p:stCondLst>
-                              <p:cond delay="0"/>
-                            </p:stCondLst>
-                            <p:childTnLst>
-                              <p:par>
-                                <p:cTn id="5" presetID="10" presetClass="entr" presetSubtype="0" fill="hold" nodeType="clickEffect">
-                                  <p:stCondLst>
-                                    <p:cond delay="0"/>
-                                  </p:stCondLst>
-                                  <p:childTnLst>
-                                    <p:set>
-                                      <p:cBhvr>
-                                        <p:cTn id="6" dur="1" fill="hold">
-                                          <p:stCondLst>
-                                            <p:cond delay="0"/>
-                                          </p:stCondLst>
-                                        </p:cTn>
-                                        <p:tgtEl>
-                                          <p:spTgt spid="14"/>
-                                        </p:tgtEl>
-                                        <p:attrNameLst>
-                                          <p:attrName>style.visibility</p:attrName>
-                                        </p:attrNameLst>
-                                      </p:cBhvr>
-                                      <p:to>
-                                        <p:strVal val="visible"/>
-                                      </p:to>
-                                    </p:set>
-                                    <p:animEffect transition="in" filter="fade">
-                                      <p:cBhvr>
-                                        <p:cTn id="7" dur="500"/>
-                                        <p:tgtEl>
-                                          <p:spTgt spid="14"/>
-                                        </p:tgtEl>
-                                      </p:cBhvr>
-                                    </p:animEffect>
-                                  </p:childTnLst>
-                                </p:cTn>
-                              </p:par>
-                            </p:childTnLst>
-                          </p:cTn>
-                        </p:par>
-                      </p:childTnLst>
-                    </p:cTn>
-                  </p:par>
-                </p:childTnLst>
-              </p:cTn>
-              <p:prevCondLst>
-                <p:cond evt="onPrev" delay="0">
-                  <p:tgtEl>
-                    <p:sldTgt/>
-                  </p:tgtEl>
-                </p:cond>
-              </p:prevCondLst>
-              <p:nextCondLst>
-                <p:cond evt="onNext" delay="0">
-                  <p:tgtEl>
-                    <p:sldTgt/>
-                  </p:tgtEl>
-                </p:cond>
-              </p:nextCondLst>
-            </p:seq>
-          </p:childTnLst>
-        </p:cTn>
-      </p:par>
-    </p:tnLst>
-  </p:timing>
 </p:sld>
 </file>
 
@@ -7719,89 +7636,6 @@
   <p:clrMapOvr>
     <a:masterClrMapping/>
   </p:clrMapOvr>
-  <p:timing>
-    <p:tnLst>
-      <p:par>
-        <p:cTn id="1" dur="indefinite" restart="never" nodeType="tmRoot">
-          <p:childTnLst>
-            <p:seq concurrent="1" nextAc="seek">
-              <p:cTn id="2" dur="indefinite" nodeType="mainSeq">
-                <p:childTnLst>
-                  <p:par>
-                    <p:cTn id="3" fill="hold">
-                      <p:stCondLst>
-                        <p:cond delay="indefinite"/>
-                      </p:stCondLst>
-                      <p:childTnLst>
-                        <p:par>
-                          <p:cTn id="4" fill="hold">
-                            <p:stCondLst>
-                              <p:cond delay="0"/>
-                            </p:stCondLst>
-                            <p:childTnLst>
-                              <p:par>
-                                <p:cTn id="5" presetID="10" presetClass="entr" presetSubtype="0" fill="hold" nodeType="clickEffect">
-                                  <p:stCondLst>
-                                    <p:cond delay="0"/>
-                                  </p:stCondLst>
-                                  <p:childTnLst>
-                                    <p:set>
-                                      <p:cBhvr>
-                                        <p:cTn id="6" dur="1" fill="hold">
-                                          <p:stCondLst>
-                                            <p:cond delay="0"/>
-                                          </p:stCondLst>
-                                        </p:cTn>
-                                        <p:tgtEl>
-                                          <p:spTgt spid="14"/>
-                                        </p:tgtEl>
-                                        <p:attrNameLst>
-                                          <p:attrName>style.visibility</p:attrName>
-                                        </p:attrNameLst>
-                                      </p:cBhvr>
-                                      <p:to>
-                                        <p:strVal val="visible"/>
-                                      </p:to>
-                                    </p:set>
-                                    <p:animEffect transition="in" filter="fade">
-                                      <p:cBhvr>
-                                        <p:cTn id="7" dur="500"/>
-                                        <p:tgtEl>
-                                          <p:spTgt spid="14"/>
-                                        </p:tgtEl>
-                                      </p:cBhvr>
-                                    </p:animEffect>
-                                  </p:childTnLst>
-                                </p:cTn>
-                              </p:par>
-                            </p:childTnLst>
-                          </p:cTn>
-                        </p:par>
-                      </p:childTnLst>
-                    </p:cTn>
-                  </p:par>
-                </p:childTnLst>
-              </p:cTn>
-              <p:prevCondLst>
-                <p:cond evt="onPrev" delay="0">
-                  <p:tgtEl>
-                    <p:sldTgt/>
-                  </p:tgtEl>
-                </p:cond>
-              </p:prevCondLst>
-              <p:nextCondLst>
-                <p:cond evt="onNext" delay="0">
-                  <p:tgtEl>
-                    <p:sldTgt/>
-                  </p:tgtEl>
-                </p:cond>
-              </p:nextCondLst>
-            </p:seq>
-          </p:childTnLst>
-        </p:cTn>
-      </p:par>
-    </p:tnLst>
-  </p:timing>
 </p:sld>
 </file>
 
@@ -8436,89 +8270,6 @@
   <p:clrMapOvr>
     <a:masterClrMapping/>
   </p:clrMapOvr>
-  <p:timing>
-    <p:tnLst>
-      <p:par>
-        <p:cTn id="1" dur="indefinite" restart="never" nodeType="tmRoot">
-          <p:childTnLst>
-            <p:seq concurrent="1" nextAc="seek">
-              <p:cTn id="2" dur="indefinite" nodeType="mainSeq">
-                <p:childTnLst>
-                  <p:par>
-                    <p:cTn id="3" fill="hold">
-                      <p:stCondLst>
-                        <p:cond delay="indefinite"/>
-                      </p:stCondLst>
-                      <p:childTnLst>
-                        <p:par>
-                          <p:cTn id="4" fill="hold">
-                            <p:stCondLst>
-                              <p:cond delay="0"/>
-                            </p:stCondLst>
-                            <p:childTnLst>
-                              <p:par>
-                                <p:cTn id="5" presetID="10" presetClass="entr" presetSubtype="0" fill="hold" nodeType="clickEffect">
-                                  <p:stCondLst>
-                                    <p:cond delay="0"/>
-                                  </p:stCondLst>
-                                  <p:childTnLst>
-                                    <p:set>
-                                      <p:cBhvr>
-                                        <p:cTn id="6" dur="1" fill="hold">
-                                          <p:stCondLst>
-                                            <p:cond delay="0"/>
-                                          </p:stCondLst>
-                                        </p:cTn>
-                                        <p:tgtEl>
-                                          <p:spTgt spid="15"/>
-                                        </p:tgtEl>
-                                        <p:attrNameLst>
-                                          <p:attrName>style.visibility</p:attrName>
-                                        </p:attrNameLst>
-                                      </p:cBhvr>
-                                      <p:to>
-                                        <p:strVal val="visible"/>
-                                      </p:to>
-                                    </p:set>
-                                    <p:animEffect transition="in" filter="fade">
-                                      <p:cBhvr>
-                                        <p:cTn id="7" dur="500"/>
-                                        <p:tgtEl>
-                                          <p:spTgt spid="15"/>
-                                        </p:tgtEl>
-                                      </p:cBhvr>
-                                    </p:animEffect>
-                                  </p:childTnLst>
-                                </p:cTn>
-                              </p:par>
-                            </p:childTnLst>
-                          </p:cTn>
-                        </p:par>
-                      </p:childTnLst>
-                    </p:cTn>
-                  </p:par>
-                </p:childTnLst>
-              </p:cTn>
-              <p:prevCondLst>
-                <p:cond evt="onPrev" delay="0">
-                  <p:tgtEl>
-                    <p:sldTgt/>
-                  </p:tgtEl>
-                </p:cond>
-              </p:prevCondLst>
-              <p:nextCondLst>
-                <p:cond evt="onNext" delay="0">
-                  <p:tgtEl>
-                    <p:sldTgt/>
-                  </p:tgtEl>
-                </p:cond>
-              </p:nextCondLst>
-            </p:seq>
-          </p:childTnLst>
-        </p:cTn>
-      </p:par>
-    </p:tnLst>
-  </p:timing>
 </p:sld>
 </file>
 
@@ -9296,89 +9047,6 @@
   <p:clrMapOvr>
     <a:masterClrMapping/>
   </p:clrMapOvr>
-  <p:timing>
-    <p:tnLst>
-      <p:par>
-        <p:cTn id="1" dur="indefinite" restart="never" nodeType="tmRoot">
-          <p:childTnLst>
-            <p:seq concurrent="1" nextAc="seek">
-              <p:cTn id="2" dur="indefinite" nodeType="mainSeq">
-                <p:childTnLst>
-                  <p:par>
-                    <p:cTn id="3" fill="hold">
-                      <p:stCondLst>
-                        <p:cond delay="indefinite"/>
-                      </p:stCondLst>
-                      <p:childTnLst>
-                        <p:par>
-                          <p:cTn id="4" fill="hold">
-                            <p:stCondLst>
-                              <p:cond delay="0"/>
-                            </p:stCondLst>
-                            <p:childTnLst>
-                              <p:par>
-                                <p:cTn id="5" presetID="10" presetClass="entr" presetSubtype="0" fill="hold" nodeType="clickEffect">
-                                  <p:stCondLst>
-                                    <p:cond delay="0"/>
-                                  </p:stCondLst>
-                                  <p:childTnLst>
-                                    <p:set>
-                                      <p:cBhvr>
-                                        <p:cTn id="6" dur="1" fill="hold">
-                                          <p:stCondLst>
-                                            <p:cond delay="0"/>
-                                          </p:stCondLst>
-                                        </p:cTn>
-                                        <p:tgtEl>
-                                          <p:spTgt spid="4"/>
-                                        </p:tgtEl>
-                                        <p:attrNameLst>
-                                          <p:attrName>style.visibility</p:attrName>
-                                        </p:attrNameLst>
-                                      </p:cBhvr>
-                                      <p:to>
-                                        <p:strVal val="visible"/>
-                                      </p:to>
-                                    </p:set>
-                                    <p:animEffect transition="in" filter="fade">
-                                      <p:cBhvr>
-                                        <p:cTn id="7" dur="500"/>
-                                        <p:tgtEl>
-                                          <p:spTgt spid="4"/>
-                                        </p:tgtEl>
-                                      </p:cBhvr>
-                                    </p:animEffect>
-                                  </p:childTnLst>
-                                </p:cTn>
-                              </p:par>
-                            </p:childTnLst>
-                          </p:cTn>
-                        </p:par>
-                      </p:childTnLst>
-                    </p:cTn>
-                  </p:par>
-                </p:childTnLst>
-              </p:cTn>
-              <p:prevCondLst>
-                <p:cond evt="onPrev" delay="0">
-                  <p:tgtEl>
-                    <p:sldTgt/>
-                  </p:tgtEl>
-                </p:cond>
-              </p:prevCondLst>
-              <p:nextCondLst>
-                <p:cond evt="onNext" delay="0">
-                  <p:tgtEl>
-                    <p:sldTgt/>
-                  </p:tgtEl>
-                </p:cond>
-              </p:nextCondLst>
-            </p:seq>
-          </p:childTnLst>
-        </p:cTn>
-      </p:par>
-    </p:tnLst>
-  </p:timing>
 </p:sld>
 </file>
 
@@ -9973,89 +9641,6 @@
   <p:clrMapOvr>
     <a:masterClrMapping/>
   </p:clrMapOvr>
-  <p:timing>
-    <p:tnLst>
-      <p:par>
-        <p:cTn id="1" dur="indefinite" restart="never" nodeType="tmRoot">
-          <p:childTnLst>
-            <p:seq concurrent="1" nextAc="seek">
-              <p:cTn id="2" dur="indefinite" nodeType="mainSeq">
-                <p:childTnLst>
-                  <p:par>
-                    <p:cTn id="3" fill="hold">
-                      <p:stCondLst>
-                        <p:cond delay="indefinite"/>
-                      </p:stCondLst>
-                      <p:childTnLst>
-                        <p:par>
-                          <p:cTn id="4" fill="hold">
-                            <p:stCondLst>
-                              <p:cond delay="0"/>
-                            </p:stCondLst>
-                            <p:childTnLst>
-                              <p:par>
-                                <p:cTn id="5" presetID="10" presetClass="entr" presetSubtype="0" fill="hold" nodeType="clickEffect">
-                                  <p:stCondLst>
-                                    <p:cond delay="0"/>
-                                  </p:stCondLst>
-                                  <p:childTnLst>
-                                    <p:set>
-                                      <p:cBhvr>
-                                        <p:cTn id="6" dur="1" fill="hold">
-                                          <p:stCondLst>
-                                            <p:cond delay="0"/>
-                                          </p:stCondLst>
-                                        </p:cTn>
-                                        <p:tgtEl>
-                                          <p:spTgt spid="4"/>
-                                        </p:tgtEl>
-                                        <p:attrNameLst>
-                                          <p:attrName>style.visibility</p:attrName>
-                                        </p:attrNameLst>
-                                      </p:cBhvr>
-                                      <p:to>
-                                        <p:strVal val="visible"/>
-                                      </p:to>
-                                    </p:set>
-                                    <p:animEffect transition="in" filter="fade">
-                                      <p:cBhvr>
-                                        <p:cTn id="7" dur="500"/>
-                                        <p:tgtEl>
-                                          <p:spTgt spid="4"/>
-                                        </p:tgtEl>
-                                      </p:cBhvr>
-                                    </p:animEffect>
-                                  </p:childTnLst>
-                                </p:cTn>
-                              </p:par>
-                            </p:childTnLst>
-                          </p:cTn>
-                        </p:par>
-                      </p:childTnLst>
-                    </p:cTn>
-                  </p:par>
-                </p:childTnLst>
-              </p:cTn>
-              <p:prevCondLst>
-                <p:cond evt="onPrev" delay="0">
-                  <p:tgtEl>
-                    <p:sldTgt/>
-                  </p:tgtEl>
-                </p:cond>
-              </p:prevCondLst>
-              <p:nextCondLst>
-                <p:cond evt="onNext" delay="0">
-                  <p:tgtEl>
-                    <p:sldTgt/>
-                  </p:tgtEl>
-                </p:cond>
-              </p:nextCondLst>
-            </p:seq>
-          </p:childTnLst>
-        </p:cTn>
-      </p:par>
-    </p:tnLst>
-  </p:timing>
 </p:sld>
 </file>
 

--- a/KP/Blitzlicht_Kotlin.pptx
+++ b/KP/Blitzlicht_Kotlin.pptx
@@ -5,15 +5,16 @@
     <p:sldMasterId id="2147483735" r:id="rId1"/>
   </p:sldMasterIdLst>
   <p:notesMasterIdLst>
-    <p:notesMasterId r:id="rId8"/>
+    <p:notesMasterId r:id="rId9"/>
   </p:notesMasterIdLst>
   <p:sldIdLst>
     <p:sldId id="256" r:id="rId2"/>
     <p:sldId id="299" r:id="rId3"/>
-    <p:sldId id="294" r:id="rId4"/>
-    <p:sldId id="296" r:id="rId5"/>
-    <p:sldId id="298" r:id="rId6"/>
-    <p:sldId id="300" r:id="rId7"/>
+    <p:sldId id="301" r:id="rId4"/>
+    <p:sldId id="294" r:id="rId5"/>
+    <p:sldId id="296" r:id="rId6"/>
+    <p:sldId id="298" r:id="rId7"/>
+    <p:sldId id="300" r:id="rId8"/>
   </p:sldIdLst>
   <p:sldSz cx="12192000" cy="6858000"/>
   <p:notesSz cx="6858000" cy="9144000"/>
@@ -538,7 +539,7 @@
           <a:bodyPr/>
           <a:lstStyle/>
           <a:p>
-            <a:endParaRPr lang="en-US"/>
+            <a:endParaRPr lang="en-US" dirty="0"/>
           </a:p>
         </p:txBody>
       </p:sp>
@@ -589,6 +590,121 @@
   <p:cSld>
     <p:spTree>
       <p:nvGrpSpPr>
+        <p:cNvPr id="1" name="">
+          <a:extLst>
+            <a:ext uri="{FF2B5EF4-FFF2-40B4-BE49-F238E27FC236}">
+              <a16:creationId xmlns:a16="http://schemas.microsoft.com/office/drawing/2014/main" id="{31E5792D-DD1E-7192-47EA-20736805D50B}"/>
+            </a:ext>
+          </a:extLst>
+        </p:cNvPr>
+        <p:cNvGrpSpPr/>
+        <p:nvPr/>
+      </p:nvGrpSpPr>
+      <p:grpSpPr>
+        <a:xfrm>
+          <a:off x="0" y="0"/>
+          <a:ext cx="0" cy="0"/>
+          <a:chOff x="0" y="0"/>
+          <a:chExt cx="0" cy="0"/>
+        </a:xfrm>
+      </p:grpSpPr>
+      <p:sp>
+        <p:nvSpPr>
+          <p:cNvPr id="2" name="Slide Image Placeholder 1">
+            <a:extLst>
+              <a:ext uri="{FF2B5EF4-FFF2-40B4-BE49-F238E27FC236}">
+                <a16:creationId xmlns:a16="http://schemas.microsoft.com/office/drawing/2014/main" id="{66CA98AD-6DFA-FC6C-A248-1EE44FBA7858}"/>
+              </a:ext>
+            </a:extLst>
+          </p:cNvPr>
+          <p:cNvSpPr>
+            <a:spLocks noGrp="1" noRot="1" noChangeAspect="1"/>
+          </p:cNvSpPr>
+          <p:nvPr>
+            <p:ph type="sldImg"/>
+          </p:nvPr>
+        </p:nvSpPr>
+        <p:spPr/>
+        <p:txBody>
+          <a:bodyPr/>
+          <a:lstStyle/>
+          <a:p>
+            <a:endParaRPr lang="en-US"/>
+          </a:p>
+        </p:txBody>
+      </p:sp>
+      <p:sp>
+        <p:nvSpPr>
+          <p:cNvPr id="3" name="Notes Placeholder 2">
+            <a:extLst>
+              <a:ext uri="{FF2B5EF4-FFF2-40B4-BE49-F238E27FC236}">
+                <a16:creationId xmlns:a16="http://schemas.microsoft.com/office/drawing/2014/main" id="{7563B2AB-7BB3-B8BE-3F76-B0F0E6628059}"/>
+              </a:ext>
+            </a:extLst>
+          </p:cNvPr>
+          <p:cNvSpPr>
+            <a:spLocks noGrp="1"/>
+          </p:cNvSpPr>
+          <p:nvPr>
+            <p:ph type="body" idx="1"/>
+          </p:nvPr>
+        </p:nvSpPr>
+        <p:spPr/>
+        <p:txBody>
+          <a:bodyPr/>
+          <a:lstStyle/>
+          <a:p>
+            <a:endParaRPr lang="en-US" dirty="0"/>
+          </a:p>
+        </p:txBody>
+      </p:sp>
+      <p:sp>
+        <p:nvSpPr>
+          <p:cNvPr id="4" name="Slide Number Placeholder 3">
+            <a:extLst>
+              <a:ext uri="{FF2B5EF4-FFF2-40B4-BE49-F238E27FC236}">
+                <a16:creationId xmlns:a16="http://schemas.microsoft.com/office/drawing/2014/main" id="{A0CEB475-4B84-AEE5-45FE-EFE5E01A060A}"/>
+              </a:ext>
+            </a:extLst>
+          </p:cNvPr>
+          <p:cNvSpPr>
+            <a:spLocks noGrp="1"/>
+          </p:cNvSpPr>
+          <p:nvPr>
+            <p:ph type="sldNum" sz="quarter" idx="5"/>
+          </p:nvPr>
+        </p:nvSpPr>
+        <p:spPr/>
+        <p:txBody>
+          <a:bodyPr/>
+          <a:lstStyle/>
+          <a:p>
+            <a:fld id="{60D61062-E9D8-4DAB-8118-1CF0D558F973}" type="slidenum">
+              <a:rPr lang="en-US" smtClean="0"/>
+              <a:t>3</a:t>
+            </a:fld>
+            <a:endParaRPr lang="en-US"/>
+          </a:p>
+        </p:txBody>
+      </p:sp>
+    </p:spTree>
+    <p:extLst>
+      <p:ext uri="{BB962C8B-B14F-4D97-AF65-F5344CB8AC3E}">
+        <p14:creationId xmlns:p14="http://schemas.microsoft.com/office/powerpoint/2010/main" val="83786307"/>
+      </p:ext>
+    </p:extLst>
+  </p:cSld>
+  <p:clrMapOvr>
+    <a:masterClrMapping/>
+  </p:clrMapOvr>
+</p:notes>
+</file>
+
+<file path=ppt/notesSlides/notesSlide3.xml><?xml version="1.0" encoding="utf-8"?>
+<p:notes xmlns:a="http://schemas.openxmlformats.org/drawingml/2006/main" xmlns:r="http://schemas.openxmlformats.org/officeDocument/2006/relationships" xmlns:p="http://schemas.openxmlformats.org/presentationml/2006/main">
+  <p:cSld>
+    <p:spTree>
+      <p:nvGrpSpPr>
         <p:cNvPr id="1" name=""/>
         <p:cNvGrpSpPr/>
         <p:nvPr/>
@@ -656,7 +772,7 @@
           <a:p>
             <a:fld id="{60D61062-E9D8-4DAB-8118-1CF0D558F973}" type="slidenum">
               <a:rPr lang="en-US" smtClean="0"/>
-              <a:t>3</a:t>
+              <a:t>4</a:t>
             </a:fld>
             <a:endParaRPr lang="en-US"/>
           </a:p>
@@ -675,7 +791,7 @@
 </p:notes>
 </file>
 
-<file path=ppt/notesSlides/notesSlide3.xml><?xml version="1.0" encoding="utf-8"?>
+<file path=ppt/notesSlides/notesSlide4.xml><?xml version="1.0" encoding="utf-8"?>
 <p:notes xmlns:a="http://schemas.openxmlformats.org/drawingml/2006/main" xmlns:r="http://schemas.openxmlformats.org/officeDocument/2006/relationships" xmlns:p="http://schemas.openxmlformats.org/presentationml/2006/main">
   <p:cSld>
     <p:spTree>
@@ -771,7 +887,7 @@
           <a:p>
             <a:fld id="{60D61062-E9D8-4DAB-8118-1CF0D558F973}" type="slidenum">
               <a:rPr lang="en-US" smtClean="0"/>
-              <a:t>4</a:t>
+              <a:t>5</a:t>
             </a:fld>
             <a:endParaRPr lang="en-US"/>
           </a:p>
@@ -790,7 +906,7 @@
 </p:notes>
 </file>
 
-<file path=ppt/notesSlides/notesSlide4.xml><?xml version="1.0" encoding="utf-8"?>
+<file path=ppt/notesSlides/notesSlide5.xml><?xml version="1.0" encoding="utf-8"?>
 <p:notes xmlns:a="http://schemas.openxmlformats.org/drawingml/2006/main" xmlns:r="http://schemas.openxmlformats.org/officeDocument/2006/relationships" xmlns:p="http://schemas.openxmlformats.org/presentationml/2006/main">
   <p:cSld>
     <p:spTree>
@@ -886,7 +1002,7 @@
           <a:p>
             <a:fld id="{60D61062-E9D8-4DAB-8118-1CF0D558F973}" type="slidenum">
               <a:rPr lang="en-US" smtClean="0"/>
-              <a:t>5</a:t>
+              <a:t>6</a:t>
             </a:fld>
             <a:endParaRPr lang="en-US"/>
           </a:p>
@@ -905,7 +1021,7 @@
 </p:notes>
 </file>
 
-<file path=ppt/notesSlides/notesSlide5.xml><?xml version="1.0" encoding="utf-8"?>
+<file path=ppt/notesSlides/notesSlide6.xml><?xml version="1.0" encoding="utf-8"?>
 <p:notes xmlns:a="http://schemas.openxmlformats.org/drawingml/2006/main" xmlns:r="http://schemas.openxmlformats.org/officeDocument/2006/relationships" xmlns:p="http://schemas.openxmlformats.org/presentationml/2006/main">
   <p:cSld>
     <p:spTree>
@@ -1001,7 +1117,7 @@
           <a:p>
             <a:fld id="{60D61062-E9D8-4DAB-8118-1CF0D558F973}" type="slidenum">
               <a:rPr lang="en-US" smtClean="0"/>
-              <a:t>6</a:t>
+              <a:t>7</a:t>
             </a:fld>
             <a:endParaRPr lang="en-US"/>
           </a:p>
@@ -1115,7 +1231,7 @@
           <a:effectLst/>
           <a:extLst>
             <a:ext uri="{91240B29-F687-4f45-9708-019B960494DF}">
-              <a14:hiddenLine xmlns="" xmlns:a14="http://schemas.microsoft.com/office/drawing/2010/main" w="9525">
+              <a14:hiddenLine xmlns:a14="http://schemas.microsoft.com/office/drawing/2010/main" xmlns="" w="9525">
                 <a:solidFill>
                   <a:srgbClr val="000000"/>
                 </a:solidFill>
@@ -2659,7 +2775,7 @@
           <a:ln/>
           <a:extLst>
             <a:ext uri="{91240B29-F687-4f45-9708-019B960494DF}">
-              <a14:hiddenLine xmlns="" xmlns:a14="http://schemas.microsoft.com/office/drawing/2010/main" w="9525">
+              <a14:hiddenLine xmlns:a14="http://schemas.microsoft.com/office/drawing/2010/main" xmlns="" w="9525">
                 <a:solidFill>
                   <a:srgbClr val="000000"/>
                 </a:solidFill>
@@ -2941,7 +3057,7 @@
           <a:ln/>
           <a:extLst>
             <a:ext uri="{91240B29-F687-4f45-9708-019B960494DF}">
-              <a14:hiddenLine xmlns="" xmlns:a14="http://schemas.microsoft.com/office/drawing/2010/main" w="9525">
+              <a14:hiddenLine xmlns:a14="http://schemas.microsoft.com/office/drawing/2010/main" xmlns="" w="9525">
                 <a:solidFill>
                   <a:srgbClr val="000000"/>
                 </a:solidFill>
@@ -3231,7 +3347,7 @@
           <a:ln/>
           <a:extLst>
             <a:ext uri="{91240B29-F687-4f45-9708-019B960494DF}">
-              <a14:hiddenLine xmlns="" xmlns:a14="http://schemas.microsoft.com/office/drawing/2010/main" w="9525">
+              <a14:hiddenLine xmlns:a14="http://schemas.microsoft.com/office/drawing/2010/main" xmlns="" w="9525">
                 <a:solidFill>
                   <a:srgbClr val="000000"/>
                 </a:solidFill>
@@ -3871,7 +3987,7 @@
           <a:ln/>
           <a:extLst>
             <a:ext uri="{91240B29-F687-4f45-9708-019B960494DF}">
-              <a14:hiddenLine xmlns="" xmlns:a14="http://schemas.microsoft.com/office/drawing/2010/main" w="9525">
+              <a14:hiddenLine xmlns:a14="http://schemas.microsoft.com/office/drawing/2010/main" xmlns="" w="9525">
                 <a:solidFill>
                   <a:srgbClr val="000000"/>
                 </a:solidFill>
@@ -4217,7 +4333,7 @@
           <a:ln/>
           <a:extLst>
             <a:ext uri="{91240B29-F687-4f45-9708-019B960494DF}">
-              <a14:hiddenLine xmlns="" xmlns:a14="http://schemas.microsoft.com/office/drawing/2010/main" w="9525">
+              <a14:hiddenLine xmlns:a14="http://schemas.microsoft.com/office/drawing/2010/main" xmlns="" w="9525">
                 <a:solidFill>
                   <a:srgbClr val="000000"/>
                 </a:solidFill>
@@ -4701,7 +4817,7 @@
           <a:ln/>
           <a:extLst>
             <a:ext uri="{91240B29-F687-4f45-9708-019B960494DF}">
-              <a14:hiddenLine xmlns="" xmlns:a14="http://schemas.microsoft.com/office/drawing/2010/main" w="9525">
+              <a14:hiddenLine xmlns:a14="http://schemas.microsoft.com/office/drawing/2010/main" xmlns="" w="9525">
                 <a:solidFill>
                   <a:srgbClr val="000000"/>
                 </a:solidFill>
@@ -5137,7 +5253,7 @@
           <a:ln/>
           <a:extLst>
             <a:ext uri="{91240B29-F687-4f45-9708-019B960494DF}">
-              <a14:hiddenLine xmlns="" xmlns:a14="http://schemas.microsoft.com/office/drawing/2010/main" w="9525">
+              <a14:hiddenLine xmlns:a14="http://schemas.microsoft.com/office/drawing/2010/main" xmlns="" w="9525">
                 <a:solidFill>
                   <a:srgbClr val="000000"/>
                 </a:solidFill>
@@ -6401,16 +6517,16 @@
           <a:lstStyle/>
           <a:p>
             <a:r>
-              <a:rPr lang="en-US"/>
+              <a:rPr lang="en-US" dirty="0" err="1"/>
               <a:t>Programmiersprache</a:t>
             </a:r>
             <a:br>
-              <a:rPr lang="en-US"/>
+              <a:rPr lang="en-US" dirty="0"/>
             </a:br>
             <a:r>
-              <a:rPr lang="en-US">
+              <a:rPr lang="en-US" dirty="0">
                 <a:solidFill>
-                  <a:schemeClr val="accent3"/>
+                  <a:srgbClr val="212121"/>
                 </a:solidFill>
               </a:rPr>
               <a:t>Kotlin</a:t>
@@ -6550,7 +6666,7 @@
           <a:lstStyle/>
           <a:p>
             <a:pPr algn="ctr"/>
-            <a:endParaRPr lang="en-US"/>
+            <a:endParaRPr lang="en-US" dirty="0"/>
           </a:p>
         </p:txBody>
       </p:sp>
@@ -6707,8 +6823,8 @@
         </p:nvSpPr>
         <p:spPr>
           <a:xfrm>
-            <a:off x="2014502" y="1719633"/>
-            <a:ext cx="8735648" cy="3693319"/>
+            <a:off x="2145768" y="2690336"/>
+            <a:ext cx="8735648" cy="1754326"/>
           </a:xfrm>
           <a:prstGeom prst="rect">
             <a:avLst/>
@@ -6726,230 +6842,93 @@
               <a:buChar char="•"/>
             </a:pPr>
             <a:r>
-              <a:rPr lang="en-US"/>
-              <a:t>Kotlin is an open-source general purpose programming language, developed and officially released by Jetbrains in 2016</a:t>
-            </a:r>
-          </a:p>
-          <a:p>
-            <a:endParaRPr lang="en-US"/>
+              <a:rPr lang="en-US" dirty="0"/>
+              <a:t>Kotlin was developed by </a:t>
+            </a:r>
+            <a:r>
+              <a:rPr lang="en-US" dirty="0" err="1">
+                <a:solidFill>
+                  <a:schemeClr val="accent2"/>
+                </a:solidFill>
+              </a:rPr>
+              <a:t>Jetbrains</a:t>
+            </a:r>
+            <a:r>
+              <a:rPr lang="en-US" dirty="0"/>
+              <a:t> (</a:t>
+            </a:r>
+            <a:r>
+              <a:rPr lang="en-US" dirty="0" err="1"/>
+              <a:t>Intellj</a:t>
+            </a:r>
+            <a:r>
+              <a:rPr lang="en-US" dirty="0"/>
+              <a:t> Idea, Rider, Goland) and first released in 2011</a:t>
+            </a:r>
           </a:p>
           <a:p>
             <a:pPr marL="285750" indent="-285750">
               <a:buFont typeface="Arial" panose="020B0604020202020204" pitchFamily="34" charset="0"/>
               <a:buChar char="•"/>
             </a:pPr>
-            <a:r>
-              <a:rPr lang="en-US"/>
-              <a:t>Data types as expected: numbers (signed, unsigned), Boolean, Character, </a:t>
-            </a:r>
-          </a:p>
-          <a:p>
-            <a:r>
-              <a:rPr lang="en-US"/>
-              <a:t>							String, Array (also Collections)</a:t>
-            </a:r>
-          </a:p>
-          <a:p>
-            <a:r>
-              <a:rPr lang="en-US"/>
-              <a:t>							</a:t>
-            </a:r>
-            <a:r>
-              <a:rPr lang="en-US" u="sng"/>
-              <a:t>additionally</a:t>
-            </a:r>
-            <a:r>
-              <a:rPr lang="en-US"/>
-              <a:t>: </a:t>
-            </a:r>
-            <a:r>
-              <a:rPr lang="en-US">
-                <a:solidFill>
-                  <a:schemeClr val="accent3"/>
-                </a:solidFill>
-              </a:rPr>
-              <a:t>Any</a:t>
-            </a:r>
-            <a:r>
-              <a:rPr lang="en-US"/>
-              <a:t>, </a:t>
-            </a:r>
-            <a:r>
-              <a:rPr lang="en-US">
-                <a:solidFill>
-                  <a:schemeClr val="accent1"/>
-                </a:solidFill>
-              </a:rPr>
-              <a:t>Nothing</a:t>
-            </a:r>
-            <a:r>
-              <a:rPr lang="en-US"/>
-              <a:t>, </a:t>
-            </a:r>
-            <a:r>
-              <a:rPr lang="en-US">
-                <a:solidFill>
-                  <a:srgbClr val="0070C0"/>
-                </a:solidFill>
-              </a:rPr>
-              <a:t>Unit</a:t>
-            </a:r>
-          </a:p>
-          <a:p>
-            <a:endParaRPr lang="en-US">
-              <a:solidFill>
-                <a:srgbClr val="92D050"/>
-              </a:solidFill>
-            </a:endParaRPr>
+            <a:endParaRPr lang="en-US" dirty="0"/>
           </a:p>
           <a:p>
             <a:pPr marL="285750" indent="-285750">
               <a:buFont typeface="Arial" panose="020B0604020202020204" pitchFamily="34" charset="0"/>
               <a:buChar char="•"/>
             </a:pPr>
-            <a:endParaRPr lang="en-US">
-              <a:solidFill>
-                <a:srgbClr val="92D050"/>
-              </a:solidFill>
-            </a:endParaRPr>
-          </a:p>
-          <a:p>
-            <a:pPr marL="285750" indent="-285750">
-              <a:buFont typeface="Arial" panose="020B0604020202020204" pitchFamily="34" charset="0"/>
-              <a:buChar char="•"/>
-            </a:pPr>
-            <a:r>
-              <a:rPr lang="en-US">
+            <a:r>
+              <a:rPr lang="en-US" dirty="0"/>
+              <a:t>Goal: </a:t>
+            </a:r>
+            <a:r>
+              <a:rPr lang="en-US" dirty="0">
                 <a:solidFill>
-                  <a:schemeClr val="accent3"/>
+                  <a:srgbClr val="00B0F0"/>
                 </a:solidFill>
               </a:rPr>
-              <a:t>Any:</a:t>
-            </a:r>
-            <a:r>
-              <a:rPr lang="en-US">
-                <a:solidFill>
-                  <a:srgbClr val="92D050"/>
-                </a:solidFill>
-              </a:rPr>
-              <a:t> </a:t>
-            </a:r>
-            <a:r>
-              <a:rPr lang="en-US"/>
-              <a:t>superclass of all classes, like golang </a:t>
-            </a:r>
-            <a:r>
-              <a:rPr lang="en-US">
-                <a:solidFill>
-                  <a:schemeClr val="accent3"/>
-                </a:solidFill>
-              </a:rPr>
-              <a:t>any</a:t>
-            </a:r>
-          </a:p>
-          <a:p>
-            <a:pPr marL="285750" indent="-285750">
-              <a:buFont typeface="Arial" panose="020B0604020202020204" pitchFamily="34" charset="0"/>
-              <a:buChar char="•"/>
-            </a:pPr>
-            <a:r>
-              <a:rPr lang="en-US">
-                <a:solidFill>
-                  <a:schemeClr val="accent1"/>
-                </a:solidFill>
-              </a:rPr>
-              <a:t>Nothing: </a:t>
-            </a:r>
-            <a:r>
-              <a:rPr lang="en-US"/>
-              <a:t>class with </a:t>
-            </a:r>
-            <a:r>
-              <a:rPr lang="en-US">
-                <a:solidFill>
-                  <a:schemeClr val="accent1"/>
-                </a:solidFill>
-              </a:rPr>
-              <a:t>no instances</a:t>
-            </a:r>
-            <a:r>
-              <a:rPr lang="en-US"/>
-              <a:t>, will always </a:t>
-            </a:r>
-            <a:r>
-              <a:rPr lang="en-US">
-                <a:solidFill>
-                  <a:schemeClr val="accent1"/>
-                </a:solidFill>
-              </a:rPr>
-              <a:t>throw</a:t>
-            </a:r>
-            <a:r>
-              <a:rPr lang="en-US"/>
-              <a:t> </a:t>
-            </a:r>
-            <a:r>
-              <a:rPr lang="en-US">
-                <a:solidFill>
-                  <a:schemeClr val="accent1"/>
-                </a:solidFill>
-              </a:rPr>
-              <a:t>exception</a:t>
-            </a:r>
-            <a:r>
-              <a:rPr lang="en-US"/>
-              <a:t> as return type</a:t>
-            </a:r>
-          </a:p>
-          <a:p>
-            <a:pPr marL="285750" indent="-285750">
-              <a:buFont typeface="Arial" panose="020B0604020202020204" pitchFamily="34" charset="0"/>
-              <a:buChar char="•"/>
-            </a:pPr>
-            <a:r>
-              <a:rPr lang="en-US">
-                <a:solidFill>
-                  <a:srgbClr val="0070C0"/>
-                </a:solidFill>
-              </a:rPr>
-              <a:t>Unit: </a:t>
-            </a:r>
-            <a:r>
-              <a:rPr lang="en-US"/>
-              <a:t>corresponds to </a:t>
-            </a:r>
-            <a:r>
-              <a:rPr lang="en-US">
-                <a:solidFill>
-                  <a:srgbClr val="0070C0"/>
-                </a:solidFill>
-              </a:rPr>
-              <a:t>void</a:t>
-            </a:r>
-            <a:r>
-              <a:rPr lang="en-US"/>
-              <a:t> type</a:t>
-            </a:r>
-          </a:p>
-          <a:p>
-            <a:pPr marL="285750" indent="-285750">
-              <a:buFont typeface="Arial" panose="020B0604020202020204" pitchFamily="34" charset="0"/>
-              <a:buChar char="•"/>
-            </a:pPr>
-            <a:endParaRPr lang="en-US">
-              <a:solidFill>
-                <a:srgbClr val="FFFF00"/>
-              </a:solidFill>
-            </a:endParaRPr>
-          </a:p>
-          <a:p>
-            <a:pPr marL="285750" indent="-285750">
-              <a:buFont typeface="Arial" panose="020B0604020202020204" pitchFamily="34" charset="0"/>
-              <a:buChar char="•"/>
-            </a:pPr>
-            <a:r>
-              <a:rPr lang="en-US"/>
-              <a:t>no semicolons at end of code lines</a:t>
+              <a:t>concise and expressive</a:t>
+            </a:r>
+            <a:r>
+              <a:rPr lang="en-US" dirty="0"/>
+              <a:t>, interoperable with Java, compiles as quickly, introduction of new constructs such as higher order functions -&gt; a better Java</a:t>
+            </a:r>
+          </a:p>
+        </p:txBody>
+      </p:sp>
+      <p:sp>
+        <p:nvSpPr>
+          <p:cNvPr id="3" name="TextBox 2">
+            <a:extLst>
+              <a:ext uri="{FF2B5EF4-FFF2-40B4-BE49-F238E27FC236}">
+                <a16:creationId xmlns:a16="http://schemas.microsoft.com/office/drawing/2014/main" id="{B40C1AF3-60B0-68B6-3A02-07697200EAD3}"/>
+              </a:ext>
+            </a:extLst>
+          </p:cNvPr>
+          <p:cNvSpPr txBox="1"/>
+          <p:nvPr/>
+        </p:nvSpPr>
+        <p:spPr>
+          <a:xfrm>
+            <a:off x="3784085" y="6350001"/>
+            <a:ext cx="8159262" cy="246221"/>
+          </a:xfrm>
+          <a:prstGeom prst="rect">
+            <a:avLst/>
+          </a:prstGeom>
+          <a:noFill/>
+        </p:spPr>
+        <p:txBody>
+          <a:bodyPr wrap="square" rtlCol="0">
+            <a:spAutoFit/>
+          </a:bodyPr>
+          <a:lstStyle/>
+          <a:p>
+            <a:pPr algn="r"/>
+            <a:r>
+              <a:rPr lang="en-US" sz="1000" dirty="0"/>
+              <a:t>Source: https://www.oreilly.com/library/view/kotlin-for-enterprise/9781788997270/ea4ec584-db64-4026-89a8-2086301eb9c5.xhtml</a:t>
             </a:r>
           </a:p>
         </p:txBody>
@@ -7051,6 +7030,623 @@
 </file>
 
 <file path=ppt/slides/slide3.xml><?xml version="1.0" encoding="utf-8"?>
+<p:sld xmlns:a="http://schemas.openxmlformats.org/drawingml/2006/main" xmlns:r="http://schemas.openxmlformats.org/officeDocument/2006/relationships" xmlns:p="http://schemas.openxmlformats.org/presentationml/2006/main" showMasterSp="0">
+  <p:cSld>
+    <p:bg>
+      <p:bgPr>
+        <a:pattFill prst="wdUpDiag">
+          <a:fgClr>
+            <a:schemeClr val="bg2"/>
+          </a:fgClr>
+          <a:bgClr>
+            <a:schemeClr val="bg1"/>
+          </a:bgClr>
+        </a:pattFill>
+        <a:effectLst/>
+      </p:bgPr>
+    </p:bg>
+    <p:spTree>
+      <p:nvGrpSpPr>
+        <p:cNvPr id="1" name="">
+          <a:extLst>
+            <a:ext uri="{FF2B5EF4-FFF2-40B4-BE49-F238E27FC236}">
+              <a16:creationId xmlns:a16="http://schemas.microsoft.com/office/drawing/2014/main" id="{1A5C4041-F6D9-7C3C-2898-3CCA3A8320E2}"/>
+            </a:ext>
+          </a:extLst>
+        </p:cNvPr>
+        <p:cNvGrpSpPr/>
+        <p:nvPr/>
+      </p:nvGrpSpPr>
+      <p:grpSpPr>
+        <a:xfrm>
+          <a:off x="0" y="0"/>
+          <a:ext cx="0" cy="0"/>
+          <a:chOff x="0" y="0"/>
+          <a:chExt cx="0" cy="0"/>
+        </a:xfrm>
+      </p:grpSpPr>
+      <p:sp>
+        <p:nvSpPr>
+          <p:cNvPr id="2" name="Rectangle 1">
+            <a:extLst>
+              <a:ext uri="{FF2B5EF4-FFF2-40B4-BE49-F238E27FC236}">
+                <a16:creationId xmlns:a16="http://schemas.microsoft.com/office/drawing/2014/main" id="{E0E7BB14-934B-92A7-65B1-4819D908516C}"/>
+              </a:ext>
+            </a:extLst>
+          </p:cNvPr>
+          <p:cNvSpPr/>
+          <p:nvPr/>
+        </p:nvSpPr>
+        <p:spPr>
+          <a:xfrm>
+            <a:off x="248652" y="233413"/>
+            <a:ext cx="11694695" cy="6391174"/>
+          </a:xfrm>
+          <a:prstGeom prst="rect">
+            <a:avLst/>
+          </a:prstGeom>
+          <a:solidFill>
+            <a:srgbClr val="212121"/>
+          </a:solidFill>
+          <a:ln>
+            <a:solidFill>
+              <a:srgbClr val="212121"/>
+            </a:solidFill>
+          </a:ln>
+        </p:spPr>
+        <p:style>
+          <a:lnRef idx="2">
+            <a:schemeClr val="dk1">
+              <a:shade val="15000"/>
+            </a:schemeClr>
+          </a:lnRef>
+          <a:fillRef idx="1">
+            <a:schemeClr val="dk1"/>
+          </a:fillRef>
+          <a:effectRef idx="0">
+            <a:schemeClr val="dk1"/>
+          </a:effectRef>
+          <a:fontRef idx="minor">
+            <a:schemeClr val="lt1"/>
+          </a:fontRef>
+        </p:style>
+        <p:txBody>
+          <a:bodyPr rtlCol="0" anchor="ctr"/>
+          <a:lstStyle/>
+          <a:p>
+            <a:pPr algn="ctr"/>
+            <a:endParaRPr lang="en-US"/>
+          </a:p>
+        </p:txBody>
+      </p:sp>
+      <p:grpSp>
+        <p:nvGrpSpPr>
+          <p:cNvPr id="14" name="Group 13">
+            <a:extLst>
+              <a:ext uri="{FF2B5EF4-FFF2-40B4-BE49-F238E27FC236}">
+                <a16:creationId xmlns:a16="http://schemas.microsoft.com/office/drawing/2014/main" id="{3B738544-8AF2-BED1-0353-12C45BC6A743}"/>
+              </a:ext>
+            </a:extLst>
+          </p:cNvPr>
+          <p:cNvGrpSpPr/>
+          <p:nvPr/>
+        </p:nvGrpSpPr>
+        <p:grpSpPr>
+          <a:xfrm>
+            <a:off x="85444" y="101035"/>
+            <a:ext cx="4120648" cy="406964"/>
+            <a:chOff x="689746" y="1254252"/>
+            <a:chExt cx="10812505" cy="1415319"/>
+          </a:xfrm>
+        </p:grpSpPr>
+        <p:sp>
+          <p:nvSpPr>
+            <p:cNvPr id="15" name="Rectangle 14">
+              <a:extLst>
+                <a:ext uri="{FF2B5EF4-FFF2-40B4-BE49-F238E27FC236}">
+                  <a16:creationId xmlns:a16="http://schemas.microsoft.com/office/drawing/2014/main" id="{219FE454-ED0F-65D7-7C1C-402582789C1A}"/>
+                </a:ext>
+              </a:extLst>
+            </p:cNvPr>
+            <p:cNvSpPr/>
+            <p:nvPr/>
+          </p:nvSpPr>
+          <p:spPr>
+            <a:xfrm>
+              <a:off x="689746" y="1254252"/>
+              <a:ext cx="10812505" cy="1415319"/>
+            </a:xfrm>
+            <a:prstGeom prst="rect">
+              <a:avLst/>
+            </a:prstGeom>
+            <a:pattFill prst="wdDnDiag">
+              <a:fgClr>
+                <a:schemeClr val="accent1"/>
+              </a:fgClr>
+              <a:bgClr>
+                <a:schemeClr val="bg1"/>
+              </a:bgClr>
+            </a:pattFill>
+          </p:spPr>
+          <p:style>
+            <a:lnRef idx="2">
+              <a:schemeClr val="accent1">
+                <a:shade val="15000"/>
+              </a:schemeClr>
+            </a:lnRef>
+            <a:fillRef idx="1">
+              <a:schemeClr val="accent1"/>
+            </a:fillRef>
+            <a:effectRef idx="0">
+              <a:schemeClr val="accent1"/>
+            </a:effectRef>
+            <a:fontRef idx="minor">
+              <a:schemeClr val="lt1"/>
+            </a:fontRef>
+          </p:style>
+          <p:txBody>
+            <a:bodyPr rtlCol="0" anchor="ctr"/>
+            <a:lstStyle/>
+            <a:p>
+              <a:pPr algn="ctr"/>
+              <a:endParaRPr lang="en-US" sz="1800">
+                <a:effectLst/>
+                <a:latin typeface="Cascadia Code" panose="020B0609020000020004" pitchFamily="49" charset="0"/>
+                <a:ea typeface="Times New Roman" panose="02020603050405020304" pitchFamily="18" charset="0"/>
+                <a:cs typeface="Times New Roman" panose="02020603050405020304" pitchFamily="18" charset="0"/>
+              </a:endParaRPr>
+            </a:p>
+          </p:txBody>
+        </p:sp>
+        <p:sp>
+          <p:nvSpPr>
+            <p:cNvPr id="16" name="Rectangle 15">
+              <a:extLst>
+                <a:ext uri="{FF2B5EF4-FFF2-40B4-BE49-F238E27FC236}">
+                  <a16:creationId xmlns:a16="http://schemas.microsoft.com/office/drawing/2014/main" id="{67DFD996-AA42-8EB8-CFDD-DD5A86502C54}"/>
+                </a:ext>
+              </a:extLst>
+            </p:cNvPr>
+            <p:cNvSpPr/>
+            <p:nvPr/>
+          </p:nvSpPr>
+          <p:spPr>
+            <a:xfrm>
+              <a:off x="846992" y="1390635"/>
+              <a:ext cx="10498015" cy="1116623"/>
+            </a:xfrm>
+            <a:prstGeom prst="rect">
+              <a:avLst/>
+            </a:prstGeom>
+          </p:spPr>
+          <p:style>
+            <a:lnRef idx="2">
+              <a:schemeClr val="accent1">
+                <a:shade val="15000"/>
+              </a:schemeClr>
+            </a:lnRef>
+            <a:fillRef idx="1">
+              <a:schemeClr val="accent1"/>
+            </a:fillRef>
+            <a:effectRef idx="0">
+              <a:schemeClr val="accent1"/>
+            </a:effectRef>
+            <a:fontRef idx="minor">
+              <a:schemeClr val="lt1"/>
+            </a:fontRef>
+          </p:style>
+          <p:txBody>
+            <a:bodyPr rtlCol="0" anchor="ctr"/>
+            <a:lstStyle/>
+            <a:p>
+              <a:pPr algn="ctr"/>
+              <a:r>
+                <a:rPr lang="en-US" sz="1400" b="1" dirty="0">
+                  <a:latin typeface="Cascadia Code" panose="020B0609020000020004" pitchFamily="49" charset="0"/>
+                  <a:ea typeface="Times New Roman" panose="02020603050405020304" pitchFamily="18" charset="0"/>
+                  <a:cs typeface="Times New Roman" panose="02020603050405020304" pitchFamily="18" charset="0"/>
+                </a:rPr>
+                <a:t>Data Types</a:t>
+              </a:r>
+              <a:endParaRPr lang="en-US" sz="1400" dirty="0">
+                <a:effectLst/>
+                <a:latin typeface="Cascadia Code" panose="020B0609020000020004" pitchFamily="49" charset="0"/>
+                <a:ea typeface="Times New Roman" panose="02020603050405020304" pitchFamily="18" charset="0"/>
+                <a:cs typeface="Times New Roman" panose="02020603050405020304" pitchFamily="18" charset="0"/>
+              </a:endParaRPr>
+            </a:p>
+          </p:txBody>
+        </p:sp>
+      </p:grpSp>
+      <p:sp>
+        <p:nvSpPr>
+          <p:cNvPr id="17" name="TextBox 16">
+            <a:extLst>
+              <a:ext uri="{FF2B5EF4-FFF2-40B4-BE49-F238E27FC236}">
+                <a16:creationId xmlns:a16="http://schemas.microsoft.com/office/drawing/2014/main" id="{3E44CEC9-A0E0-9D0E-E382-E6FFDE9675C8}"/>
+              </a:ext>
+            </a:extLst>
+          </p:cNvPr>
+          <p:cNvSpPr txBox="1"/>
+          <p:nvPr/>
+        </p:nvSpPr>
+        <p:spPr>
+          <a:xfrm>
+            <a:off x="1728175" y="2135132"/>
+            <a:ext cx="8735648" cy="2862322"/>
+          </a:xfrm>
+          <a:prstGeom prst="rect">
+            <a:avLst/>
+          </a:prstGeom>
+          <a:noFill/>
+        </p:spPr>
+        <p:txBody>
+          <a:bodyPr wrap="square" rtlCol="0">
+            <a:spAutoFit/>
+          </a:bodyPr>
+          <a:lstStyle/>
+          <a:p>
+            <a:pPr marL="285750" indent="-285750">
+              <a:buFont typeface="Arial" panose="020B0604020202020204" pitchFamily="34" charset="0"/>
+              <a:buChar char="•"/>
+            </a:pPr>
+            <a:r>
+              <a:rPr lang="en-US" dirty="0"/>
+              <a:t>Data types as expected: numbers (signed, unsigned), Boolean, Character, </a:t>
+            </a:r>
+          </a:p>
+          <a:p>
+            <a:r>
+              <a:rPr lang="en-US" dirty="0"/>
+              <a:t>							String, Array (also Collections)</a:t>
+            </a:r>
+          </a:p>
+          <a:p>
+            <a:r>
+              <a:rPr lang="en-US" dirty="0"/>
+              <a:t>							</a:t>
+            </a:r>
+            <a:r>
+              <a:rPr lang="en-US" u="sng" dirty="0"/>
+              <a:t>additionally</a:t>
+            </a:r>
+            <a:r>
+              <a:rPr lang="en-US" dirty="0"/>
+              <a:t>: </a:t>
+            </a:r>
+            <a:r>
+              <a:rPr lang="en-US" dirty="0">
+                <a:solidFill>
+                  <a:schemeClr val="accent3"/>
+                </a:solidFill>
+              </a:rPr>
+              <a:t>Any</a:t>
+            </a:r>
+            <a:r>
+              <a:rPr lang="en-US" dirty="0"/>
+              <a:t>, </a:t>
+            </a:r>
+            <a:r>
+              <a:rPr lang="en-US" dirty="0">
+                <a:solidFill>
+                  <a:schemeClr val="accent1"/>
+                </a:solidFill>
+              </a:rPr>
+              <a:t>Nothing</a:t>
+            </a:r>
+            <a:r>
+              <a:rPr lang="en-US" dirty="0"/>
+              <a:t>, </a:t>
+            </a:r>
+            <a:r>
+              <a:rPr lang="en-US" dirty="0">
+                <a:solidFill>
+                  <a:srgbClr val="0070C0"/>
+                </a:solidFill>
+              </a:rPr>
+              <a:t>Unit</a:t>
+            </a:r>
+          </a:p>
+          <a:p>
+            <a:endParaRPr lang="en-US" dirty="0">
+              <a:solidFill>
+                <a:srgbClr val="92D050"/>
+              </a:solidFill>
+            </a:endParaRPr>
+          </a:p>
+          <a:p>
+            <a:pPr marL="285750" indent="-285750">
+              <a:buFont typeface="Arial" panose="020B0604020202020204" pitchFamily="34" charset="0"/>
+              <a:buChar char="•"/>
+            </a:pPr>
+            <a:endParaRPr lang="en-US" dirty="0">
+              <a:solidFill>
+                <a:srgbClr val="92D050"/>
+              </a:solidFill>
+            </a:endParaRPr>
+          </a:p>
+          <a:p>
+            <a:pPr marL="285750" indent="-285750">
+              <a:buFont typeface="Arial" panose="020B0604020202020204" pitchFamily="34" charset="0"/>
+              <a:buChar char="•"/>
+            </a:pPr>
+            <a:r>
+              <a:rPr lang="en-US" dirty="0">
+                <a:solidFill>
+                  <a:schemeClr val="accent3"/>
+                </a:solidFill>
+              </a:rPr>
+              <a:t>Any:</a:t>
+            </a:r>
+            <a:r>
+              <a:rPr lang="en-US" dirty="0">
+                <a:solidFill>
+                  <a:srgbClr val="92D050"/>
+                </a:solidFill>
+              </a:rPr>
+              <a:t> </a:t>
+            </a:r>
+            <a:r>
+              <a:rPr lang="en-US" dirty="0"/>
+              <a:t>superclass of all classes, like </a:t>
+            </a:r>
+            <a:r>
+              <a:rPr lang="en-US" dirty="0" err="1"/>
+              <a:t>golang</a:t>
+            </a:r>
+            <a:r>
+              <a:rPr lang="en-US" dirty="0"/>
+              <a:t> </a:t>
+            </a:r>
+            <a:r>
+              <a:rPr lang="en-US" dirty="0">
+                <a:solidFill>
+                  <a:schemeClr val="accent3"/>
+                </a:solidFill>
+              </a:rPr>
+              <a:t>any</a:t>
+            </a:r>
+          </a:p>
+          <a:p>
+            <a:pPr marL="285750" indent="-285750">
+              <a:buFont typeface="Arial" panose="020B0604020202020204" pitchFamily="34" charset="0"/>
+              <a:buChar char="•"/>
+            </a:pPr>
+            <a:r>
+              <a:rPr lang="en-US" dirty="0">
+                <a:solidFill>
+                  <a:schemeClr val="accent1"/>
+                </a:solidFill>
+              </a:rPr>
+              <a:t>Nothing: </a:t>
+            </a:r>
+            <a:r>
+              <a:rPr lang="en-US" dirty="0"/>
+              <a:t>class with </a:t>
+            </a:r>
+            <a:r>
+              <a:rPr lang="en-US" dirty="0">
+                <a:solidFill>
+                  <a:schemeClr val="accent1"/>
+                </a:solidFill>
+              </a:rPr>
+              <a:t>no instances</a:t>
+            </a:r>
+            <a:r>
+              <a:rPr lang="en-US" dirty="0"/>
+              <a:t>, will always </a:t>
+            </a:r>
+            <a:r>
+              <a:rPr lang="en-US" dirty="0">
+                <a:solidFill>
+                  <a:schemeClr val="accent1"/>
+                </a:solidFill>
+              </a:rPr>
+              <a:t>throw</a:t>
+            </a:r>
+            <a:r>
+              <a:rPr lang="en-US" dirty="0"/>
+              <a:t> </a:t>
+            </a:r>
+            <a:r>
+              <a:rPr lang="en-US" dirty="0">
+                <a:solidFill>
+                  <a:schemeClr val="accent1"/>
+                </a:solidFill>
+              </a:rPr>
+              <a:t>exception</a:t>
+            </a:r>
+            <a:r>
+              <a:rPr lang="en-US" dirty="0"/>
+              <a:t> as return type</a:t>
+            </a:r>
+          </a:p>
+          <a:p>
+            <a:pPr marL="285750" indent="-285750">
+              <a:buFont typeface="Arial" panose="020B0604020202020204" pitchFamily="34" charset="0"/>
+              <a:buChar char="•"/>
+            </a:pPr>
+            <a:r>
+              <a:rPr lang="en-US" dirty="0">
+                <a:solidFill>
+                  <a:srgbClr val="0070C0"/>
+                </a:solidFill>
+              </a:rPr>
+              <a:t>Unit: </a:t>
+            </a:r>
+            <a:r>
+              <a:rPr lang="en-US" dirty="0"/>
+              <a:t>corresponds to </a:t>
+            </a:r>
+            <a:r>
+              <a:rPr lang="en-US" dirty="0">
+                <a:solidFill>
+                  <a:srgbClr val="0070C0"/>
+                </a:solidFill>
+              </a:rPr>
+              <a:t>void</a:t>
+            </a:r>
+            <a:r>
+              <a:rPr lang="en-US" dirty="0"/>
+              <a:t> type</a:t>
+            </a:r>
+          </a:p>
+          <a:p>
+            <a:pPr marL="285750" indent="-285750">
+              <a:buFont typeface="Arial" panose="020B0604020202020204" pitchFamily="34" charset="0"/>
+              <a:buChar char="•"/>
+            </a:pPr>
+            <a:endParaRPr lang="en-US" dirty="0">
+              <a:solidFill>
+                <a:srgbClr val="FFFF00"/>
+              </a:solidFill>
+            </a:endParaRPr>
+          </a:p>
+          <a:p>
+            <a:pPr marL="285750" indent="-285750">
+              <a:buFont typeface="Arial" panose="020B0604020202020204" pitchFamily="34" charset="0"/>
+              <a:buChar char="•"/>
+            </a:pPr>
+            <a:r>
+              <a:rPr lang="en-US" dirty="0"/>
+              <a:t>no semicolons at end of code lines</a:t>
+            </a:r>
+          </a:p>
+        </p:txBody>
+      </p:sp>
+      <p:sp>
+        <p:nvSpPr>
+          <p:cNvPr id="3" name="TextBox 2">
+            <a:extLst>
+              <a:ext uri="{FF2B5EF4-FFF2-40B4-BE49-F238E27FC236}">
+                <a16:creationId xmlns:a16="http://schemas.microsoft.com/office/drawing/2014/main" id="{805BA60F-AE18-6C46-4740-2114331F174B}"/>
+              </a:ext>
+            </a:extLst>
+          </p:cNvPr>
+          <p:cNvSpPr txBox="1"/>
+          <p:nvPr/>
+        </p:nvSpPr>
+        <p:spPr>
+          <a:xfrm>
+            <a:off x="3784085" y="6350001"/>
+            <a:ext cx="8159262" cy="246221"/>
+          </a:xfrm>
+          <a:prstGeom prst="rect">
+            <a:avLst/>
+          </a:prstGeom>
+          <a:noFill/>
+        </p:spPr>
+        <p:txBody>
+          <a:bodyPr wrap="square" rtlCol="0">
+            <a:spAutoFit/>
+          </a:bodyPr>
+          <a:lstStyle/>
+          <a:p>
+            <a:pPr algn="r"/>
+            <a:r>
+              <a:rPr lang="en-US" sz="1000" dirty="0"/>
+              <a:t>Source: https://kotlinlang.org/docs/types-overview.html</a:t>
+            </a:r>
+          </a:p>
+        </p:txBody>
+      </p:sp>
+    </p:spTree>
+    <p:extLst>
+      <p:ext uri="{BB962C8B-B14F-4D97-AF65-F5344CB8AC3E}">
+        <p14:creationId xmlns:p14="http://schemas.microsoft.com/office/powerpoint/2010/main" val="4286861400"/>
+      </p:ext>
+    </p:extLst>
+  </p:cSld>
+  <p:clrMapOvr>
+    <a:masterClrMapping/>
+  </p:clrMapOvr>
+  <p:timing>
+    <p:tnLst>
+      <p:par>
+        <p:cTn id="1" dur="indefinite" restart="never" nodeType="tmRoot">
+          <p:childTnLst>
+            <p:seq concurrent="1" nextAc="seek">
+              <p:cTn id="2" dur="indefinite" nodeType="mainSeq">
+                <p:childTnLst>
+                  <p:par>
+                    <p:cTn id="3" fill="hold">
+                      <p:stCondLst>
+                        <p:cond delay="indefinite"/>
+                      </p:stCondLst>
+                      <p:childTnLst>
+                        <p:par>
+                          <p:cTn id="4" fill="hold">
+                            <p:stCondLst>
+                              <p:cond delay="0"/>
+                            </p:stCondLst>
+                            <p:childTnLst>
+                              <p:par>
+                                <p:cTn id="5" presetID="10" presetClass="entr" presetSubtype="0" fill="hold" nodeType="clickEffect">
+                                  <p:stCondLst>
+                                    <p:cond delay="0"/>
+                                  </p:stCondLst>
+                                  <p:childTnLst>
+                                    <p:set>
+                                      <p:cBhvr>
+                                        <p:cTn id="6" dur="1" fill="hold">
+                                          <p:stCondLst>
+                                            <p:cond delay="0"/>
+                                          </p:stCondLst>
+                                        </p:cTn>
+                                        <p:tgtEl>
+                                          <p:spTgt spid="14"/>
+                                        </p:tgtEl>
+                                        <p:attrNameLst>
+                                          <p:attrName>style.visibility</p:attrName>
+                                        </p:attrNameLst>
+                                      </p:cBhvr>
+                                      <p:to>
+                                        <p:strVal val="visible"/>
+                                      </p:to>
+                                    </p:set>
+                                    <p:animEffect transition="in" filter="fade">
+                                      <p:cBhvr>
+                                        <p:cTn id="7" dur="500"/>
+                                        <p:tgtEl>
+                                          <p:spTgt spid="14"/>
+                                        </p:tgtEl>
+                                      </p:cBhvr>
+                                    </p:animEffect>
+                                  </p:childTnLst>
+                                </p:cTn>
+                              </p:par>
+                            </p:childTnLst>
+                          </p:cTn>
+                        </p:par>
+                      </p:childTnLst>
+                    </p:cTn>
+                  </p:par>
+                </p:childTnLst>
+              </p:cTn>
+              <p:prevCondLst>
+                <p:cond evt="onPrev" delay="0">
+                  <p:tgtEl>
+                    <p:sldTgt/>
+                  </p:tgtEl>
+                </p:cond>
+              </p:prevCondLst>
+              <p:nextCondLst>
+                <p:cond evt="onNext" delay="0">
+                  <p:tgtEl>
+                    <p:sldTgt/>
+                  </p:tgtEl>
+                </p:cond>
+              </p:nextCondLst>
+            </p:seq>
+          </p:childTnLst>
+        </p:cTn>
+      </p:par>
+    </p:tnLst>
+  </p:timing>
+</p:sld>
+</file>
+
+<file path=ppt/slides/slide4.xml><?xml version="1.0" encoding="utf-8"?>
 <p:sld xmlns:a="http://schemas.openxmlformats.org/drawingml/2006/main" xmlns:r="http://schemas.openxmlformats.org/officeDocument/2006/relationships" xmlns:p="http://schemas.openxmlformats.org/presentationml/2006/main" showMasterSp="0">
   <p:cSld>
     <p:bg>
@@ -7709,6 +8305,42 @@
           </a:p>
         </p:txBody>
       </p:sp>
+      <p:sp>
+        <p:nvSpPr>
+          <p:cNvPr id="3" name="TextBox 2">
+            <a:extLst>
+              <a:ext uri="{FF2B5EF4-FFF2-40B4-BE49-F238E27FC236}">
+                <a16:creationId xmlns:a16="http://schemas.microsoft.com/office/drawing/2014/main" id="{E840EE03-616A-F334-5A0D-78DB76EA5564}"/>
+              </a:ext>
+            </a:extLst>
+          </p:cNvPr>
+          <p:cNvSpPr txBox="1"/>
+          <p:nvPr/>
+        </p:nvSpPr>
+        <p:spPr>
+          <a:xfrm>
+            <a:off x="3784085" y="6350001"/>
+            <a:ext cx="8159262" cy="246221"/>
+          </a:xfrm>
+          <a:prstGeom prst="rect">
+            <a:avLst/>
+          </a:prstGeom>
+          <a:noFill/>
+        </p:spPr>
+        <p:txBody>
+          <a:bodyPr wrap="square" rtlCol="0">
+            <a:spAutoFit/>
+          </a:bodyPr>
+          <a:lstStyle/>
+          <a:p>
+            <a:pPr algn="r"/>
+            <a:r>
+              <a:rPr lang="en-US" sz="1000" dirty="0"/>
+              <a:t>Source: https://kotlinlang.org/docs/basic-syntax.html</a:t>
+            </a:r>
+          </a:p>
+        </p:txBody>
+      </p:sp>
     </p:spTree>
     <p:extLst>
       <p:ext uri="{BB962C8B-B14F-4D97-AF65-F5344CB8AC3E}">
@@ -7805,7 +8437,7 @@
 </p:sld>
 </file>
 
-<file path=ppt/slides/slide4.xml><?xml version="1.0" encoding="utf-8"?>
+<file path=ppt/slides/slide5.xml><?xml version="1.0" encoding="utf-8"?>
 <p:sld xmlns:a="http://schemas.openxmlformats.org/drawingml/2006/main" xmlns:r="http://schemas.openxmlformats.org/officeDocument/2006/relationships" xmlns:p="http://schemas.openxmlformats.org/presentationml/2006/main" showMasterSp="0">
   <p:cSld>
     <p:bg>
@@ -7936,14 +8568,14 @@
               <a:buNone/>
             </a:pPr>
             <a:r>
-              <a:rPr lang="en-US" sz="1800">
+              <a:rPr lang="en-US" sz="1800" dirty="0">
                 <a:effectLst/>
                 <a:latin typeface="JetBrains Mono"/>
               </a:rPr>
               <a:t>fun sum(</a:t>
             </a:r>
             <a:r>
-              <a:rPr lang="en-US" sz="1800">
+              <a:rPr lang="en-US" sz="1800" dirty="0">
                 <a:solidFill>
                   <a:schemeClr val="accent3"/>
                 </a:solidFill>
@@ -7953,7 +8585,7 @@
               <a:t>a: Int </a:t>
             </a:r>
             <a:r>
-              <a:rPr lang="en-US" sz="1800">
+              <a:rPr lang="en-US" sz="1800" dirty="0">
                 <a:solidFill>
                   <a:schemeClr val="accent1"/>
                 </a:solidFill>
@@ -7963,14 +8595,14 @@
               <a:t>= 5</a:t>
             </a:r>
             <a:r>
-              <a:rPr lang="en-US" sz="1800">
+              <a:rPr lang="en-US" sz="1800" dirty="0">
                 <a:effectLst/>
                 <a:latin typeface="JetBrains Mono"/>
               </a:rPr>
               <a:t>, </a:t>
             </a:r>
             <a:r>
-              <a:rPr lang="en-US" sz="1800">
+              <a:rPr lang="en-US" sz="1800" dirty="0">
                 <a:solidFill>
                   <a:schemeClr val="accent3"/>
                 </a:solidFill>
@@ -7980,14 +8612,14 @@
               <a:t>b: Int</a:t>
             </a:r>
             <a:r>
-              <a:rPr lang="en-US" sz="1800">
+              <a:rPr lang="en-US" sz="1800" dirty="0">
                 <a:effectLst/>
                 <a:latin typeface="JetBrains Mono"/>
               </a:rPr>
               <a:t>): </a:t>
             </a:r>
             <a:r>
-              <a:rPr lang="en-US" sz="1800">
+              <a:rPr lang="en-US" sz="1800" dirty="0">
                 <a:solidFill>
                   <a:schemeClr val="accent6">
                     <a:lumMod val="75000"/>
@@ -7999,33 +8631,33 @@
               <a:t>Int</a:t>
             </a:r>
             <a:r>
-              <a:rPr lang="en-US" sz="1800">
+              <a:rPr lang="en-US" sz="1800" dirty="0">
                 <a:effectLst/>
                 <a:latin typeface="JetBrains Mono"/>
               </a:rPr>
               <a:t> {</a:t>
             </a:r>
             <a:br>
-              <a:rPr lang="en-US" sz="1800">
+              <a:rPr lang="en-US" sz="1800" dirty="0">
                 <a:effectLst/>
                 <a:latin typeface="JetBrains Mono"/>
               </a:rPr>
             </a:br>
             <a:r>
-              <a:rPr lang="en-US" sz="1800">
+              <a:rPr lang="en-US" sz="1800" dirty="0">
                 <a:effectLst/>
                 <a:latin typeface="JetBrains Mono"/>
               </a:rPr>
               <a:t>    return a + b</a:t>
             </a:r>
             <a:br>
-              <a:rPr lang="en-US" sz="1800">
+              <a:rPr lang="en-US" sz="1800" dirty="0">
                 <a:effectLst/>
                 <a:latin typeface="JetBrains Mono"/>
               </a:rPr>
             </a:br>
             <a:r>
-              <a:rPr lang="en-US" sz="1800">
+              <a:rPr lang="en-US" sz="1800" dirty="0">
                 <a:effectLst/>
                 <a:latin typeface="JetBrains Mono"/>
               </a:rPr>
@@ -8036,7 +8668,7 @@
             <a:pPr>
               <a:buNone/>
             </a:pPr>
-            <a:endParaRPr lang="en-US">
+            <a:endParaRPr lang="en-US" dirty="0">
               <a:latin typeface="JetBrains Mono"/>
             </a:endParaRPr>
           </a:p>
@@ -8045,20 +8677,20 @@
               <a:buNone/>
             </a:pPr>
             <a:r>
-              <a:rPr lang="en-US">
+              <a:rPr lang="en-US" dirty="0">
                 <a:latin typeface="JetBrains Mono"/>
               </a:rPr>
               <a:t>s</a:t>
             </a:r>
             <a:r>
-              <a:rPr lang="en-US" sz="1800">
+              <a:rPr lang="en-US" sz="1800" dirty="0">
                 <a:effectLst/>
                 <a:latin typeface="JetBrains Mono"/>
               </a:rPr>
               <a:t>um(</a:t>
             </a:r>
             <a:r>
-              <a:rPr lang="en-US" sz="1800">
+              <a:rPr lang="en-US" sz="1800" dirty="0">
                 <a:solidFill>
                   <a:srgbClr val="00B0F0"/>
                 </a:solidFill>
@@ -8068,7 +8700,7 @@
               <a:t>b = 10</a:t>
             </a:r>
             <a:r>
-              <a:rPr lang="en-US" sz="1800">
+              <a:rPr lang="en-US" sz="1800" dirty="0">
                 <a:effectLst/>
                 <a:latin typeface="JetBrains Mono"/>
               </a:rPr>
@@ -8116,14 +8748,14 @@
               <a:buNone/>
             </a:pPr>
             <a:r>
-              <a:rPr lang="en-US" sz="1800">
+              <a:rPr lang="en-US" sz="1800" dirty="0">
                 <a:effectLst/>
                 <a:latin typeface="JetBrains Mono"/>
               </a:rPr>
               <a:t>fun sum(a: Int, b: Int) </a:t>
             </a:r>
             <a:r>
-              <a:rPr lang="en-US" sz="1800">
+              <a:rPr lang="en-US" sz="1800" dirty="0">
                 <a:solidFill>
                   <a:srgbClr val="92D050"/>
                 </a:solidFill>
@@ -8150,7 +8782,7 @@
         <p:spPr>
           <a:xfrm>
             <a:off x="6188364" y="3999604"/>
-            <a:ext cx="4244091" cy="646331"/>
+            <a:ext cx="4244091" cy="923330"/>
           </a:xfrm>
           <a:prstGeom prst="rect">
             <a:avLst/>
@@ -8168,16 +8800,16 @@
               <a:buChar char="•"/>
             </a:pPr>
             <a:r>
-              <a:rPr lang="en-US"/>
+              <a:rPr lang="en-US" dirty="0"/>
               <a:t>Function body as </a:t>
             </a:r>
             <a:r>
-              <a:rPr lang="en-US">
+              <a:rPr lang="en-US" dirty="0">
                 <a:solidFill>
                   <a:srgbClr val="92D050"/>
                 </a:solidFill>
               </a:rPr>
-              <a:t>expression</a:t>
+              <a:t>single expression</a:t>
             </a:r>
           </a:p>
           <a:p>
@@ -8186,7 +8818,7 @@
               <a:buChar char="•"/>
             </a:pPr>
             <a:r>
-              <a:rPr lang="en-US">
+              <a:rPr lang="en-US" dirty="0">
                 <a:solidFill>
                   <a:schemeClr val="accent6">
                     <a:lumMod val="75000"/>
@@ -8196,7 +8828,7 @@
               <a:t>Return</a:t>
             </a:r>
             <a:r>
-              <a:rPr lang="en-US"/>
+              <a:rPr lang="en-US" dirty="0"/>
               <a:t> type is inferred</a:t>
             </a:r>
           </a:p>
@@ -8426,6 +9058,42 @@
           </p:txBody>
         </p:sp>
       </p:grpSp>
+      <p:sp>
+        <p:nvSpPr>
+          <p:cNvPr id="2" name="TextBox 1">
+            <a:extLst>
+              <a:ext uri="{FF2B5EF4-FFF2-40B4-BE49-F238E27FC236}">
+                <a16:creationId xmlns:a16="http://schemas.microsoft.com/office/drawing/2014/main" id="{C975FD39-624E-E5AE-34BE-3F5765C2B1BA}"/>
+              </a:ext>
+            </a:extLst>
+          </p:cNvPr>
+          <p:cNvSpPr txBox="1"/>
+          <p:nvPr/>
+        </p:nvSpPr>
+        <p:spPr>
+          <a:xfrm>
+            <a:off x="3784085" y="6350001"/>
+            <a:ext cx="8159262" cy="246221"/>
+          </a:xfrm>
+          <a:prstGeom prst="rect">
+            <a:avLst/>
+          </a:prstGeom>
+          <a:noFill/>
+        </p:spPr>
+        <p:txBody>
+          <a:bodyPr wrap="square" rtlCol="0">
+            <a:spAutoFit/>
+          </a:bodyPr>
+          <a:lstStyle/>
+          <a:p>
+            <a:pPr algn="r"/>
+            <a:r>
+              <a:rPr lang="en-US" sz="1000" dirty="0"/>
+              <a:t>Source: https://kotlinlang.org/docs/functions.html</a:t>
+            </a:r>
+          </a:p>
+        </p:txBody>
+      </p:sp>
     </p:spTree>
     <p:extLst>
       <p:ext uri="{BB962C8B-B14F-4D97-AF65-F5344CB8AC3E}">
@@ -8522,7 +9190,7 @@
 </p:sld>
 </file>
 
-<file path=ppt/slides/slide5.xml><?xml version="1.0" encoding="utf-8"?>
+<file path=ppt/slides/slide6.xml><?xml version="1.0" encoding="utf-8"?>
 <p:sld xmlns:a="http://schemas.openxmlformats.org/drawingml/2006/main" xmlns:r="http://schemas.openxmlformats.org/officeDocument/2006/relationships" xmlns:p="http://schemas.openxmlformats.org/presentationml/2006/main" showMasterSp="0">
   <p:cSld>
     <p:bg>
@@ -9286,6 +9954,47 @@
           </a:p>
         </p:txBody>
       </p:sp>
+      <p:sp>
+        <p:nvSpPr>
+          <p:cNvPr id="2" name="TextBox 1">
+            <a:extLst>
+              <a:ext uri="{FF2B5EF4-FFF2-40B4-BE49-F238E27FC236}">
+                <a16:creationId xmlns:a16="http://schemas.microsoft.com/office/drawing/2014/main" id="{12654181-005D-B14D-2308-3A9092F3C32D}"/>
+              </a:ext>
+            </a:extLst>
+          </p:cNvPr>
+          <p:cNvSpPr txBox="1"/>
+          <p:nvPr/>
+        </p:nvSpPr>
+        <p:spPr>
+          <a:xfrm>
+            <a:off x="3784085" y="6350001"/>
+            <a:ext cx="8159262" cy="246221"/>
+          </a:xfrm>
+          <a:prstGeom prst="rect">
+            <a:avLst/>
+          </a:prstGeom>
+          <a:noFill/>
+        </p:spPr>
+        <p:txBody>
+          <a:bodyPr wrap="square" rtlCol="0">
+            <a:spAutoFit/>
+          </a:bodyPr>
+          <a:lstStyle/>
+          <a:p>
+            <a:pPr algn="r"/>
+            <a:r>
+              <a:rPr lang="de-DE" sz="1000" dirty="0"/>
+              <a:t>Source: https://kotlinlang.org/docs/basic-syntax</a:t>
+            </a:r>
+            <a:r>
+              <a:rPr lang="de-DE" sz="1000"/>
+              <a:t>.html</a:t>
+            </a:r>
+            <a:endParaRPr lang="en-US" sz="1000" dirty="0"/>
+          </a:p>
+        </p:txBody>
+      </p:sp>
     </p:spTree>
     <p:extLst>
       <p:ext uri="{BB962C8B-B14F-4D97-AF65-F5344CB8AC3E}">
@@ -9382,7 +10091,7 @@
 </p:sld>
 </file>
 
-<file path=ppt/slides/slide6.xml><?xml version="1.0" encoding="utf-8"?>
+<file path=ppt/slides/slide7.xml><?xml version="1.0" encoding="utf-8"?>
 <p:sld xmlns:a="http://schemas.openxmlformats.org/drawingml/2006/main" xmlns:r="http://schemas.openxmlformats.org/officeDocument/2006/relationships" xmlns:p="http://schemas.openxmlformats.org/presentationml/2006/main" showMasterSp="0">
   <p:cSld>
     <p:bg>
@@ -9963,6 +10672,42 @@
           </p:txBody>
         </p:sp>
       </p:grpSp>
+      <p:sp>
+        <p:nvSpPr>
+          <p:cNvPr id="7" name="TextBox 6">
+            <a:extLst>
+              <a:ext uri="{FF2B5EF4-FFF2-40B4-BE49-F238E27FC236}">
+                <a16:creationId xmlns:a16="http://schemas.microsoft.com/office/drawing/2014/main" id="{5F57121A-AF25-A545-D5D6-A0611153A677}"/>
+              </a:ext>
+            </a:extLst>
+          </p:cNvPr>
+          <p:cNvSpPr txBox="1"/>
+          <p:nvPr/>
+        </p:nvSpPr>
+        <p:spPr>
+          <a:xfrm>
+            <a:off x="3784085" y="6350001"/>
+            <a:ext cx="8159262" cy="246221"/>
+          </a:xfrm>
+          <a:prstGeom prst="rect">
+            <a:avLst/>
+          </a:prstGeom>
+          <a:noFill/>
+        </p:spPr>
+        <p:txBody>
+          <a:bodyPr wrap="square" rtlCol="0">
+            <a:spAutoFit/>
+          </a:bodyPr>
+          <a:lstStyle/>
+          <a:p>
+            <a:pPr algn="r"/>
+            <a:r>
+              <a:rPr lang="en-US" sz="1000" dirty="0"/>
+              <a:t>Source: https://kotlinlang.org/docs/control-flow.html#when-expressions-and-statements</a:t>
+            </a:r>
+          </a:p>
+        </p:txBody>
+      </p:sp>
     </p:spTree>
     <p:extLst>
       <p:ext uri="{BB962C8B-B14F-4D97-AF65-F5344CB8AC3E}">

--- a/KP/Blitzlicht_Kotlin.pptx
+++ b/KP/Blitzlicht_Kotlin.pptx
@@ -5,15 +5,16 @@
     <p:sldMasterId id="2147483735" r:id="rId1"/>
   </p:sldMasterIdLst>
   <p:notesMasterIdLst>
-    <p:notesMasterId r:id="rId8"/>
+    <p:notesMasterId r:id="rId9"/>
   </p:notesMasterIdLst>
   <p:sldIdLst>
     <p:sldId id="256" r:id="rId2"/>
     <p:sldId id="299" r:id="rId3"/>
-    <p:sldId id="294" r:id="rId4"/>
-    <p:sldId id="296" r:id="rId5"/>
-    <p:sldId id="298" r:id="rId6"/>
-    <p:sldId id="300" r:id="rId7"/>
+    <p:sldId id="301" r:id="rId4"/>
+    <p:sldId id="294" r:id="rId5"/>
+    <p:sldId id="296" r:id="rId6"/>
+    <p:sldId id="298" r:id="rId7"/>
+    <p:sldId id="300" r:id="rId8"/>
   </p:sldIdLst>
   <p:sldSz cx="12192000" cy="6858000"/>
   <p:notesSz cx="6858000" cy="9144000"/>
@@ -589,6 +590,121 @@
   <p:cSld>
     <p:spTree>
       <p:nvGrpSpPr>
+        <p:cNvPr id="1" name="">
+          <a:extLst>
+            <a:ext uri="{FF2B5EF4-FFF2-40B4-BE49-F238E27FC236}">
+              <a16:creationId xmlns:a16="http://schemas.microsoft.com/office/drawing/2014/main" id="{8C7842CE-4EA8-590C-A4D8-D3F8246AF401}"/>
+            </a:ext>
+          </a:extLst>
+        </p:cNvPr>
+        <p:cNvGrpSpPr/>
+        <p:nvPr/>
+      </p:nvGrpSpPr>
+      <p:grpSpPr>
+        <a:xfrm>
+          <a:off x="0" y="0"/>
+          <a:ext cx="0" cy="0"/>
+          <a:chOff x="0" y="0"/>
+          <a:chExt cx="0" cy="0"/>
+        </a:xfrm>
+      </p:grpSpPr>
+      <p:sp>
+        <p:nvSpPr>
+          <p:cNvPr id="2" name="Slide Image Placeholder 1">
+            <a:extLst>
+              <a:ext uri="{FF2B5EF4-FFF2-40B4-BE49-F238E27FC236}">
+                <a16:creationId xmlns:a16="http://schemas.microsoft.com/office/drawing/2014/main" id="{FD8A85BB-EBE9-4E79-8F7F-B5D4ABCBB157}"/>
+              </a:ext>
+            </a:extLst>
+          </p:cNvPr>
+          <p:cNvSpPr>
+            <a:spLocks noGrp="1" noRot="1" noChangeAspect="1"/>
+          </p:cNvSpPr>
+          <p:nvPr>
+            <p:ph type="sldImg"/>
+          </p:nvPr>
+        </p:nvSpPr>
+        <p:spPr/>
+        <p:txBody>
+          <a:bodyPr/>
+          <a:lstStyle/>
+          <a:p>
+            <a:endParaRPr lang="en-US"/>
+          </a:p>
+        </p:txBody>
+      </p:sp>
+      <p:sp>
+        <p:nvSpPr>
+          <p:cNvPr id="3" name="Notes Placeholder 2">
+            <a:extLst>
+              <a:ext uri="{FF2B5EF4-FFF2-40B4-BE49-F238E27FC236}">
+                <a16:creationId xmlns:a16="http://schemas.microsoft.com/office/drawing/2014/main" id="{9380A000-5DA9-46F1-E965-DC9073FBD9D8}"/>
+              </a:ext>
+            </a:extLst>
+          </p:cNvPr>
+          <p:cNvSpPr>
+            <a:spLocks noGrp="1"/>
+          </p:cNvSpPr>
+          <p:nvPr>
+            <p:ph type="body" idx="1"/>
+          </p:nvPr>
+        </p:nvSpPr>
+        <p:spPr/>
+        <p:txBody>
+          <a:bodyPr/>
+          <a:lstStyle/>
+          <a:p>
+            <a:endParaRPr lang="en-US"/>
+          </a:p>
+        </p:txBody>
+      </p:sp>
+      <p:sp>
+        <p:nvSpPr>
+          <p:cNvPr id="4" name="Slide Number Placeholder 3">
+            <a:extLst>
+              <a:ext uri="{FF2B5EF4-FFF2-40B4-BE49-F238E27FC236}">
+                <a16:creationId xmlns:a16="http://schemas.microsoft.com/office/drawing/2014/main" id="{CB9E94DE-ED02-0768-7550-F1A829CFA246}"/>
+              </a:ext>
+            </a:extLst>
+          </p:cNvPr>
+          <p:cNvSpPr>
+            <a:spLocks noGrp="1"/>
+          </p:cNvSpPr>
+          <p:nvPr>
+            <p:ph type="sldNum" sz="quarter" idx="5"/>
+          </p:nvPr>
+        </p:nvSpPr>
+        <p:spPr/>
+        <p:txBody>
+          <a:bodyPr/>
+          <a:lstStyle/>
+          <a:p>
+            <a:fld id="{60D61062-E9D8-4DAB-8118-1CF0D558F973}" type="slidenum">
+              <a:rPr lang="en-US" smtClean="0"/>
+              <a:t>3</a:t>
+            </a:fld>
+            <a:endParaRPr lang="en-US"/>
+          </a:p>
+        </p:txBody>
+      </p:sp>
+    </p:spTree>
+    <p:extLst>
+      <p:ext uri="{BB962C8B-B14F-4D97-AF65-F5344CB8AC3E}">
+        <p14:creationId xmlns:p14="http://schemas.microsoft.com/office/powerpoint/2010/main" val="122286586"/>
+      </p:ext>
+    </p:extLst>
+  </p:cSld>
+  <p:clrMapOvr>
+    <a:masterClrMapping/>
+  </p:clrMapOvr>
+</p:notes>
+</file>
+
+<file path=ppt/notesSlides/notesSlide3.xml><?xml version="1.0" encoding="utf-8"?>
+<p:notes xmlns:a="http://schemas.openxmlformats.org/drawingml/2006/main" xmlns:r="http://schemas.openxmlformats.org/officeDocument/2006/relationships" xmlns:p="http://schemas.openxmlformats.org/presentationml/2006/main">
+  <p:cSld>
+    <p:spTree>
+      <p:nvGrpSpPr>
         <p:cNvPr id="1" name=""/>
         <p:cNvGrpSpPr/>
         <p:nvPr/>
@@ -656,7 +772,7 @@
           <a:p>
             <a:fld id="{60D61062-E9D8-4DAB-8118-1CF0D558F973}" type="slidenum">
               <a:rPr lang="en-US" smtClean="0"/>
-              <a:t>3</a:t>
+              <a:t>4</a:t>
             </a:fld>
             <a:endParaRPr lang="en-US"/>
           </a:p>
@@ -675,7 +791,7 @@
 </p:notes>
 </file>
 
-<file path=ppt/notesSlides/notesSlide3.xml><?xml version="1.0" encoding="utf-8"?>
+<file path=ppt/notesSlides/notesSlide4.xml><?xml version="1.0" encoding="utf-8"?>
 <p:notes xmlns:a="http://schemas.openxmlformats.org/drawingml/2006/main" xmlns:r="http://schemas.openxmlformats.org/officeDocument/2006/relationships" xmlns:p="http://schemas.openxmlformats.org/presentationml/2006/main">
   <p:cSld>
     <p:spTree>
@@ -771,7 +887,7 @@
           <a:p>
             <a:fld id="{60D61062-E9D8-4DAB-8118-1CF0D558F973}" type="slidenum">
               <a:rPr lang="en-US" smtClean="0"/>
-              <a:t>4</a:t>
+              <a:t>5</a:t>
             </a:fld>
             <a:endParaRPr lang="en-US"/>
           </a:p>
@@ -790,7 +906,7 @@
 </p:notes>
 </file>
 
-<file path=ppt/notesSlides/notesSlide4.xml><?xml version="1.0" encoding="utf-8"?>
+<file path=ppt/notesSlides/notesSlide5.xml><?xml version="1.0" encoding="utf-8"?>
 <p:notes xmlns:a="http://schemas.openxmlformats.org/drawingml/2006/main" xmlns:r="http://schemas.openxmlformats.org/officeDocument/2006/relationships" xmlns:p="http://schemas.openxmlformats.org/presentationml/2006/main">
   <p:cSld>
     <p:spTree>
@@ -886,7 +1002,7 @@
           <a:p>
             <a:fld id="{60D61062-E9D8-4DAB-8118-1CF0D558F973}" type="slidenum">
               <a:rPr lang="en-US" smtClean="0"/>
-              <a:t>5</a:t>
+              <a:t>6</a:t>
             </a:fld>
             <a:endParaRPr lang="en-US"/>
           </a:p>
@@ -905,7 +1021,7 @@
 </p:notes>
 </file>
 
-<file path=ppt/notesSlides/notesSlide5.xml><?xml version="1.0" encoding="utf-8"?>
+<file path=ppt/notesSlides/notesSlide6.xml><?xml version="1.0" encoding="utf-8"?>
 <p:notes xmlns:a="http://schemas.openxmlformats.org/drawingml/2006/main" xmlns:r="http://schemas.openxmlformats.org/officeDocument/2006/relationships" xmlns:p="http://schemas.openxmlformats.org/presentationml/2006/main">
   <p:cSld>
     <p:spTree>
@@ -1001,7 +1117,7 @@
           <a:p>
             <a:fld id="{60D61062-E9D8-4DAB-8118-1CF0D558F973}" type="slidenum">
               <a:rPr lang="en-US" smtClean="0"/>
-              <a:t>6</a:t>
+              <a:t>7</a:t>
             </a:fld>
             <a:endParaRPr lang="en-US"/>
           </a:p>
@@ -1115,7 +1231,7 @@
           <a:effectLst/>
           <a:extLst>
             <a:ext uri="{91240B29-F687-4f45-9708-019B960494DF}">
-              <a14:hiddenLine xmlns:a14="http://schemas.microsoft.com/office/drawing/2010/main" xmlns="" w="9525">
+              <a14:hiddenLine xmlns="" xmlns:a14="http://schemas.microsoft.com/office/drawing/2010/main" w="9525">
                 <a:solidFill>
                   <a:srgbClr val="000000"/>
                 </a:solidFill>
@@ -2659,7 +2775,7 @@
           <a:ln/>
           <a:extLst>
             <a:ext uri="{91240B29-F687-4f45-9708-019B960494DF}">
-              <a14:hiddenLine xmlns:a14="http://schemas.microsoft.com/office/drawing/2010/main" xmlns="" w="9525">
+              <a14:hiddenLine xmlns="" xmlns:a14="http://schemas.microsoft.com/office/drawing/2010/main" w="9525">
                 <a:solidFill>
                   <a:srgbClr val="000000"/>
                 </a:solidFill>
@@ -2941,7 +3057,7 @@
           <a:ln/>
           <a:extLst>
             <a:ext uri="{91240B29-F687-4f45-9708-019B960494DF}">
-              <a14:hiddenLine xmlns:a14="http://schemas.microsoft.com/office/drawing/2010/main" xmlns="" w="9525">
+              <a14:hiddenLine xmlns="" xmlns:a14="http://schemas.microsoft.com/office/drawing/2010/main" w="9525">
                 <a:solidFill>
                   <a:srgbClr val="000000"/>
                 </a:solidFill>
@@ -3231,7 +3347,7 @@
           <a:ln/>
           <a:extLst>
             <a:ext uri="{91240B29-F687-4f45-9708-019B960494DF}">
-              <a14:hiddenLine xmlns:a14="http://schemas.microsoft.com/office/drawing/2010/main" xmlns="" w="9525">
+              <a14:hiddenLine xmlns="" xmlns:a14="http://schemas.microsoft.com/office/drawing/2010/main" w="9525">
                 <a:solidFill>
                   <a:srgbClr val="000000"/>
                 </a:solidFill>
@@ -3871,7 +3987,7 @@
           <a:ln/>
           <a:extLst>
             <a:ext uri="{91240B29-F687-4f45-9708-019B960494DF}">
-              <a14:hiddenLine xmlns:a14="http://schemas.microsoft.com/office/drawing/2010/main" xmlns="" w="9525">
+              <a14:hiddenLine xmlns="" xmlns:a14="http://schemas.microsoft.com/office/drawing/2010/main" w="9525">
                 <a:solidFill>
                   <a:srgbClr val="000000"/>
                 </a:solidFill>
@@ -4217,7 +4333,7 @@
           <a:ln/>
           <a:extLst>
             <a:ext uri="{91240B29-F687-4f45-9708-019B960494DF}">
-              <a14:hiddenLine xmlns:a14="http://schemas.microsoft.com/office/drawing/2010/main" xmlns="" w="9525">
+              <a14:hiddenLine xmlns="" xmlns:a14="http://schemas.microsoft.com/office/drawing/2010/main" w="9525">
                 <a:solidFill>
                   <a:srgbClr val="000000"/>
                 </a:solidFill>
@@ -4701,7 +4817,7 @@
           <a:ln/>
           <a:extLst>
             <a:ext uri="{91240B29-F687-4f45-9708-019B960494DF}">
-              <a14:hiddenLine xmlns:a14="http://schemas.microsoft.com/office/drawing/2010/main" xmlns="" w="9525">
+              <a14:hiddenLine xmlns="" xmlns:a14="http://schemas.microsoft.com/office/drawing/2010/main" w="9525">
                 <a:solidFill>
                   <a:srgbClr val="000000"/>
                 </a:solidFill>
@@ -5137,7 +5253,7 @@
           <a:ln/>
           <a:extLst>
             <a:ext uri="{91240B29-F687-4f45-9708-019B960494DF}">
-              <a14:hiddenLine xmlns:a14="http://schemas.microsoft.com/office/drawing/2010/main" xmlns="" w="9525">
+              <a14:hiddenLine xmlns="" xmlns:a14="http://schemas.microsoft.com/office/drawing/2010/main" w="9525">
                 <a:solidFill>
                   <a:srgbClr val="000000"/>
                 </a:solidFill>
@@ -6707,8 +6823,8 @@
         </p:nvSpPr>
         <p:spPr>
           <a:xfrm>
-            <a:off x="2014502" y="1719633"/>
-            <a:ext cx="8735648" cy="3693319"/>
+            <a:off x="1728175" y="2419568"/>
+            <a:ext cx="8735648" cy="1754326"/>
           </a:xfrm>
           <a:prstGeom prst="rect">
             <a:avLst/>
@@ -6726,231 +6842,109 @@
               <a:buChar char="•"/>
             </a:pPr>
             <a:r>
-              <a:rPr lang="en-US"/>
-              <a:t>Kotlin is an open-source general purpose programming language, developed and officially released by Jetbrains in 2016</a:t>
-            </a:r>
-          </a:p>
-          <a:p>
-            <a:endParaRPr lang="en-US"/>
+              <a:rPr lang="en-US" dirty="0"/>
+              <a:t>Kotlin was developed by </a:t>
+            </a:r>
+            <a:r>
+              <a:rPr lang="en-US" dirty="0" err="1">
+                <a:solidFill>
+                  <a:schemeClr val="accent3"/>
+                </a:solidFill>
+              </a:rPr>
+              <a:t>Jetbrains</a:t>
+            </a:r>
+            <a:r>
+              <a:rPr lang="en-US" dirty="0"/>
+              <a:t> (</a:t>
+            </a:r>
+            <a:r>
+              <a:rPr lang="en-US" dirty="0" err="1"/>
+              <a:t>Intellj</a:t>
+            </a:r>
+            <a:r>
+              <a:rPr lang="en-US" dirty="0"/>
+              <a:t> Idea, Rider, Goland) and released in 2011</a:t>
+            </a:r>
           </a:p>
           <a:p>
             <a:pPr marL="285750" indent="-285750">
               <a:buFont typeface="Arial" panose="020B0604020202020204" pitchFamily="34" charset="0"/>
               <a:buChar char="•"/>
             </a:pPr>
-            <a:r>
-              <a:rPr lang="en-US"/>
-              <a:t>Data types as expected: numbers (signed, unsigned), Boolean, Character, </a:t>
-            </a:r>
-          </a:p>
-          <a:p>
-            <a:r>
-              <a:rPr lang="en-US"/>
-              <a:t>							String, Array (also Collections)</a:t>
-            </a:r>
-          </a:p>
-          <a:p>
-            <a:r>
-              <a:rPr lang="en-US"/>
-              <a:t>							</a:t>
-            </a:r>
-            <a:r>
-              <a:rPr lang="en-US" u="sng"/>
-              <a:t>additionally</a:t>
-            </a:r>
-            <a:r>
-              <a:rPr lang="en-US"/>
-              <a:t>: </a:t>
-            </a:r>
-            <a:r>
-              <a:rPr lang="en-US">
-                <a:solidFill>
-                  <a:schemeClr val="accent3"/>
-                </a:solidFill>
-              </a:rPr>
-              <a:t>Any</a:t>
-            </a:r>
-            <a:r>
-              <a:rPr lang="en-US"/>
-              <a:t>, </a:t>
-            </a:r>
-            <a:r>
-              <a:rPr lang="en-US">
-                <a:solidFill>
-                  <a:schemeClr val="accent1"/>
-                </a:solidFill>
-              </a:rPr>
-              <a:t>Nothing</a:t>
-            </a:r>
-            <a:r>
-              <a:rPr lang="en-US"/>
-              <a:t>, </a:t>
-            </a:r>
-            <a:r>
-              <a:rPr lang="en-US">
-                <a:solidFill>
-                  <a:srgbClr val="0070C0"/>
-                </a:solidFill>
-              </a:rPr>
-              <a:t>Unit</a:t>
-            </a:r>
-          </a:p>
-          <a:p>
-            <a:endParaRPr lang="en-US">
-              <a:solidFill>
-                <a:srgbClr val="92D050"/>
-              </a:solidFill>
-            </a:endParaRPr>
+            <a:endParaRPr lang="en-US" dirty="0"/>
           </a:p>
           <a:p>
             <a:pPr marL="285750" indent="-285750">
               <a:buFont typeface="Arial" panose="020B0604020202020204" pitchFamily="34" charset="0"/>
               <a:buChar char="•"/>
             </a:pPr>
-            <a:endParaRPr lang="en-US">
-              <a:solidFill>
-                <a:srgbClr val="92D050"/>
-              </a:solidFill>
-            </a:endParaRPr>
-          </a:p>
-          <a:p>
-            <a:pPr marL="285750" indent="-285750">
-              <a:buFont typeface="Arial" panose="020B0604020202020204" pitchFamily="34" charset="0"/>
-              <a:buChar char="•"/>
-            </a:pPr>
-            <a:r>
-              <a:rPr lang="en-US">
+            <a:r>
+              <a:rPr lang="en-US" dirty="0"/>
+              <a:t>Goal: </a:t>
+            </a:r>
+            <a:r>
+              <a:rPr lang="en-US" dirty="0">
                 <a:solidFill>
-                  <a:schemeClr val="accent3"/>
+                  <a:srgbClr val="00B0F0"/>
                 </a:solidFill>
               </a:rPr>
-              <a:t>Any:</a:t>
-            </a:r>
-            <a:r>
-              <a:rPr lang="en-US">
+              <a:t>concise and expressive</a:t>
+            </a:r>
+            <a:r>
+              <a:rPr lang="en-US" dirty="0"/>
+              <a:t>, interoperable with Java (previous language used), introduction of new constructs such as higher order function</a:t>
+            </a:r>
+          </a:p>
+          <a:p>
+            <a:r>
+              <a:rPr lang="en-US" dirty="0"/>
+              <a:t>	&gt; a </a:t>
+            </a:r>
+            <a:r>
+              <a:rPr lang="en-US" dirty="0">
                 <a:solidFill>
                   <a:srgbClr val="92D050"/>
                 </a:solidFill>
               </a:rPr>
-              <a:t> </a:t>
-            </a:r>
-            <a:r>
-              <a:rPr lang="en-US"/>
-              <a:t>superclass of all classes, like golang </a:t>
-            </a:r>
-            <a:r>
-              <a:rPr lang="en-US">
-                <a:solidFill>
-                  <a:schemeClr val="accent3"/>
-                </a:solidFill>
-              </a:rPr>
-              <a:t>any</a:t>
-            </a:r>
-          </a:p>
-          <a:p>
-            <a:pPr marL="285750" indent="-285750">
-              <a:buFont typeface="Arial" panose="020B0604020202020204" pitchFamily="34" charset="0"/>
-              <a:buChar char="•"/>
-            </a:pPr>
-            <a:r>
-              <a:rPr lang="en-US">
-                <a:solidFill>
-                  <a:schemeClr val="accent1"/>
-                </a:solidFill>
-              </a:rPr>
-              <a:t>Nothing: </a:t>
-            </a:r>
-            <a:r>
-              <a:rPr lang="en-US"/>
-              <a:t>class with </a:t>
-            </a:r>
-            <a:r>
-              <a:rPr lang="en-US">
-                <a:solidFill>
-                  <a:schemeClr val="accent1"/>
-                </a:solidFill>
-              </a:rPr>
-              <a:t>no instances</a:t>
-            </a:r>
-            <a:r>
-              <a:rPr lang="en-US"/>
-              <a:t>, will always </a:t>
-            </a:r>
-            <a:r>
-              <a:rPr lang="en-US">
-                <a:solidFill>
-                  <a:schemeClr val="accent1"/>
-                </a:solidFill>
-              </a:rPr>
-              <a:t>throw</a:t>
-            </a:r>
-            <a:r>
-              <a:rPr lang="en-US"/>
-              <a:t> </a:t>
-            </a:r>
-            <a:r>
-              <a:rPr lang="en-US">
-                <a:solidFill>
-                  <a:schemeClr val="accent1"/>
-                </a:solidFill>
-              </a:rPr>
-              <a:t>exception</a:t>
-            </a:r>
-            <a:r>
-              <a:rPr lang="en-US"/>
-              <a:t> as return type</a:t>
-            </a:r>
-          </a:p>
-          <a:p>
-            <a:pPr marL="285750" indent="-285750">
-              <a:buFont typeface="Arial" panose="020B0604020202020204" pitchFamily="34" charset="0"/>
-              <a:buChar char="•"/>
-            </a:pPr>
-            <a:r>
-              <a:rPr lang="en-US">
-                <a:solidFill>
-                  <a:srgbClr val="0070C0"/>
-                </a:solidFill>
-              </a:rPr>
-              <a:t>Unit: </a:t>
-            </a:r>
-            <a:r>
-              <a:rPr lang="en-US"/>
-              <a:t>corresponds to </a:t>
-            </a:r>
-            <a:r>
-              <a:rPr lang="en-US">
-                <a:solidFill>
-                  <a:srgbClr val="0070C0"/>
-                </a:solidFill>
-              </a:rPr>
-              <a:t>void</a:t>
-            </a:r>
-            <a:r>
-              <a:rPr lang="en-US"/>
-              <a:t> type</a:t>
-            </a:r>
-          </a:p>
-          <a:p>
-            <a:pPr marL="285750" indent="-285750">
-              <a:buFont typeface="Arial" panose="020B0604020202020204" pitchFamily="34" charset="0"/>
-              <a:buChar char="•"/>
-            </a:pPr>
-            <a:endParaRPr lang="en-US">
-              <a:solidFill>
-                <a:srgbClr val="FFFF00"/>
-              </a:solidFill>
-            </a:endParaRPr>
-          </a:p>
-          <a:p>
-            <a:pPr marL="285750" indent="-285750">
-              <a:buFont typeface="Arial" panose="020B0604020202020204" pitchFamily="34" charset="0"/>
-              <a:buChar char="•"/>
-            </a:pPr>
-            <a:r>
-              <a:rPr lang="en-US"/>
-              <a:t>no semicolons at end of code lines</a:t>
-            </a:r>
+              <a:t>better Java</a:t>
+            </a:r>
+          </a:p>
+        </p:txBody>
+      </p:sp>
+      <p:sp>
+        <p:nvSpPr>
+          <p:cNvPr id="3" name="TextBox 2">
+            <a:extLst>
+              <a:ext uri="{FF2B5EF4-FFF2-40B4-BE49-F238E27FC236}">
+                <a16:creationId xmlns:a16="http://schemas.microsoft.com/office/drawing/2014/main" id="{AADBA887-6443-C102-72C3-7222849D934E}"/>
+              </a:ext>
+            </a:extLst>
+          </p:cNvPr>
+          <p:cNvSpPr txBox="1"/>
+          <p:nvPr/>
+        </p:nvSpPr>
+        <p:spPr>
+          <a:xfrm>
+            <a:off x="3326004" y="6360049"/>
+            <a:ext cx="8617343" cy="246221"/>
+          </a:xfrm>
+          <a:prstGeom prst="rect">
+            <a:avLst/>
+          </a:prstGeom>
+          <a:noFill/>
+        </p:spPr>
+        <p:txBody>
+          <a:bodyPr wrap="square" rtlCol="0">
+            <a:spAutoFit/>
+          </a:bodyPr>
+          <a:lstStyle/>
+          <a:p>
+            <a:pPr algn="r"/>
+            <a:r>
+              <a:rPr lang="de-DE" sz="1000" dirty="0"/>
+              <a:t>Source: https://www.oreilly.com/library/view/kotlin-for-enterprise/9781788997270/ea4ec584-db64-4026-89a8-2086301eb9c5.xhtml</a:t>
+            </a:r>
+            <a:endParaRPr lang="en-US" sz="1000" dirty="0"/>
           </a:p>
         </p:txBody>
       </p:sp>
@@ -6968,6 +6962,541 @@
 </file>
 
 <file path=ppt/slides/slide3.xml><?xml version="1.0" encoding="utf-8"?>
+<p:sld xmlns:a="http://schemas.openxmlformats.org/drawingml/2006/main" xmlns:r="http://schemas.openxmlformats.org/officeDocument/2006/relationships" xmlns:p="http://schemas.openxmlformats.org/presentationml/2006/main" showMasterSp="0">
+  <p:cSld>
+    <p:bg>
+      <p:bgPr>
+        <a:pattFill prst="wdUpDiag">
+          <a:fgClr>
+            <a:schemeClr val="bg2"/>
+          </a:fgClr>
+          <a:bgClr>
+            <a:schemeClr val="bg1"/>
+          </a:bgClr>
+        </a:pattFill>
+        <a:effectLst/>
+      </p:bgPr>
+    </p:bg>
+    <p:spTree>
+      <p:nvGrpSpPr>
+        <p:cNvPr id="1" name="">
+          <a:extLst>
+            <a:ext uri="{FF2B5EF4-FFF2-40B4-BE49-F238E27FC236}">
+              <a16:creationId xmlns:a16="http://schemas.microsoft.com/office/drawing/2014/main" id="{6461BED8-265B-44EF-5F7D-1B4EFF28CC94}"/>
+            </a:ext>
+          </a:extLst>
+        </p:cNvPr>
+        <p:cNvGrpSpPr/>
+        <p:nvPr/>
+      </p:nvGrpSpPr>
+      <p:grpSpPr>
+        <a:xfrm>
+          <a:off x="0" y="0"/>
+          <a:ext cx="0" cy="0"/>
+          <a:chOff x="0" y="0"/>
+          <a:chExt cx="0" cy="0"/>
+        </a:xfrm>
+      </p:grpSpPr>
+      <p:sp>
+        <p:nvSpPr>
+          <p:cNvPr id="2" name="Rectangle 1">
+            <a:extLst>
+              <a:ext uri="{FF2B5EF4-FFF2-40B4-BE49-F238E27FC236}">
+                <a16:creationId xmlns:a16="http://schemas.microsoft.com/office/drawing/2014/main" id="{6C8AE886-48C3-0C6B-2E82-9C8523AC0ABA}"/>
+              </a:ext>
+            </a:extLst>
+          </p:cNvPr>
+          <p:cNvSpPr/>
+          <p:nvPr/>
+        </p:nvSpPr>
+        <p:spPr>
+          <a:xfrm>
+            <a:off x="248652" y="233413"/>
+            <a:ext cx="11694695" cy="6391174"/>
+          </a:xfrm>
+          <a:prstGeom prst="rect">
+            <a:avLst/>
+          </a:prstGeom>
+          <a:solidFill>
+            <a:srgbClr val="212121"/>
+          </a:solidFill>
+          <a:ln>
+            <a:solidFill>
+              <a:srgbClr val="212121"/>
+            </a:solidFill>
+          </a:ln>
+        </p:spPr>
+        <p:style>
+          <a:lnRef idx="2">
+            <a:schemeClr val="dk1">
+              <a:shade val="15000"/>
+            </a:schemeClr>
+          </a:lnRef>
+          <a:fillRef idx="1">
+            <a:schemeClr val="dk1"/>
+          </a:fillRef>
+          <a:effectRef idx="0">
+            <a:schemeClr val="dk1"/>
+          </a:effectRef>
+          <a:fontRef idx="minor">
+            <a:schemeClr val="lt1"/>
+          </a:fontRef>
+        </p:style>
+        <p:txBody>
+          <a:bodyPr rtlCol="0" anchor="ctr"/>
+          <a:lstStyle/>
+          <a:p>
+            <a:pPr algn="ctr"/>
+            <a:endParaRPr lang="en-US"/>
+          </a:p>
+        </p:txBody>
+      </p:sp>
+      <p:grpSp>
+        <p:nvGrpSpPr>
+          <p:cNvPr id="14" name="Group 13">
+            <a:extLst>
+              <a:ext uri="{FF2B5EF4-FFF2-40B4-BE49-F238E27FC236}">
+                <a16:creationId xmlns:a16="http://schemas.microsoft.com/office/drawing/2014/main" id="{C003D769-1785-182A-4205-86B63AADB261}"/>
+              </a:ext>
+            </a:extLst>
+          </p:cNvPr>
+          <p:cNvGrpSpPr/>
+          <p:nvPr/>
+        </p:nvGrpSpPr>
+        <p:grpSpPr>
+          <a:xfrm>
+            <a:off x="85444" y="101035"/>
+            <a:ext cx="2796301" cy="406964"/>
+            <a:chOff x="689746" y="1254252"/>
+            <a:chExt cx="10812505" cy="1415319"/>
+          </a:xfrm>
+        </p:grpSpPr>
+        <p:sp>
+          <p:nvSpPr>
+            <p:cNvPr id="15" name="Rectangle 14">
+              <a:extLst>
+                <a:ext uri="{FF2B5EF4-FFF2-40B4-BE49-F238E27FC236}">
+                  <a16:creationId xmlns:a16="http://schemas.microsoft.com/office/drawing/2014/main" id="{426377DD-AE0A-97EB-20F7-D68096ABD130}"/>
+                </a:ext>
+              </a:extLst>
+            </p:cNvPr>
+            <p:cNvSpPr/>
+            <p:nvPr/>
+          </p:nvSpPr>
+          <p:spPr>
+            <a:xfrm>
+              <a:off x="689746" y="1254252"/>
+              <a:ext cx="10812505" cy="1415319"/>
+            </a:xfrm>
+            <a:prstGeom prst="rect">
+              <a:avLst/>
+            </a:prstGeom>
+            <a:pattFill prst="wdDnDiag">
+              <a:fgClr>
+                <a:schemeClr val="accent1"/>
+              </a:fgClr>
+              <a:bgClr>
+                <a:schemeClr val="bg1"/>
+              </a:bgClr>
+            </a:pattFill>
+          </p:spPr>
+          <p:style>
+            <a:lnRef idx="2">
+              <a:schemeClr val="accent1">
+                <a:shade val="15000"/>
+              </a:schemeClr>
+            </a:lnRef>
+            <a:fillRef idx="1">
+              <a:schemeClr val="accent1"/>
+            </a:fillRef>
+            <a:effectRef idx="0">
+              <a:schemeClr val="accent1"/>
+            </a:effectRef>
+            <a:fontRef idx="minor">
+              <a:schemeClr val="lt1"/>
+            </a:fontRef>
+          </p:style>
+          <p:txBody>
+            <a:bodyPr rtlCol="0" anchor="ctr"/>
+            <a:lstStyle/>
+            <a:p>
+              <a:pPr algn="ctr"/>
+              <a:endParaRPr lang="en-US" sz="1800">
+                <a:effectLst/>
+                <a:latin typeface="Cascadia Code" panose="020B0609020000020004" pitchFamily="49" charset="0"/>
+                <a:ea typeface="Times New Roman" panose="02020603050405020304" pitchFamily="18" charset="0"/>
+                <a:cs typeface="Times New Roman" panose="02020603050405020304" pitchFamily="18" charset="0"/>
+              </a:endParaRPr>
+            </a:p>
+          </p:txBody>
+        </p:sp>
+        <p:sp>
+          <p:nvSpPr>
+            <p:cNvPr id="16" name="Rectangle 15">
+              <a:extLst>
+                <a:ext uri="{FF2B5EF4-FFF2-40B4-BE49-F238E27FC236}">
+                  <a16:creationId xmlns:a16="http://schemas.microsoft.com/office/drawing/2014/main" id="{7083FA88-D270-0384-DB0E-2E2EDBC3CD70}"/>
+                </a:ext>
+              </a:extLst>
+            </p:cNvPr>
+            <p:cNvSpPr/>
+            <p:nvPr/>
+          </p:nvSpPr>
+          <p:spPr>
+            <a:xfrm>
+              <a:off x="846992" y="1390635"/>
+              <a:ext cx="10498015" cy="1116623"/>
+            </a:xfrm>
+            <a:prstGeom prst="rect">
+              <a:avLst/>
+            </a:prstGeom>
+          </p:spPr>
+          <p:style>
+            <a:lnRef idx="2">
+              <a:schemeClr val="accent1">
+                <a:shade val="15000"/>
+              </a:schemeClr>
+            </a:lnRef>
+            <a:fillRef idx="1">
+              <a:schemeClr val="accent1"/>
+            </a:fillRef>
+            <a:effectRef idx="0">
+              <a:schemeClr val="accent1"/>
+            </a:effectRef>
+            <a:fontRef idx="minor">
+              <a:schemeClr val="lt1"/>
+            </a:fontRef>
+          </p:style>
+          <p:txBody>
+            <a:bodyPr rtlCol="0" anchor="ctr"/>
+            <a:lstStyle/>
+            <a:p>
+              <a:pPr algn="ctr"/>
+              <a:r>
+                <a:rPr lang="en-US" sz="1400" b="1" dirty="0">
+                  <a:latin typeface="Cascadia Code" panose="020B0609020000020004" pitchFamily="49" charset="0"/>
+                  <a:ea typeface="Times New Roman" panose="02020603050405020304" pitchFamily="18" charset="0"/>
+                  <a:cs typeface="Times New Roman" panose="02020603050405020304" pitchFamily="18" charset="0"/>
+                </a:rPr>
+                <a:t>Data Types</a:t>
+              </a:r>
+              <a:endParaRPr lang="en-US" sz="1400" dirty="0">
+                <a:effectLst/>
+                <a:latin typeface="Cascadia Code" panose="020B0609020000020004" pitchFamily="49" charset="0"/>
+                <a:ea typeface="Times New Roman" panose="02020603050405020304" pitchFamily="18" charset="0"/>
+                <a:cs typeface="Times New Roman" panose="02020603050405020304" pitchFamily="18" charset="0"/>
+              </a:endParaRPr>
+            </a:p>
+          </p:txBody>
+        </p:sp>
+      </p:grpSp>
+      <p:sp>
+        <p:nvSpPr>
+          <p:cNvPr id="17" name="TextBox 16">
+            <a:extLst>
+              <a:ext uri="{FF2B5EF4-FFF2-40B4-BE49-F238E27FC236}">
+                <a16:creationId xmlns:a16="http://schemas.microsoft.com/office/drawing/2014/main" id="{E361B9F9-BB8D-CE33-D2AF-D4B3D919087E}"/>
+              </a:ext>
+            </a:extLst>
+          </p:cNvPr>
+          <p:cNvSpPr txBox="1"/>
+          <p:nvPr/>
+        </p:nvSpPr>
+        <p:spPr>
+          <a:xfrm>
+            <a:off x="1728175" y="1997839"/>
+            <a:ext cx="8735648" cy="2862322"/>
+          </a:xfrm>
+          <a:prstGeom prst="rect">
+            <a:avLst/>
+          </a:prstGeom>
+          <a:noFill/>
+        </p:spPr>
+        <p:txBody>
+          <a:bodyPr wrap="square" rtlCol="0">
+            <a:spAutoFit/>
+          </a:bodyPr>
+          <a:lstStyle/>
+          <a:p>
+            <a:pPr marL="285750" indent="-285750">
+              <a:buFont typeface="Arial" panose="020B0604020202020204" pitchFamily="34" charset="0"/>
+              <a:buChar char="•"/>
+            </a:pPr>
+            <a:r>
+              <a:rPr lang="en-US" dirty="0"/>
+              <a:t>Data types as expected: numbers (signed, unsigned), Boolean, Character, </a:t>
+            </a:r>
+          </a:p>
+          <a:p>
+            <a:r>
+              <a:rPr lang="en-US" dirty="0"/>
+              <a:t>							String, Array (also Collections)</a:t>
+            </a:r>
+          </a:p>
+          <a:p>
+            <a:r>
+              <a:rPr lang="en-US" dirty="0"/>
+              <a:t>							</a:t>
+            </a:r>
+            <a:r>
+              <a:rPr lang="en-US" u="sng" dirty="0"/>
+              <a:t>additionally</a:t>
+            </a:r>
+            <a:r>
+              <a:rPr lang="en-US" dirty="0"/>
+              <a:t>: </a:t>
+            </a:r>
+            <a:r>
+              <a:rPr lang="en-US" dirty="0">
+                <a:solidFill>
+                  <a:schemeClr val="accent3"/>
+                </a:solidFill>
+              </a:rPr>
+              <a:t>Any</a:t>
+            </a:r>
+            <a:r>
+              <a:rPr lang="en-US" dirty="0"/>
+              <a:t>, </a:t>
+            </a:r>
+            <a:r>
+              <a:rPr lang="en-US" dirty="0">
+                <a:solidFill>
+                  <a:schemeClr val="accent1"/>
+                </a:solidFill>
+              </a:rPr>
+              <a:t>Nothing</a:t>
+            </a:r>
+            <a:r>
+              <a:rPr lang="en-US" dirty="0"/>
+              <a:t>, </a:t>
+            </a:r>
+            <a:r>
+              <a:rPr lang="en-US" dirty="0">
+                <a:solidFill>
+                  <a:srgbClr val="0070C0"/>
+                </a:solidFill>
+              </a:rPr>
+              <a:t>Unit</a:t>
+            </a:r>
+          </a:p>
+          <a:p>
+            <a:endParaRPr lang="en-US" dirty="0">
+              <a:solidFill>
+                <a:srgbClr val="92D050"/>
+              </a:solidFill>
+            </a:endParaRPr>
+          </a:p>
+          <a:p>
+            <a:pPr marL="285750" indent="-285750">
+              <a:buFont typeface="Arial" panose="020B0604020202020204" pitchFamily="34" charset="0"/>
+              <a:buChar char="•"/>
+            </a:pPr>
+            <a:endParaRPr lang="en-US" dirty="0">
+              <a:solidFill>
+                <a:srgbClr val="92D050"/>
+              </a:solidFill>
+            </a:endParaRPr>
+          </a:p>
+          <a:p>
+            <a:pPr marL="285750" indent="-285750">
+              <a:buFont typeface="Arial" panose="020B0604020202020204" pitchFamily="34" charset="0"/>
+              <a:buChar char="•"/>
+            </a:pPr>
+            <a:r>
+              <a:rPr lang="en-US" dirty="0">
+                <a:solidFill>
+                  <a:schemeClr val="accent3"/>
+                </a:solidFill>
+              </a:rPr>
+              <a:t>Any:</a:t>
+            </a:r>
+            <a:r>
+              <a:rPr lang="en-US" dirty="0">
+                <a:solidFill>
+                  <a:srgbClr val="92D050"/>
+                </a:solidFill>
+              </a:rPr>
+              <a:t> </a:t>
+            </a:r>
+            <a:r>
+              <a:rPr lang="en-US" dirty="0"/>
+              <a:t>superclass of all classes, like </a:t>
+            </a:r>
+            <a:r>
+              <a:rPr lang="en-US" dirty="0" err="1"/>
+              <a:t>golang</a:t>
+            </a:r>
+            <a:r>
+              <a:rPr lang="en-US" dirty="0"/>
+              <a:t> </a:t>
+            </a:r>
+            <a:r>
+              <a:rPr lang="en-US" dirty="0">
+                <a:solidFill>
+                  <a:schemeClr val="accent3"/>
+                </a:solidFill>
+              </a:rPr>
+              <a:t>any</a:t>
+            </a:r>
+          </a:p>
+          <a:p>
+            <a:pPr marL="285750" indent="-285750">
+              <a:buFont typeface="Arial" panose="020B0604020202020204" pitchFamily="34" charset="0"/>
+              <a:buChar char="•"/>
+            </a:pPr>
+            <a:r>
+              <a:rPr lang="en-US" dirty="0">
+                <a:solidFill>
+                  <a:schemeClr val="accent1"/>
+                </a:solidFill>
+              </a:rPr>
+              <a:t>Nothing: </a:t>
+            </a:r>
+            <a:r>
+              <a:rPr lang="en-US" dirty="0"/>
+              <a:t>class with </a:t>
+            </a:r>
+            <a:r>
+              <a:rPr lang="en-US" dirty="0">
+                <a:solidFill>
+                  <a:schemeClr val="accent1"/>
+                </a:solidFill>
+              </a:rPr>
+              <a:t>no instances</a:t>
+            </a:r>
+            <a:r>
+              <a:rPr lang="en-US" dirty="0"/>
+              <a:t>, will always </a:t>
+            </a:r>
+            <a:r>
+              <a:rPr lang="en-US" dirty="0">
+                <a:solidFill>
+                  <a:schemeClr val="accent1"/>
+                </a:solidFill>
+              </a:rPr>
+              <a:t>throw</a:t>
+            </a:r>
+            <a:r>
+              <a:rPr lang="en-US" dirty="0"/>
+              <a:t> </a:t>
+            </a:r>
+            <a:r>
+              <a:rPr lang="en-US" dirty="0">
+                <a:solidFill>
+                  <a:schemeClr val="accent1"/>
+                </a:solidFill>
+              </a:rPr>
+              <a:t>exception</a:t>
+            </a:r>
+            <a:r>
+              <a:rPr lang="en-US" dirty="0"/>
+              <a:t> as return type</a:t>
+            </a:r>
+          </a:p>
+          <a:p>
+            <a:pPr marL="285750" indent="-285750">
+              <a:buFont typeface="Arial" panose="020B0604020202020204" pitchFamily="34" charset="0"/>
+              <a:buChar char="•"/>
+            </a:pPr>
+            <a:r>
+              <a:rPr lang="en-US" dirty="0">
+                <a:solidFill>
+                  <a:srgbClr val="0070C0"/>
+                </a:solidFill>
+              </a:rPr>
+              <a:t>Unit: </a:t>
+            </a:r>
+            <a:r>
+              <a:rPr lang="en-US" dirty="0"/>
+              <a:t>corresponds to </a:t>
+            </a:r>
+            <a:r>
+              <a:rPr lang="en-US" dirty="0">
+                <a:solidFill>
+                  <a:srgbClr val="0070C0"/>
+                </a:solidFill>
+              </a:rPr>
+              <a:t>void</a:t>
+            </a:r>
+            <a:r>
+              <a:rPr lang="en-US" dirty="0"/>
+              <a:t> type</a:t>
+            </a:r>
+          </a:p>
+          <a:p>
+            <a:pPr marL="285750" indent="-285750">
+              <a:buFont typeface="Arial" panose="020B0604020202020204" pitchFamily="34" charset="0"/>
+              <a:buChar char="•"/>
+            </a:pPr>
+            <a:endParaRPr lang="en-US" dirty="0">
+              <a:solidFill>
+                <a:srgbClr val="FFFF00"/>
+              </a:solidFill>
+            </a:endParaRPr>
+          </a:p>
+          <a:p>
+            <a:pPr marL="285750" indent="-285750">
+              <a:buFont typeface="Arial" panose="020B0604020202020204" pitchFamily="34" charset="0"/>
+              <a:buChar char="•"/>
+            </a:pPr>
+            <a:r>
+              <a:rPr lang="en-US" dirty="0"/>
+              <a:t>no semicolons at end of code lines</a:t>
+            </a:r>
+          </a:p>
+        </p:txBody>
+      </p:sp>
+      <p:sp>
+        <p:nvSpPr>
+          <p:cNvPr id="3" name="TextBox 2">
+            <a:extLst>
+              <a:ext uri="{FF2B5EF4-FFF2-40B4-BE49-F238E27FC236}">
+                <a16:creationId xmlns:a16="http://schemas.microsoft.com/office/drawing/2014/main" id="{CF1E40CA-947B-88D5-96C6-7A6FA1A5A1F4}"/>
+              </a:ext>
+            </a:extLst>
+          </p:cNvPr>
+          <p:cNvSpPr txBox="1"/>
+          <p:nvPr/>
+        </p:nvSpPr>
+        <p:spPr>
+          <a:xfrm>
+            <a:off x="4642338" y="6360049"/>
+            <a:ext cx="7301009" cy="246221"/>
+          </a:xfrm>
+          <a:prstGeom prst="rect">
+            <a:avLst/>
+          </a:prstGeom>
+          <a:noFill/>
+        </p:spPr>
+        <p:txBody>
+          <a:bodyPr wrap="square" rtlCol="0">
+            <a:spAutoFit/>
+          </a:bodyPr>
+          <a:lstStyle/>
+          <a:p>
+            <a:pPr algn="r"/>
+            <a:r>
+              <a:rPr lang="de-DE" sz="1000" dirty="0"/>
+              <a:t>Source: https://kotlinlang.org/docs/types-overview.html</a:t>
+            </a:r>
+            <a:endParaRPr lang="en-US" sz="1000" dirty="0"/>
+          </a:p>
+        </p:txBody>
+      </p:sp>
+    </p:spTree>
+    <p:extLst>
+      <p:ext uri="{BB962C8B-B14F-4D97-AF65-F5344CB8AC3E}">
+        <p14:creationId xmlns:p14="http://schemas.microsoft.com/office/powerpoint/2010/main" val="3514004181"/>
+      </p:ext>
+    </p:extLst>
+  </p:cSld>
+  <p:clrMapOvr>
+    <a:masterClrMapping/>
+  </p:clrMapOvr>
+</p:sld>
+</file>
+
+<file path=ppt/slides/slide4.xml><?xml version="1.0" encoding="utf-8"?>
 <p:sld xmlns:a="http://schemas.openxmlformats.org/drawingml/2006/main" xmlns:r="http://schemas.openxmlformats.org/officeDocument/2006/relationships" xmlns:p="http://schemas.openxmlformats.org/presentationml/2006/main" showMasterSp="0">
   <p:cSld>
     <p:bg>
@@ -7626,6 +8155,43 @@
           </a:p>
         </p:txBody>
       </p:sp>
+      <p:sp>
+        <p:nvSpPr>
+          <p:cNvPr id="3" name="TextBox 2">
+            <a:extLst>
+              <a:ext uri="{FF2B5EF4-FFF2-40B4-BE49-F238E27FC236}">
+                <a16:creationId xmlns:a16="http://schemas.microsoft.com/office/drawing/2014/main" id="{8D625AFA-6793-29BD-BAAA-06F356746C5C}"/>
+              </a:ext>
+            </a:extLst>
+          </p:cNvPr>
+          <p:cNvSpPr txBox="1"/>
+          <p:nvPr/>
+        </p:nvSpPr>
+        <p:spPr>
+          <a:xfrm>
+            <a:off x="4642338" y="6360049"/>
+            <a:ext cx="7301009" cy="246221"/>
+          </a:xfrm>
+          <a:prstGeom prst="rect">
+            <a:avLst/>
+          </a:prstGeom>
+          <a:noFill/>
+        </p:spPr>
+        <p:txBody>
+          <a:bodyPr wrap="square" rtlCol="0">
+            <a:spAutoFit/>
+          </a:bodyPr>
+          <a:lstStyle/>
+          <a:p>
+            <a:pPr algn="r"/>
+            <a:r>
+              <a:rPr lang="de-DE" sz="1000" dirty="0"/>
+              <a:t>Source: https://kotlinlang.org/docs/basic-syntax.html</a:t>
+            </a:r>
+            <a:endParaRPr lang="en-US" sz="1000" dirty="0"/>
+          </a:p>
+        </p:txBody>
+      </p:sp>
     </p:spTree>
     <p:extLst>
       <p:ext uri="{BB962C8B-B14F-4D97-AF65-F5344CB8AC3E}">
@@ -7639,7 +8205,7 @@
 </p:sld>
 </file>
 
-<file path=ppt/slides/slide4.xml><?xml version="1.0" encoding="utf-8"?>
+<file path=ppt/slides/slide5.xml><?xml version="1.0" encoding="utf-8"?>
 <p:sld xmlns:a="http://schemas.openxmlformats.org/drawingml/2006/main" xmlns:r="http://schemas.openxmlformats.org/officeDocument/2006/relationships" xmlns:p="http://schemas.openxmlformats.org/presentationml/2006/main" showMasterSp="0">
   <p:cSld>
     <p:bg>
@@ -7984,7 +8550,7 @@
         <p:spPr>
           <a:xfrm>
             <a:off x="6188364" y="3999604"/>
-            <a:ext cx="4244091" cy="646331"/>
+            <a:ext cx="4663856" cy="646331"/>
           </a:xfrm>
           <a:prstGeom prst="rect">
             <a:avLst/>
@@ -8002,16 +8568,16 @@
               <a:buChar char="•"/>
             </a:pPr>
             <a:r>
-              <a:rPr lang="en-US"/>
+              <a:rPr lang="en-US" dirty="0"/>
               <a:t>Function body as </a:t>
             </a:r>
             <a:r>
-              <a:rPr lang="en-US">
+              <a:rPr lang="en-US" dirty="0">
                 <a:solidFill>
                   <a:srgbClr val="92D050"/>
                 </a:solidFill>
               </a:rPr>
-              <a:t>expression</a:t>
+              <a:t>single expression</a:t>
             </a:r>
           </a:p>
           <a:p>
@@ -8020,7 +8586,7 @@
               <a:buChar char="•"/>
             </a:pPr>
             <a:r>
-              <a:rPr lang="en-US">
+              <a:rPr lang="en-US" dirty="0">
                 <a:solidFill>
                   <a:schemeClr val="accent6">
                     <a:lumMod val="75000"/>
@@ -8030,7 +8596,7 @@
               <a:t>Return</a:t>
             </a:r>
             <a:r>
-              <a:rPr lang="en-US"/>
+              <a:rPr lang="en-US" dirty="0"/>
               <a:t> type is inferred</a:t>
             </a:r>
           </a:p>
@@ -8260,6 +8826,43 @@
           </p:txBody>
         </p:sp>
       </p:grpSp>
+      <p:sp>
+        <p:nvSpPr>
+          <p:cNvPr id="2" name="TextBox 1">
+            <a:extLst>
+              <a:ext uri="{FF2B5EF4-FFF2-40B4-BE49-F238E27FC236}">
+                <a16:creationId xmlns:a16="http://schemas.microsoft.com/office/drawing/2014/main" id="{C61E2831-DE8E-089F-80F5-E8EE17C54F6D}"/>
+              </a:ext>
+            </a:extLst>
+          </p:cNvPr>
+          <p:cNvSpPr txBox="1"/>
+          <p:nvPr/>
+        </p:nvSpPr>
+        <p:spPr>
+          <a:xfrm>
+            <a:off x="4642338" y="6360049"/>
+            <a:ext cx="7301009" cy="246221"/>
+          </a:xfrm>
+          <a:prstGeom prst="rect">
+            <a:avLst/>
+          </a:prstGeom>
+          <a:noFill/>
+        </p:spPr>
+        <p:txBody>
+          <a:bodyPr wrap="square" rtlCol="0">
+            <a:spAutoFit/>
+          </a:bodyPr>
+          <a:lstStyle/>
+          <a:p>
+            <a:pPr algn="r"/>
+            <a:r>
+              <a:rPr lang="de-DE" sz="1000" dirty="0"/>
+              <a:t>Source: https://kotlinlang.org/docs/functions.html</a:t>
+            </a:r>
+            <a:endParaRPr lang="en-US" sz="1000" dirty="0"/>
+          </a:p>
+        </p:txBody>
+      </p:sp>
     </p:spTree>
     <p:extLst>
       <p:ext uri="{BB962C8B-B14F-4D97-AF65-F5344CB8AC3E}">
@@ -8273,7 +8876,7 @@
 </p:sld>
 </file>
 
-<file path=ppt/slides/slide5.xml><?xml version="1.0" encoding="utf-8"?>
+<file path=ppt/slides/slide6.xml><?xml version="1.0" encoding="utf-8"?>
 <p:sld xmlns:a="http://schemas.openxmlformats.org/drawingml/2006/main" xmlns:r="http://schemas.openxmlformats.org/officeDocument/2006/relationships" xmlns:p="http://schemas.openxmlformats.org/presentationml/2006/main" showMasterSp="0">
   <p:cSld>
     <p:bg>
@@ -9037,6 +9640,43 @@
           </a:p>
         </p:txBody>
       </p:sp>
+      <p:sp>
+        <p:nvSpPr>
+          <p:cNvPr id="2" name="TextBox 1">
+            <a:extLst>
+              <a:ext uri="{FF2B5EF4-FFF2-40B4-BE49-F238E27FC236}">
+                <a16:creationId xmlns:a16="http://schemas.microsoft.com/office/drawing/2014/main" id="{85C5DACD-8C73-5B32-2ACA-AA2E804DE2F4}"/>
+              </a:ext>
+            </a:extLst>
+          </p:cNvPr>
+          <p:cNvSpPr txBox="1"/>
+          <p:nvPr/>
+        </p:nvSpPr>
+        <p:spPr>
+          <a:xfrm>
+            <a:off x="4642338" y="6360049"/>
+            <a:ext cx="7301009" cy="246221"/>
+          </a:xfrm>
+          <a:prstGeom prst="rect">
+            <a:avLst/>
+          </a:prstGeom>
+          <a:noFill/>
+        </p:spPr>
+        <p:txBody>
+          <a:bodyPr wrap="square" rtlCol="0">
+            <a:spAutoFit/>
+          </a:bodyPr>
+          <a:lstStyle/>
+          <a:p>
+            <a:pPr algn="r"/>
+            <a:r>
+              <a:rPr lang="de-DE" sz="1000" dirty="0"/>
+              <a:t>Source: https://kotlinlang.org/docs/basic-syntax.html</a:t>
+            </a:r>
+            <a:endParaRPr lang="en-US" sz="1000" dirty="0"/>
+          </a:p>
+        </p:txBody>
+      </p:sp>
     </p:spTree>
     <p:extLst>
       <p:ext uri="{BB962C8B-B14F-4D97-AF65-F5344CB8AC3E}">
@@ -9050,7 +9690,7 @@
 </p:sld>
 </file>
 
-<file path=ppt/slides/slide6.xml><?xml version="1.0" encoding="utf-8"?>
+<file path=ppt/slides/slide7.xml><?xml version="1.0" encoding="utf-8"?>
 <p:sld xmlns:a="http://schemas.openxmlformats.org/drawingml/2006/main" xmlns:r="http://schemas.openxmlformats.org/officeDocument/2006/relationships" xmlns:p="http://schemas.openxmlformats.org/presentationml/2006/main" showMasterSp="0">
   <p:cSld>
     <p:bg>
@@ -9349,288 +9989,289 @@
           </a:p>
         </p:txBody>
       </p:sp>
-      <p:grpSp>
-        <p:nvGrpSpPr>
-          <p:cNvPr id="3" name="Group 2">
+      <p:sp>
+        <p:nvSpPr>
+          <p:cNvPr id="8" name="TextBox 7">
             <a:extLst>
               <a:ext uri="{FF2B5EF4-FFF2-40B4-BE49-F238E27FC236}">
-                <a16:creationId xmlns:a16="http://schemas.microsoft.com/office/drawing/2014/main" id="{08C2C276-A41D-2478-3521-2D6DD196BF0C}"/>
+                <a16:creationId xmlns:a16="http://schemas.microsoft.com/office/drawing/2014/main" id="{9722633E-E22C-D5F7-657E-B6E109A0B165}"/>
               </a:ext>
             </a:extLst>
           </p:cNvPr>
-          <p:cNvGrpSpPr/>
+          <p:cNvSpPr txBox="1"/>
           <p:nvPr/>
-        </p:nvGrpSpPr>
-        <p:grpSpPr>
+        </p:nvSpPr>
+        <p:spPr>
           <a:xfrm>
             <a:off x="1878584" y="1606264"/>
-            <a:ext cx="2770910" cy="3920057"/>
-            <a:chOff x="665018" y="954266"/>
-            <a:chExt cx="2770910" cy="3920057"/>
+            <a:ext cx="2770910" cy="3693319"/>
           </a:xfrm>
-        </p:grpSpPr>
-        <p:sp>
-          <p:nvSpPr>
-            <p:cNvPr id="8" name="TextBox 7">
-              <a:extLst>
-                <a:ext uri="{FF2B5EF4-FFF2-40B4-BE49-F238E27FC236}">
-                  <a16:creationId xmlns:a16="http://schemas.microsoft.com/office/drawing/2014/main" id="{9722633E-E22C-D5F7-657E-B6E109A0B165}"/>
-                </a:ext>
-              </a:extLst>
-            </p:cNvPr>
-            <p:cNvSpPr txBox="1"/>
-            <p:nvPr/>
-          </p:nvSpPr>
-          <p:spPr>
-            <a:xfrm>
-              <a:off x="665018" y="954266"/>
-              <a:ext cx="2770910" cy="3693319"/>
-            </a:xfrm>
-            <a:prstGeom prst="rect">
-              <a:avLst/>
-            </a:prstGeom>
-            <a:noFill/>
-            <a:ln>
-              <a:solidFill>
-                <a:schemeClr val="tx1">
-                  <a:lumMod val="65000"/>
-                </a:schemeClr>
-              </a:solidFill>
-            </a:ln>
-          </p:spPr>
-          <p:txBody>
-            <a:bodyPr wrap="square">
-              <a:spAutoFit/>
-            </a:bodyPr>
-            <a:lstStyle/>
-            <a:p>
-              <a:pPr>
-                <a:buNone/>
-              </a:pPr>
-              <a:r>
-                <a:rPr lang="en-US" sz="1800">
-                  <a:effectLst/>
-                  <a:latin typeface="JetBrains Mono"/>
-                </a:rPr>
-                <a:t>val day = 4</a:t>
-              </a:r>
-            </a:p>
-            <a:p>
-              <a:pPr>
-                <a:buNone/>
-              </a:pPr>
-              <a:endParaRPr lang="en-US" sz="1800">
+          <a:prstGeom prst="rect">
+            <a:avLst/>
+          </a:prstGeom>
+          <a:noFill/>
+          <a:ln>
+            <a:solidFill>
+              <a:schemeClr val="tx1">
+                <a:lumMod val="65000"/>
+              </a:schemeClr>
+            </a:solidFill>
+          </a:ln>
+        </p:spPr>
+        <p:txBody>
+          <a:bodyPr wrap="square">
+            <a:spAutoFit/>
+          </a:bodyPr>
+          <a:lstStyle/>
+          <a:p>
+            <a:pPr>
+              <a:buNone/>
+            </a:pPr>
+            <a:r>
+              <a:rPr lang="en-US" sz="1800" dirty="0" err="1">
                 <a:effectLst/>
                 <a:latin typeface="JetBrains Mono"/>
-              </a:endParaRPr>
-            </a:p>
-            <a:p>
-              <a:pPr>
-                <a:buNone/>
-              </a:pPr>
-              <a:r>
-                <a:rPr lang="en-US" sz="1800">
-                  <a:effectLst/>
-                  <a:latin typeface="JetBrains Mono"/>
-                </a:rPr>
-                <a:t>val result = </a:t>
-              </a:r>
-              <a:r>
-                <a:rPr lang="en-US" sz="1800">
-                  <a:solidFill>
-                    <a:schemeClr val="accent3"/>
-                  </a:solidFill>
-                  <a:effectLst/>
-                  <a:latin typeface="JetBrains Mono"/>
-                </a:rPr>
-                <a:t>when (day) </a:t>
-              </a:r>
-              <a:r>
-                <a:rPr lang="en-US" sz="1800">
-                  <a:effectLst/>
-                  <a:latin typeface="JetBrains Mono"/>
-                </a:rPr>
-                <a:t>{</a:t>
-              </a:r>
-            </a:p>
-            <a:p>
-              <a:pPr>
-                <a:buNone/>
-              </a:pPr>
-              <a:r>
-                <a:rPr lang="en-US" sz="1800">
-                  <a:effectLst/>
-                  <a:latin typeface="JetBrains Mono"/>
-                </a:rPr>
-                <a:t>  </a:t>
-              </a:r>
-              <a:r>
-                <a:rPr lang="en-US" sz="1800">
-                  <a:solidFill>
-                    <a:srgbClr val="00B0F0"/>
-                  </a:solidFill>
-                  <a:effectLst/>
-                  <a:latin typeface="JetBrains Mono"/>
-                </a:rPr>
-                <a:t>1 -&gt; "Monday"</a:t>
-              </a:r>
-            </a:p>
-            <a:p>
-              <a:pPr>
-                <a:buNone/>
-              </a:pPr>
-              <a:r>
-                <a:rPr lang="en-US" sz="1800">
-                  <a:effectLst/>
-                  <a:latin typeface="JetBrains Mono"/>
-                </a:rPr>
-                <a:t>  2 -&gt; "Tuesday"</a:t>
-              </a:r>
-            </a:p>
-            <a:p>
-              <a:pPr>
-                <a:buNone/>
-              </a:pPr>
-              <a:r>
-                <a:rPr lang="en-US" sz="1800">
-                  <a:effectLst/>
-                  <a:latin typeface="JetBrains Mono"/>
-                </a:rPr>
-                <a:t>  3 -&gt; "Wednesday"</a:t>
-              </a:r>
-            </a:p>
-            <a:p>
-              <a:pPr>
-                <a:buNone/>
-              </a:pPr>
-              <a:r>
-                <a:rPr lang="en-US" sz="1800">
-                  <a:effectLst/>
-                  <a:latin typeface="JetBrains Mono"/>
-                </a:rPr>
-                <a:t>  4 -&gt; "Thursday"</a:t>
-              </a:r>
-            </a:p>
-            <a:p>
-              <a:pPr>
-                <a:buNone/>
-              </a:pPr>
-              <a:r>
-                <a:rPr lang="en-US" sz="1800">
-                  <a:effectLst/>
-                  <a:latin typeface="JetBrains Mono"/>
-                </a:rPr>
-                <a:t>  5 -&gt; "Friday"</a:t>
-              </a:r>
-            </a:p>
-            <a:p>
-              <a:pPr>
-                <a:buNone/>
-              </a:pPr>
-              <a:r>
-                <a:rPr lang="en-US" sz="1800">
-                  <a:effectLst/>
-                  <a:latin typeface="JetBrains Mono"/>
-                </a:rPr>
-                <a:t>  6 -&gt; "Saturday"</a:t>
-              </a:r>
-            </a:p>
-            <a:p>
-              <a:pPr>
-                <a:buNone/>
-              </a:pPr>
-              <a:r>
-                <a:rPr lang="en-US" sz="1800">
-                  <a:effectLst/>
-                  <a:latin typeface="JetBrains Mono"/>
-                </a:rPr>
-                <a:t>  7 -&gt; "Sunday"</a:t>
-              </a:r>
-            </a:p>
-            <a:p>
-              <a:pPr>
-                <a:buNone/>
-              </a:pPr>
-              <a:r>
-                <a:rPr lang="en-US" sz="1800">
-                  <a:effectLst/>
-                  <a:latin typeface="JetBrains Mono"/>
-                </a:rPr>
-                <a:t>  </a:t>
-              </a:r>
-              <a:r>
-                <a:rPr lang="en-US" sz="1800">
-                  <a:solidFill>
-                    <a:srgbClr val="92D050"/>
-                  </a:solidFill>
-                  <a:effectLst/>
-                  <a:latin typeface="JetBrains Mono"/>
-                </a:rPr>
-                <a:t>else -&gt; "Invalid day."</a:t>
-              </a:r>
-            </a:p>
-            <a:p>
-              <a:pPr>
-                <a:buNone/>
-              </a:pPr>
-              <a:r>
-                <a:rPr lang="en-US" sz="1800">
-                  <a:effectLst/>
-                  <a:latin typeface="JetBrains Mono"/>
-                </a:rPr>
-                <a:t>}</a:t>
-              </a:r>
-            </a:p>
-            <a:p>
-              <a:pPr>
-                <a:buNone/>
-              </a:pPr>
-              <a:r>
-                <a:rPr lang="en-US" sz="1800">
-                  <a:effectLst/>
-                  <a:latin typeface="JetBrains Mono"/>
-                </a:rPr>
-                <a:t>println(result)</a:t>
-              </a:r>
-            </a:p>
-          </p:txBody>
-        </p:sp>
-        <p:sp>
-          <p:nvSpPr>
-            <p:cNvPr id="2" name="TextBox 1">
-              <a:extLst>
-                <a:ext uri="{FF2B5EF4-FFF2-40B4-BE49-F238E27FC236}">
-                  <a16:creationId xmlns:a16="http://schemas.microsoft.com/office/drawing/2014/main" id="{A7E5A45B-4B9C-CADC-65AB-F1482AFACB4A}"/>
-                </a:ext>
-              </a:extLst>
-            </p:cNvPr>
-            <p:cNvSpPr txBox="1"/>
-            <p:nvPr/>
-          </p:nvSpPr>
-          <p:spPr>
-            <a:xfrm>
-              <a:off x="665018" y="4681963"/>
-              <a:ext cx="2770910" cy="192360"/>
-            </a:xfrm>
-            <a:prstGeom prst="rect">
-              <a:avLst/>
-            </a:prstGeom>
-            <a:noFill/>
-          </p:spPr>
-          <p:txBody>
-            <a:bodyPr wrap="square" rtlCol="0">
-              <a:spAutoFit/>
-            </a:bodyPr>
-            <a:lstStyle/>
-            <a:p>
-              <a:r>
-                <a:rPr lang="en-US" sz="650"/>
-                <a:t>Source:  https://www.w3schools.com/kotlin/kotlin_when.php</a:t>
-              </a:r>
-            </a:p>
-          </p:txBody>
-        </p:sp>
-      </p:grpSp>
+              </a:rPr>
+              <a:t>val</a:t>
+            </a:r>
+            <a:r>
+              <a:rPr lang="en-US" sz="1800" dirty="0">
+                <a:effectLst/>
+                <a:latin typeface="JetBrains Mono"/>
+              </a:rPr>
+              <a:t> day = 4</a:t>
+            </a:r>
+          </a:p>
+          <a:p>
+            <a:pPr>
+              <a:buNone/>
+            </a:pPr>
+            <a:endParaRPr lang="en-US" sz="1800" dirty="0">
+              <a:effectLst/>
+              <a:latin typeface="JetBrains Mono"/>
+            </a:endParaRPr>
+          </a:p>
+          <a:p>
+            <a:pPr>
+              <a:buNone/>
+            </a:pPr>
+            <a:r>
+              <a:rPr lang="en-US" sz="1800" dirty="0" err="1">
+                <a:effectLst/>
+                <a:latin typeface="JetBrains Mono"/>
+              </a:rPr>
+              <a:t>val</a:t>
+            </a:r>
+            <a:r>
+              <a:rPr lang="en-US" sz="1800" dirty="0">
+                <a:effectLst/>
+                <a:latin typeface="JetBrains Mono"/>
+              </a:rPr>
+              <a:t> result = </a:t>
+            </a:r>
+            <a:r>
+              <a:rPr lang="en-US" sz="1800" dirty="0">
+                <a:solidFill>
+                  <a:schemeClr val="accent3"/>
+                </a:solidFill>
+                <a:effectLst/>
+                <a:latin typeface="JetBrains Mono"/>
+              </a:rPr>
+              <a:t>when (day) </a:t>
+            </a:r>
+            <a:r>
+              <a:rPr lang="en-US" sz="1800" dirty="0">
+                <a:effectLst/>
+                <a:latin typeface="JetBrains Mono"/>
+              </a:rPr>
+              <a:t>{</a:t>
+            </a:r>
+          </a:p>
+          <a:p>
+            <a:pPr>
+              <a:buNone/>
+            </a:pPr>
+            <a:r>
+              <a:rPr lang="en-US" sz="1800" dirty="0">
+                <a:effectLst/>
+                <a:latin typeface="JetBrains Mono"/>
+              </a:rPr>
+              <a:t>  </a:t>
+            </a:r>
+            <a:r>
+              <a:rPr lang="en-US" sz="1800" dirty="0">
+                <a:solidFill>
+                  <a:srgbClr val="00B0F0"/>
+                </a:solidFill>
+                <a:effectLst/>
+                <a:latin typeface="JetBrains Mono"/>
+              </a:rPr>
+              <a:t>1 -&gt; "Monday"</a:t>
+            </a:r>
+          </a:p>
+          <a:p>
+            <a:pPr>
+              <a:buNone/>
+            </a:pPr>
+            <a:r>
+              <a:rPr lang="en-US" sz="1800" dirty="0">
+                <a:effectLst/>
+                <a:latin typeface="JetBrains Mono"/>
+              </a:rPr>
+              <a:t>  2 -&gt; "Tuesday"</a:t>
+            </a:r>
+          </a:p>
+          <a:p>
+            <a:pPr>
+              <a:buNone/>
+            </a:pPr>
+            <a:r>
+              <a:rPr lang="en-US" sz="1800" dirty="0">
+                <a:effectLst/>
+                <a:latin typeface="JetBrains Mono"/>
+              </a:rPr>
+              <a:t>  3 -&gt; "Wednesday"</a:t>
+            </a:r>
+          </a:p>
+          <a:p>
+            <a:pPr>
+              <a:buNone/>
+            </a:pPr>
+            <a:r>
+              <a:rPr lang="en-US" sz="1800" dirty="0">
+                <a:effectLst/>
+                <a:latin typeface="JetBrains Mono"/>
+              </a:rPr>
+              <a:t>  4 -&gt; "Thursday"</a:t>
+            </a:r>
+          </a:p>
+          <a:p>
+            <a:pPr>
+              <a:buNone/>
+            </a:pPr>
+            <a:r>
+              <a:rPr lang="en-US" sz="1800" dirty="0">
+                <a:effectLst/>
+                <a:latin typeface="JetBrains Mono"/>
+              </a:rPr>
+              <a:t>  5 -&gt; "Friday"</a:t>
+            </a:r>
+          </a:p>
+          <a:p>
+            <a:pPr>
+              <a:buNone/>
+            </a:pPr>
+            <a:r>
+              <a:rPr lang="en-US" sz="1800" dirty="0">
+                <a:effectLst/>
+                <a:latin typeface="JetBrains Mono"/>
+              </a:rPr>
+              <a:t>  6 -&gt; "Saturday"</a:t>
+            </a:r>
+          </a:p>
+          <a:p>
+            <a:pPr>
+              <a:buNone/>
+            </a:pPr>
+            <a:r>
+              <a:rPr lang="en-US" sz="1800" dirty="0">
+                <a:effectLst/>
+                <a:latin typeface="JetBrains Mono"/>
+              </a:rPr>
+              <a:t>  7 -&gt; "Sunday"</a:t>
+            </a:r>
+          </a:p>
+          <a:p>
+            <a:pPr>
+              <a:buNone/>
+            </a:pPr>
+            <a:r>
+              <a:rPr lang="en-US" sz="1800" dirty="0">
+                <a:effectLst/>
+                <a:latin typeface="JetBrains Mono"/>
+              </a:rPr>
+              <a:t>  </a:t>
+            </a:r>
+            <a:r>
+              <a:rPr lang="en-US" sz="1800" dirty="0">
+                <a:solidFill>
+                  <a:srgbClr val="92D050"/>
+                </a:solidFill>
+                <a:effectLst/>
+                <a:latin typeface="JetBrains Mono"/>
+              </a:rPr>
+              <a:t>else -&gt; "Invalid day."</a:t>
+            </a:r>
+          </a:p>
+          <a:p>
+            <a:pPr>
+              <a:buNone/>
+            </a:pPr>
+            <a:r>
+              <a:rPr lang="en-US" sz="1800" dirty="0">
+                <a:effectLst/>
+                <a:latin typeface="JetBrains Mono"/>
+              </a:rPr>
+              <a:t>}</a:t>
+            </a:r>
+          </a:p>
+          <a:p>
+            <a:pPr>
+              <a:buNone/>
+            </a:pPr>
+            <a:r>
+              <a:rPr lang="en-US" sz="1800" dirty="0" err="1">
+                <a:effectLst/>
+                <a:latin typeface="JetBrains Mono"/>
+              </a:rPr>
+              <a:t>println</a:t>
+            </a:r>
+            <a:r>
+              <a:rPr lang="en-US" sz="1800" dirty="0">
+                <a:effectLst/>
+                <a:latin typeface="JetBrains Mono"/>
+              </a:rPr>
+              <a:t>(result)</a:t>
+            </a:r>
+          </a:p>
+        </p:txBody>
+      </p:sp>
+      <p:sp>
+        <p:nvSpPr>
+          <p:cNvPr id="7" name="TextBox 6">
+            <a:extLst>
+              <a:ext uri="{FF2B5EF4-FFF2-40B4-BE49-F238E27FC236}">
+                <a16:creationId xmlns:a16="http://schemas.microsoft.com/office/drawing/2014/main" id="{35020C8F-DBA9-7DC8-D534-D588EDCC328E}"/>
+              </a:ext>
+            </a:extLst>
+          </p:cNvPr>
+          <p:cNvSpPr txBox="1"/>
+          <p:nvPr/>
+        </p:nvSpPr>
+        <p:spPr>
+          <a:xfrm>
+            <a:off x="4642338" y="6360049"/>
+            <a:ext cx="7301009" cy="246221"/>
+          </a:xfrm>
+          <a:prstGeom prst="rect">
+            <a:avLst/>
+          </a:prstGeom>
+          <a:noFill/>
+        </p:spPr>
+        <p:txBody>
+          <a:bodyPr wrap="square" rtlCol="0">
+            <a:spAutoFit/>
+          </a:bodyPr>
+          <a:lstStyle/>
+          <a:p>
+            <a:pPr algn="r"/>
+            <a:r>
+              <a:rPr lang="fr-FR" sz="1000" dirty="0"/>
+              <a:t>Source:  https://www.w3schools.com/kotlin/kotlin_when.php</a:t>
+            </a:r>
+          </a:p>
+        </p:txBody>
+      </p:sp>
     </p:spTree>
     <p:extLst>
       <p:ext uri="{BB962C8B-B14F-4D97-AF65-F5344CB8AC3E}">

--- a/KP/Blitzlicht_Kotlin.pptx
+++ b/KP/Blitzlicht_Kotlin.pptx
@@ -5,16 +5,17 @@
     <p:sldMasterId id="2147483735" r:id="rId1"/>
   </p:sldMasterIdLst>
   <p:notesMasterIdLst>
-    <p:notesMasterId r:id="rId9"/>
+    <p:notesMasterId r:id="rId10"/>
   </p:notesMasterIdLst>
   <p:sldIdLst>
-    <p:sldId id="256" r:id="rId2"/>
-    <p:sldId id="299" r:id="rId3"/>
-    <p:sldId id="301" r:id="rId4"/>
-    <p:sldId id="294" r:id="rId5"/>
-    <p:sldId id="296" r:id="rId6"/>
-    <p:sldId id="298" r:id="rId7"/>
-    <p:sldId id="300" r:id="rId8"/>
+    <p:sldId id="302" r:id="rId2"/>
+    <p:sldId id="256" r:id="rId3"/>
+    <p:sldId id="299" r:id="rId4"/>
+    <p:sldId id="301" r:id="rId5"/>
+    <p:sldId id="294" r:id="rId6"/>
+    <p:sldId id="296" r:id="rId7"/>
+    <p:sldId id="298" r:id="rId8"/>
+    <p:sldId id="300" r:id="rId9"/>
   </p:sldIdLst>
   <p:sldSz cx="12192000" cy="6858000"/>
   <p:notesSz cx="6858000" cy="9144000"/>
@@ -203,7 +204,7 @@
           <a:p>
             <a:fld id="{DB3DAD76-3859-4D52-8B81-C27FCE0A7D18}" type="datetimeFigureOut">
               <a:rPr lang="en-US" smtClean="0"/>
-              <a:t>11/25/2025</a:t>
+              <a:t>11/26/2025</a:t>
             </a:fld>
             <a:endParaRPr lang="en-US"/>
           </a:p>
@@ -478,6 +479,121 @@
         <p:cNvPr id="1" name="">
           <a:extLst>
             <a:ext uri="{FF2B5EF4-FFF2-40B4-BE49-F238E27FC236}">
+              <a16:creationId xmlns:a16="http://schemas.microsoft.com/office/drawing/2014/main" id="{36B36126-EF57-F334-2A2C-B38B0AC12D3F}"/>
+            </a:ext>
+          </a:extLst>
+        </p:cNvPr>
+        <p:cNvGrpSpPr/>
+        <p:nvPr/>
+      </p:nvGrpSpPr>
+      <p:grpSpPr>
+        <a:xfrm>
+          <a:off x="0" y="0"/>
+          <a:ext cx="0" cy="0"/>
+          <a:chOff x="0" y="0"/>
+          <a:chExt cx="0" cy="0"/>
+        </a:xfrm>
+      </p:grpSpPr>
+      <p:sp>
+        <p:nvSpPr>
+          <p:cNvPr id="2" name="Slide Image Placeholder 1">
+            <a:extLst>
+              <a:ext uri="{FF2B5EF4-FFF2-40B4-BE49-F238E27FC236}">
+                <a16:creationId xmlns:a16="http://schemas.microsoft.com/office/drawing/2014/main" id="{C535B86D-8D9B-FDC7-85EA-EE6D3D483548}"/>
+              </a:ext>
+            </a:extLst>
+          </p:cNvPr>
+          <p:cNvSpPr>
+            <a:spLocks noGrp="1" noRot="1" noChangeAspect="1"/>
+          </p:cNvSpPr>
+          <p:nvPr>
+            <p:ph type="sldImg"/>
+          </p:nvPr>
+        </p:nvSpPr>
+        <p:spPr/>
+        <p:txBody>
+          <a:bodyPr/>
+          <a:lstStyle/>
+          <a:p>
+            <a:endParaRPr lang="en-US"/>
+          </a:p>
+        </p:txBody>
+      </p:sp>
+      <p:sp>
+        <p:nvSpPr>
+          <p:cNvPr id="3" name="Notes Placeholder 2">
+            <a:extLst>
+              <a:ext uri="{FF2B5EF4-FFF2-40B4-BE49-F238E27FC236}">
+                <a16:creationId xmlns:a16="http://schemas.microsoft.com/office/drawing/2014/main" id="{AFEF71E6-A417-9636-9295-CEDAE34A6050}"/>
+              </a:ext>
+            </a:extLst>
+          </p:cNvPr>
+          <p:cNvSpPr>
+            <a:spLocks noGrp="1"/>
+          </p:cNvSpPr>
+          <p:nvPr>
+            <p:ph type="body" idx="1"/>
+          </p:nvPr>
+        </p:nvSpPr>
+        <p:spPr/>
+        <p:txBody>
+          <a:bodyPr/>
+          <a:lstStyle/>
+          <a:p>
+            <a:endParaRPr lang="en-US"/>
+          </a:p>
+        </p:txBody>
+      </p:sp>
+      <p:sp>
+        <p:nvSpPr>
+          <p:cNvPr id="4" name="Slide Number Placeholder 3">
+            <a:extLst>
+              <a:ext uri="{FF2B5EF4-FFF2-40B4-BE49-F238E27FC236}">
+                <a16:creationId xmlns:a16="http://schemas.microsoft.com/office/drawing/2014/main" id="{B1AEFFD6-BE77-DFCA-C1BA-36E4F13FCC09}"/>
+              </a:ext>
+            </a:extLst>
+          </p:cNvPr>
+          <p:cNvSpPr>
+            <a:spLocks noGrp="1"/>
+          </p:cNvSpPr>
+          <p:nvPr>
+            <p:ph type="sldNum" sz="quarter" idx="5"/>
+          </p:nvPr>
+        </p:nvSpPr>
+        <p:spPr/>
+        <p:txBody>
+          <a:bodyPr/>
+          <a:lstStyle/>
+          <a:p>
+            <a:fld id="{60D61062-E9D8-4DAB-8118-1CF0D558F973}" type="slidenum">
+              <a:rPr lang="en-US" smtClean="0"/>
+              <a:t>1</a:t>
+            </a:fld>
+            <a:endParaRPr lang="en-US"/>
+          </a:p>
+        </p:txBody>
+      </p:sp>
+    </p:spTree>
+    <p:extLst>
+      <p:ext uri="{BB962C8B-B14F-4D97-AF65-F5344CB8AC3E}">
+        <p14:creationId xmlns:p14="http://schemas.microsoft.com/office/powerpoint/2010/main" val="3699547320"/>
+      </p:ext>
+    </p:extLst>
+  </p:cSld>
+  <p:clrMapOvr>
+    <a:masterClrMapping/>
+  </p:clrMapOvr>
+</p:notes>
+</file>
+
+<file path=ppt/notesSlides/notesSlide2.xml><?xml version="1.0" encoding="utf-8"?>
+<p:notes xmlns:a="http://schemas.openxmlformats.org/drawingml/2006/main" xmlns:r="http://schemas.openxmlformats.org/officeDocument/2006/relationships" xmlns:p="http://schemas.openxmlformats.org/presentationml/2006/main">
+  <p:cSld>
+    <p:spTree>
+      <p:nvGrpSpPr>
+        <p:cNvPr id="1" name="">
+          <a:extLst>
+            <a:ext uri="{FF2B5EF4-FFF2-40B4-BE49-F238E27FC236}">
               <a16:creationId xmlns:a16="http://schemas.microsoft.com/office/drawing/2014/main" id="{0DE27C79-C440-023F-7C7D-A439550D7C22}"/>
             </a:ext>
           </a:extLst>
@@ -566,7 +682,7 @@
           <a:p>
             <a:fld id="{60D61062-E9D8-4DAB-8118-1CF0D558F973}" type="slidenum">
               <a:rPr lang="en-US" smtClean="0"/>
-              <a:t>2</a:t>
+              <a:t>3</a:t>
             </a:fld>
             <a:endParaRPr lang="en-US"/>
           </a:p>
@@ -585,7 +701,7 @@
 </p:notes>
 </file>
 
-<file path=ppt/notesSlides/notesSlide2.xml><?xml version="1.0" encoding="utf-8"?>
+<file path=ppt/notesSlides/notesSlide3.xml><?xml version="1.0" encoding="utf-8"?>
 <p:notes xmlns:a="http://schemas.openxmlformats.org/drawingml/2006/main" xmlns:r="http://schemas.openxmlformats.org/officeDocument/2006/relationships" xmlns:p="http://schemas.openxmlformats.org/presentationml/2006/main">
   <p:cSld>
     <p:spTree>
@@ -681,7 +797,7 @@
           <a:p>
             <a:fld id="{60D61062-E9D8-4DAB-8118-1CF0D558F973}" type="slidenum">
               <a:rPr lang="en-US" smtClean="0"/>
-              <a:t>3</a:t>
+              <a:t>4</a:t>
             </a:fld>
             <a:endParaRPr lang="en-US"/>
           </a:p>
@@ -700,7 +816,7 @@
 </p:notes>
 </file>
 
-<file path=ppt/notesSlides/notesSlide3.xml><?xml version="1.0" encoding="utf-8"?>
+<file path=ppt/notesSlides/notesSlide4.xml><?xml version="1.0" encoding="utf-8"?>
 <p:notes xmlns:a="http://schemas.openxmlformats.org/drawingml/2006/main" xmlns:r="http://schemas.openxmlformats.org/officeDocument/2006/relationships" xmlns:p="http://schemas.openxmlformats.org/presentationml/2006/main">
   <p:cSld>
     <p:spTree>
@@ -772,7 +888,7 @@
           <a:p>
             <a:fld id="{60D61062-E9D8-4DAB-8118-1CF0D558F973}" type="slidenum">
               <a:rPr lang="en-US" smtClean="0"/>
-              <a:t>4</a:t>
+              <a:t>5</a:t>
             </a:fld>
             <a:endParaRPr lang="en-US"/>
           </a:p>
@@ -791,7 +907,7 @@
 </p:notes>
 </file>
 
-<file path=ppt/notesSlides/notesSlide4.xml><?xml version="1.0" encoding="utf-8"?>
+<file path=ppt/notesSlides/notesSlide5.xml><?xml version="1.0" encoding="utf-8"?>
 <p:notes xmlns:a="http://schemas.openxmlformats.org/drawingml/2006/main" xmlns:r="http://schemas.openxmlformats.org/officeDocument/2006/relationships" xmlns:p="http://schemas.openxmlformats.org/presentationml/2006/main">
   <p:cSld>
     <p:spTree>
@@ -887,7 +1003,7 @@
           <a:p>
             <a:fld id="{60D61062-E9D8-4DAB-8118-1CF0D558F973}" type="slidenum">
               <a:rPr lang="en-US" smtClean="0"/>
-              <a:t>5</a:t>
+              <a:t>6</a:t>
             </a:fld>
             <a:endParaRPr lang="en-US"/>
           </a:p>
@@ -906,7 +1022,7 @@
 </p:notes>
 </file>
 
-<file path=ppt/notesSlides/notesSlide5.xml><?xml version="1.0" encoding="utf-8"?>
+<file path=ppt/notesSlides/notesSlide6.xml><?xml version="1.0" encoding="utf-8"?>
 <p:notes xmlns:a="http://schemas.openxmlformats.org/drawingml/2006/main" xmlns:r="http://schemas.openxmlformats.org/officeDocument/2006/relationships" xmlns:p="http://schemas.openxmlformats.org/presentationml/2006/main">
   <p:cSld>
     <p:spTree>
@@ -975,6 +1091,22 @@
           <a:bodyPr/>
           <a:lstStyle/>
           <a:p>
+            <a:r>
+              <a:rPr lang="de-DE"/>
+              <a:t>Primary constructor also has constructor keyword but can be omitted without visibility modifier or annotations</a:t>
+            </a:r>
+          </a:p>
+          <a:p>
+            <a:r>
+              <a:rPr lang="de-DE"/>
+              <a:t>Secondary is executed after primary</a:t>
+            </a:r>
+          </a:p>
+          <a:p>
+            <a:r>
+              <a:rPr lang="de-DE"/>
+              <a:t>Class can use inheritance by declaring it as „open“</a:t>
+            </a:r>
             <a:endParaRPr lang="en-US"/>
           </a:p>
         </p:txBody>
@@ -1002,7 +1134,7 @@
           <a:p>
             <a:fld id="{60D61062-E9D8-4DAB-8118-1CF0D558F973}" type="slidenum">
               <a:rPr lang="en-US" smtClean="0"/>
-              <a:t>6</a:t>
+              <a:t>7</a:t>
             </a:fld>
             <a:endParaRPr lang="en-US"/>
           </a:p>
@@ -1021,7 +1153,7 @@
 </p:notes>
 </file>
 
-<file path=ppt/notesSlides/notesSlide6.xml><?xml version="1.0" encoding="utf-8"?>
+<file path=ppt/notesSlides/notesSlide7.xml><?xml version="1.0" encoding="utf-8"?>
 <p:notes xmlns:a="http://schemas.openxmlformats.org/drawingml/2006/main" xmlns:r="http://schemas.openxmlformats.org/officeDocument/2006/relationships" xmlns:p="http://schemas.openxmlformats.org/presentationml/2006/main">
   <p:cSld>
     <p:spTree>
@@ -1117,7 +1249,7 @@
           <a:p>
             <a:fld id="{60D61062-E9D8-4DAB-8118-1CF0D558F973}" type="slidenum">
               <a:rPr lang="en-US" smtClean="0"/>
-              <a:t>7</a:t>
+              <a:t>8</a:t>
             </a:fld>
             <a:endParaRPr lang="en-US"/>
           </a:p>
@@ -1430,7 +1562,7 @@
           <a:p>
             <a:fld id="{740BD348-92FB-45D5-94E3-8A197772B7D9}" type="datetimeFigureOut">
               <a:rPr lang="en-US" smtClean="0"/>
-              <a:t>11/25/2025</a:t>
+              <a:t>11/26/2025</a:t>
             </a:fld>
             <a:endParaRPr lang="en-US"/>
           </a:p>
@@ -1749,7 +1881,7 @@
           <a:p>
             <a:fld id="{740BD348-92FB-45D5-94E3-8A197772B7D9}" type="datetimeFigureOut">
               <a:rPr lang="en-US" smtClean="0"/>
-              <a:t>11/25/2025</a:t>
+              <a:t>11/26/2025</a:t>
             </a:fld>
             <a:endParaRPr lang="en-US"/>
           </a:p>
@@ -2244,7 +2376,7 @@
           <a:p>
             <a:fld id="{740BD348-92FB-45D5-94E3-8A197772B7D9}" type="datetimeFigureOut">
               <a:rPr lang="en-US" smtClean="0"/>
-              <a:t>11/25/2025</a:t>
+              <a:t>11/26/2025</a:t>
             </a:fld>
             <a:endParaRPr lang="en-US"/>
           </a:p>
@@ -2620,7 +2752,7 @@
           <a:p>
             <a:fld id="{740BD348-92FB-45D5-94E3-8A197772B7D9}" type="datetimeFigureOut">
               <a:rPr lang="en-US" smtClean="0"/>
-              <a:t>11/25/2025</a:t>
+              <a:t>11/26/2025</a:t>
             </a:fld>
             <a:endParaRPr lang="en-US"/>
           </a:p>
@@ -2900,7 +3032,7 @@
           <a:p>
             <a:fld id="{740BD348-92FB-45D5-94E3-8A197772B7D9}" type="datetimeFigureOut">
               <a:rPr lang="en-US" smtClean="0"/>
-              <a:t>11/25/2025</a:t>
+              <a:t>11/26/2025</a:t>
             </a:fld>
             <a:endParaRPr lang="en-US"/>
           </a:p>
@@ -3192,7 +3324,7 @@
           <a:p>
             <a:fld id="{740BD348-92FB-45D5-94E3-8A197772B7D9}" type="datetimeFigureOut">
               <a:rPr lang="en-US" smtClean="0"/>
-              <a:t>11/25/2025</a:t>
+              <a:t>11/26/2025</a:t>
             </a:fld>
             <a:endParaRPr lang="en-US"/>
           </a:p>
@@ -3482,7 +3614,7 @@
           <a:p>
             <a:fld id="{740BD348-92FB-45D5-94E3-8A197772B7D9}" type="datetimeFigureOut">
               <a:rPr lang="en-US" smtClean="0"/>
-              <a:t>11/25/2025</a:t>
+              <a:t>11/26/2025</a:t>
             </a:fld>
             <a:endParaRPr lang="en-US"/>
           </a:p>
@@ -3832,7 +3964,7 @@
           <a:p>
             <a:fld id="{740BD348-92FB-45D5-94E3-8A197772B7D9}" type="datetimeFigureOut">
               <a:rPr lang="en-US" smtClean="0"/>
-              <a:t>11/25/2025</a:t>
+              <a:t>11/26/2025</a:t>
             </a:fld>
             <a:endParaRPr lang="en-US"/>
           </a:p>
@@ -4178,7 +4310,7 @@
           <a:p>
             <a:fld id="{740BD348-92FB-45D5-94E3-8A197772B7D9}" type="datetimeFigureOut">
               <a:rPr lang="en-US" smtClean="0"/>
-              <a:t>11/25/2025</a:t>
+              <a:t>11/26/2025</a:t>
             </a:fld>
             <a:endParaRPr lang="en-US"/>
           </a:p>
@@ -4662,7 +4794,7 @@
           <a:p>
             <a:fld id="{740BD348-92FB-45D5-94E3-8A197772B7D9}" type="datetimeFigureOut">
               <a:rPr lang="en-US" smtClean="0"/>
-              <a:t>11/25/2025</a:t>
+              <a:t>11/26/2025</a:t>
             </a:fld>
             <a:endParaRPr lang="en-US"/>
           </a:p>
@@ -4890,7 +5022,7 @@
           <a:p>
             <a:fld id="{740BD348-92FB-45D5-94E3-8A197772B7D9}" type="datetimeFigureOut">
               <a:rPr lang="en-US" smtClean="0"/>
-              <a:t>11/25/2025</a:t>
+              <a:t>11/26/2025</a:t>
             </a:fld>
             <a:endParaRPr lang="en-US"/>
           </a:p>
@@ -4985,7 +5117,7 @@
           <a:p>
             <a:fld id="{740BD348-92FB-45D5-94E3-8A197772B7D9}" type="datetimeFigureOut">
               <a:rPr lang="en-US" smtClean="0"/>
-              <a:t>11/25/2025</a:t>
+              <a:t>11/26/2025</a:t>
             </a:fld>
             <a:endParaRPr lang="en-US"/>
           </a:p>
@@ -5459,7 +5591,7 @@
           <a:p>
             <a:fld id="{740BD348-92FB-45D5-94E3-8A197772B7D9}" type="datetimeFigureOut">
               <a:rPr lang="en-US" smtClean="0"/>
-              <a:t>11/25/2025</a:t>
+              <a:t>11/26/2025</a:t>
             </a:fld>
             <a:endParaRPr lang="en-US"/>
           </a:p>
@@ -5771,7 +5903,7 @@
           <a:p>
             <a:fld id="{740BD348-92FB-45D5-94E3-8A197772B7D9}" type="datetimeFigureOut">
               <a:rPr lang="en-US" smtClean="0"/>
-              <a:t>11/25/2025</a:t>
+              <a:t>11/26/2025</a:t>
             </a:fld>
             <a:endParaRPr lang="en-US"/>
           </a:p>
@@ -6044,7 +6176,7 @@
             <a:fld id="{740BD348-92FB-45D5-94E3-8A197772B7D9}" type="datetimeFigureOut">
               <a:rPr lang="en-US" smtClean="0"/>
               <a:pPr/>
-              <a:t>11/25/2025</a:t>
+              <a:t>11/26/2025</a:t>
             </a:fld>
             <a:endParaRPr lang="en-US"/>
           </a:p>
@@ -6483,6 +6615,101 @@
   <p:cSld>
     <p:spTree>
       <p:nvGrpSpPr>
+        <p:cNvPr id="1" name="">
+          <a:extLst>
+            <a:ext uri="{FF2B5EF4-FFF2-40B4-BE49-F238E27FC236}">
+              <a16:creationId xmlns:a16="http://schemas.microsoft.com/office/drawing/2014/main" id="{0B052D5E-789E-474C-70AE-A01E474209E3}"/>
+            </a:ext>
+          </a:extLst>
+        </p:cNvPr>
+        <p:cNvGrpSpPr/>
+        <p:nvPr/>
+      </p:nvGrpSpPr>
+      <p:grpSpPr>
+        <a:xfrm>
+          <a:off x="0" y="0"/>
+          <a:ext cx="0" cy="0"/>
+          <a:chOff x="0" y="0"/>
+          <a:chExt cx="0" cy="0"/>
+        </a:xfrm>
+      </p:grpSpPr>
+      <p:sp>
+        <p:nvSpPr>
+          <p:cNvPr id="2" name="Rectangle 1">
+            <a:extLst>
+              <a:ext uri="{FF2B5EF4-FFF2-40B4-BE49-F238E27FC236}">
+                <a16:creationId xmlns:a16="http://schemas.microsoft.com/office/drawing/2014/main" id="{963834BC-5ECC-DBE5-570B-3FCA9E1B6B4D}"/>
+              </a:ext>
+            </a:extLst>
+          </p:cNvPr>
+          <p:cNvSpPr/>
+          <p:nvPr/>
+        </p:nvSpPr>
+        <p:spPr>
+          <a:xfrm>
+            <a:off x="0" y="0"/>
+            <a:ext cx="12192000" cy="6858000"/>
+          </a:xfrm>
+          <a:prstGeom prst="rect">
+            <a:avLst/>
+          </a:prstGeom>
+          <a:pattFill prst="wdUpDiag">
+            <a:fgClr>
+              <a:srgbClr val="212121"/>
+            </a:fgClr>
+            <a:bgClr>
+              <a:schemeClr val="bg1"/>
+            </a:bgClr>
+          </a:pattFill>
+          <a:ln>
+            <a:solidFill>
+              <a:srgbClr val="212121"/>
+            </a:solidFill>
+          </a:ln>
+        </p:spPr>
+        <p:style>
+          <a:lnRef idx="2">
+            <a:schemeClr val="dk1">
+              <a:shade val="15000"/>
+            </a:schemeClr>
+          </a:lnRef>
+          <a:fillRef idx="1">
+            <a:schemeClr val="dk1"/>
+          </a:fillRef>
+          <a:effectRef idx="0">
+            <a:schemeClr val="dk1"/>
+          </a:effectRef>
+          <a:fontRef idx="minor">
+            <a:schemeClr val="lt1"/>
+          </a:fontRef>
+        </p:style>
+        <p:txBody>
+          <a:bodyPr rtlCol="0" anchor="ctr"/>
+          <a:lstStyle/>
+          <a:p>
+            <a:pPr algn="ctr"/>
+            <a:endParaRPr lang="en-US"/>
+          </a:p>
+        </p:txBody>
+      </p:sp>
+    </p:spTree>
+    <p:extLst>
+      <p:ext uri="{BB962C8B-B14F-4D97-AF65-F5344CB8AC3E}">
+        <p14:creationId xmlns:p14="http://schemas.microsoft.com/office/powerpoint/2010/main" val="4291990867"/>
+      </p:ext>
+    </p:extLst>
+  </p:cSld>
+  <p:clrMapOvr>
+    <a:masterClrMapping/>
+  </p:clrMapOvr>
+</p:sld>
+</file>
+
+<file path=ppt/slides/slide2.xml><?xml version="1.0" encoding="utf-8"?>
+<p:sld xmlns:a="http://schemas.openxmlformats.org/drawingml/2006/main" xmlns:r="http://schemas.openxmlformats.org/officeDocument/2006/relationships" xmlns:p="http://schemas.openxmlformats.org/presentationml/2006/main">
+  <p:cSld>
+    <p:spTree>
+      <p:nvGrpSpPr>
         <p:cNvPr id="1" name=""/>
         <p:cNvGrpSpPr/>
         <p:nvPr/>
@@ -6518,7 +6745,7 @@
           <a:p>
             <a:r>
               <a:rPr lang="en-US"/>
-              <a:t>Programmiersprache</a:t>
+              <a:t>Programming Language</a:t>
             </a:r>
             <a:br>
               <a:rPr lang="en-US"/>
@@ -6526,10 +6753,18 @@
             <a:r>
               <a:rPr lang="en-US">
                 <a:solidFill>
-                  <a:schemeClr val="accent3"/>
+                  <a:schemeClr val="tx1"/>
                 </a:solidFill>
               </a:rPr>
               <a:t>Kotlin</a:t>
+            </a:r>
+            <a:r>
+              <a:rPr lang="en-US" sz="2000">
+                <a:solidFill>
+                  <a:schemeClr val="tx1"/>
+                </a:solidFill>
+              </a:rPr>
+              <a:t>(object oriented)</a:t>
             </a:r>
           </a:p>
         </p:txBody>
@@ -6550,20 +6785,79 @@
             <p:ph type="subTitle" idx="1"/>
           </p:nvPr>
         </p:nvSpPr>
-        <p:spPr/>
-        <p:txBody>
-          <a:bodyPr/>
-          <a:lstStyle/>
-          <a:p>
-            <a:r>
-              <a:rPr lang="en-US"/>
-              <a:t>General Purpose Language von </a:t>
-            </a:r>
-            <a:r>
-              <a:rPr lang="en-US" err="1"/>
-              <a:t>Jetbrains</a:t>
-            </a:r>
-            <a:endParaRPr lang="en-US"/>
+        <p:spPr>
+          <a:xfrm>
+            <a:off x="810001" y="5280847"/>
+            <a:ext cx="10572000" cy="1099856"/>
+          </a:xfrm>
+        </p:spPr>
+        <p:txBody>
+          <a:bodyPr>
+            <a:normAutofit fontScale="92500" lnSpcReduction="10000"/>
+          </a:bodyPr>
+          <a:lstStyle/>
+          <a:p>
+            <a:r>
+              <a:rPr lang="en-US" err="1">
+                <a:solidFill>
+                  <a:schemeClr val="tx1">
+                    <a:lumMod val="85000"/>
+                  </a:schemeClr>
+                </a:solidFill>
+              </a:rPr>
+              <a:t>Konzepte</a:t>
+            </a:r>
+            <a:r>
+              <a:rPr lang="en-US">
+                <a:solidFill>
+                  <a:schemeClr val="tx1">
+                    <a:lumMod val="85000"/>
+                  </a:schemeClr>
+                </a:solidFill>
+              </a:rPr>
+              <a:t> der </a:t>
+            </a:r>
+            <a:r>
+              <a:rPr lang="en-US" err="1">
+                <a:solidFill>
+                  <a:schemeClr val="tx1">
+                    <a:lumMod val="85000"/>
+                  </a:schemeClr>
+                </a:solidFill>
+              </a:rPr>
+              <a:t>Programmiersprachen</a:t>
+            </a:r>
+            <a:endParaRPr lang="en-US">
+              <a:solidFill>
+                <a:schemeClr val="tx1">
+                  <a:lumMod val="85000"/>
+                </a:schemeClr>
+              </a:solidFill>
+            </a:endParaRPr>
+          </a:p>
+          <a:p>
+            <a:r>
+              <a:rPr lang="en-US">
+                <a:solidFill>
+                  <a:schemeClr val="tx1">
+                    <a:lumMod val="85000"/>
+                  </a:schemeClr>
+                </a:solidFill>
+              </a:rPr>
+              <a:t>Julia Ihrenberger</a:t>
+            </a:r>
+          </a:p>
+          <a:p>
+            <a:r>
+              <a:rPr lang="en-US">
+                <a:solidFill>
+                  <a:schemeClr val="tx1">
+                    <a:lumMod val="85000"/>
+                  </a:schemeClr>
+                </a:solidFill>
+              </a:rPr>
+              <a:t>26.11.2025</a:t>
+            </a:r>
           </a:p>
         </p:txBody>
       </p:sp>
@@ -6577,10 +6871,13 @@
   <p:clrMapOvr>
     <a:masterClrMapping/>
   </p:clrMapOvr>
+  <p:transition spd="slow">
+    <p:cover/>
+  </p:transition>
 </p:sld>
 </file>
 
-<file path=ppt/slides/slide2.xml><?xml version="1.0" encoding="utf-8"?>
+<file path=ppt/slides/slide3.xml><?xml version="1.0" encoding="utf-8"?>
 <p:sld xmlns:a="http://schemas.openxmlformats.org/drawingml/2006/main" xmlns:r="http://schemas.openxmlformats.org/officeDocument/2006/relationships" xmlns:p="http://schemas.openxmlformats.org/presentationml/2006/main" showMasterSp="0">
   <p:cSld>
     <p:bg>
@@ -6630,7 +6927,7 @@
         </p:nvSpPr>
         <p:spPr>
           <a:xfrm>
-            <a:off x="248652" y="233413"/>
+            <a:off x="248650" y="233412"/>
             <a:ext cx="11694695" cy="6391174"/>
           </a:xfrm>
           <a:prstGeom prst="rect">
@@ -6823,8 +7120,8 @@
         </p:nvSpPr>
         <p:spPr>
           <a:xfrm>
-            <a:off x="1728175" y="2419568"/>
-            <a:ext cx="8735648" cy="1754326"/>
+            <a:off x="1728174" y="1859339"/>
+            <a:ext cx="8735648" cy="3139321"/>
           </a:xfrm>
           <a:prstGeom prst="rect">
             <a:avLst/>
@@ -6842,11 +7139,11 @@
               <a:buChar char="•"/>
             </a:pPr>
             <a:r>
-              <a:rPr lang="en-US" dirty="0"/>
+              <a:rPr lang="en-US"/>
               <a:t>Kotlin was developed by </a:t>
             </a:r>
             <a:r>
-              <a:rPr lang="en-US" dirty="0" err="1">
+              <a:rPr lang="en-US" err="1">
                 <a:solidFill>
                   <a:schemeClr val="accent3"/>
                 </a:solidFill>
@@ -6854,15 +7151,15 @@
               <a:t>Jetbrains</a:t>
             </a:r>
             <a:r>
-              <a:rPr lang="en-US" dirty="0"/>
+              <a:rPr lang="en-US"/>
               <a:t> (</a:t>
             </a:r>
             <a:r>
-              <a:rPr lang="en-US" dirty="0" err="1"/>
+              <a:rPr lang="en-US" err="1"/>
               <a:t>Intellj</a:t>
             </a:r>
             <a:r>
-              <a:rPr lang="en-US" dirty="0"/>
+              <a:rPr lang="en-US"/>
               <a:t> Idea, Rider, Goland) and released in 2011</a:t>
             </a:r>
           </a:p>
@@ -6871,7 +7168,7 @@
               <a:buFont typeface="Arial" panose="020B0604020202020204" pitchFamily="34" charset="0"/>
               <a:buChar char="•"/>
             </a:pPr>
-            <a:endParaRPr lang="en-US" dirty="0"/>
+            <a:endParaRPr lang="en-US"/>
           </a:p>
           <a:p>
             <a:pPr marL="285750" indent="-285750">
@@ -6879,11 +7176,11 @@
               <a:buChar char="•"/>
             </a:pPr>
             <a:r>
-              <a:rPr lang="en-US" dirty="0"/>
+              <a:rPr lang="en-US"/>
               <a:t>Goal: </a:t>
             </a:r>
             <a:r>
-              <a:rPr lang="en-US" dirty="0">
+              <a:rPr lang="en-US">
                 <a:solidFill>
                   <a:srgbClr val="00B0F0"/>
                 </a:solidFill>
@@ -6891,22 +7188,64 @@
               <a:t>concise and expressive</a:t>
             </a:r>
             <a:r>
-              <a:rPr lang="en-US" dirty="0"/>
-              <a:t>, interoperable with Java (previous language used), introduction of new constructs such as higher order function</a:t>
-            </a:r>
-          </a:p>
-          <a:p>
-            <a:r>
-              <a:rPr lang="en-US" dirty="0"/>
+              <a:rPr lang="en-US"/>
+              <a:t>, interoperable with Java (previous language used), introduction of new constructs such as higher order functions</a:t>
+            </a:r>
+          </a:p>
+          <a:p>
+            <a:r>
+              <a:rPr lang="en-US"/>
               <a:t>	&gt; a </a:t>
             </a:r>
             <a:r>
-              <a:rPr lang="en-US" dirty="0">
+              <a:rPr lang="en-US">
                 <a:solidFill>
                   <a:srgbClr val="92D050"/>
                 </a:solidFill>
               </a:rPr>
               <a:t>better Java</a:t>
+            </a:r>
+          </a:p>
+          <a:p>
+            <a:endParaRPr lang="en-US"/>
+          </a:p>
+          <a:p>
+            <a:pPr marL="285750" indent="-285750">
+              <a:buFont typeface="Arial" panose="020B0604020202020204" pitchFamily="34" charset="0"/>
+              <a:buChar char="•"/>
+            </a:pPr>
+            <a:r>
+              <a:rPr lang="en-US"/>
+              <a:t>Used in: </a:t>
+            </a:r>
+            <a:r>
+              <a:rPr lang="en-US" err="1"/>
+              <a:t>mobie</a:t>
+            </a:r>
+            <a:r>
+              <a:rPr lang="en-US"/>
+              <a:t> applications (android), web development, server side application, data science</a:t>
+            </a:r>
+          </a:p>
+          <a:p>
+            <a:endParaRPr lang="en-US"/>
+          </a:p>
+          <a:p>
+            <a:pPr marL="285750" indent="-285750">
+              <a:buFont typeface="Arial" panose="020B0604020202020204" pitchFamily="34" charset="0"/>
+              <a:buChar char="•"/>
+            </a:pPr>
+            <a:r>
+              <a:rPr lang="en-US"/>
+              <a:t>IDE: </a:t>
+            </a:r>
+            <a:r>
+              <a:rPr lang="en-US" err="1"/>
+              <a:t>Intellj</a:t>
+            </a:r>
+            <a:r>
+              <a:rPr lang="en-US"/>
+              <a:t> Idea, Android Studio</a:t>
             </a:r>
           </a:p>
         </p:txBody>
@@ -6925,8 +7264,8 @@
         </p:nvSpPr>
         <p:spPr>
           <a:xfrm>
-            <a:off x="3326004" y="6360049"/>
-            <a:ext cx="8617343" cy="246221"/>
+            <a:off x="3326002" y="6149945"/>
+            <a:ext cx="8617343" cy="400110"/>
           </a:xfrm>
           <a:prstGeom prst="rect">
             <a:avLst/>
@@ -6941,10 +7280,10 @@
           <a:p>
             <a:pPr algn="r"/>
             <a:r>
-              <a:rPr lang="de-DE" sz="1000" dirty="0"/>
-              <a:t>Source: https://www.oreilly.com/library/view/kotlin-for-enterprise/9781788997270/ea4ec584-db64-4026-89a8-2086301eb9c5.xhtml</a:t>
-            </a:r>
-            <a:endParaRPr lang="en-US" sz="1000" dirty="0"/>
+              <a:rPr lang="de-DE" sz="1000"/>
+              <a:t>Source: https://www.oreilly.com/library/view/kotlin-for-enterprise/9781788997270/ea4ec584-db64-4026-89a8-2086301eb9c5.xhtml, https://www.w3schools.com/kotlin/kotlin_intro.php</a:t>
+            </a:r>
+            <a:endParaRPr lang="en-US" sz="1000"/>
           </a:p>
         </p:txBody>
       </p:sp>
@@ -6958,10 +7297,13 @@
   <p:clrMapOvr>
     <a:masterClrMapping/>
   </p:clrMapOvr>
+  <p:transition spd="slow">
+    <p:cover/>
+  </p:transition>
 </p:sld>
 </file>
 
-<file path=ppt/slides/slide3.xml><?xml version="1.0" encoding="utf-8"?>
+<file path=ppt/slides/slide4.xml><?xml version="1.0" encoding="utf-8"?>
 <p:sld xmlns:a="http://schemas.openxmlformats.org/drawingml/2006/main" xmlns:r="http://schemas.openxmlformats.org/officeDocument/2006/relationships" xmlns:p="http://schemas.openxmlformats.org/presentationml/2006/main" showMasterSp="0">
   <p:cSld>
     <p:bg>
@@ -7173,14 +7515,14 @@
             <a:p>
               <a:pPr algn="ctr"/>
               <a:r>
-                <a:rPr lang="en-US" sz="1400" b="1" dirty="0">
+                <a:rPr lang="en-US" sz="1400" b="1">
                   <a:latin typeface="Cascadia Code" panose="020B0609020000020004" pitchFamily="49" charset="0"/>
                   <a:ea typeface="Times New Roman" panose="02020603050405020304" pitchFamily="18" charset="0"/>
                   <a:cs typeface="Times New Roman" panose="02020603050405020304" pitchFamily="18" charset="0"/>
                 </a:rPr>
                 <a:t>Data Types</a:t>
               </a:r>
-              <a:endParaRPr lang="en-US" sz="1400" dirty="0">
+              <a:endParaRPr lang="en-US" sz="1400">
                 <a:effectLst/>
                 <a:latin typeface="Cascadia Code" panose="020B0609020000020004" pitchFamily="49" charset="0"/>
                 <a:ea typeface="Times New Roman" panose="02020603050405020304" pitchFamily="18" charset="0"/>
@@ -7223,31 +7565,31 @@
               <a:buChar char="•"/>
             </a:pPr>
             <a:r>
-              <a:rPr lang="en-US" dirty="0"/>
+              <a:rPr lang="en-US"/>
               <a:t>Data types as expected: numbers (signed, unsigned), Boolean, Character, </a:t>
             </a:r>
           </a:p>
           <a:p>
             <a:r>
-              <a:rPr lang="en-US" dirty="0"/>
+              <a:rPr lang="en-US"/>
               <a:t>							String, Array (also Collections)</a:t>
             </a:r>
           </a:p>
           <a:p>
             <a:r>
-              <a:rPr lang="en-US" dirty="0"/>
+              <a:rPr lang="en-US"/>
               <a:t>							</a:t>
             </a:r>
             <a:r>
-              <a:rPr lang="en-US" u="sng" dirty="0"/>
+              <a:rPr lang="en-US" u="sng"/>
               <a:t>additionally</a:t>
             </a:r>
             <a:r>
-              <a:rPr lang="en-US" dirty="0"/>
+              <a:rPr lang="en-US"/>
               <a:t>: </a:t>
             </a:r>
             <a:r>
-              <a:rPr lang="en-US" dirty="0">
+              <a:rPr lang="en-US">
                 <a:solidFill>
                   <a:schemeClr val="accent3"/>
                 </a:solidFill>
@@ -7255,11 +7597,11 @@
               <a:t>Any</a:t>
             </a:r>
             <a:r>
-              <a:rPr lang="en-US" dirty="0"/>
+              <a:rPr lang="en-US"/>
               <a:t>, </a:t>
             </a:r>
             <a:r>
-              <a:rPr lang="en-US" dirty="0">
+              <a:rPr lang="en-US">
                 <a:solidFill>
                   <a:schemeClr val="accent1"/>
                 </a:solidFill>
@@ -7267,11 +7609,11 @@
               <a:t>Nothing</a:t>
             </a:r>
             <a:r>
-              <a:rPr lang="en-US" dirty="0"/>
+              <a:rPr lang="en-US"/>
               <a:t>, </a:t>
             </a:r>
             <a:r>
-              <a:rPr lang="en-US" dirty="0">
+              <a:rPr lang="en-US">
                 <a:solidFill>
                   <a:srgbClr val="0070C0"/>
                 </a:solidFill>
@@ -7280,7 +7622,7 @@
             </a:r>
           </a:p>
           <a:p>
-            <a:endParaRPr lang="en-US" dirty="0">
+            <a:endParaRPr lang="en-US">
               <a:solidFill>
                 <a:srgbClr val="92D050"/>
               </a:solidFill>
@@ -7291,7 +7633,7 @@
               <a:buFont typeface="Arial" panose="020B0604020202020204" pitchFamily="34" charset="0"/>
               <a:buChar char="•"/>
             </a:pPr>
-            <a:endParaRPr lang="en-US" dirty="0">
+            <a:endParaRPr lang="en-US">
               <a:solidFill>
                 <a:srgbClr val="92D050"/>
               </a:solidFill>
@@ -7303,7 +7645,7 @@
               <a:buChar char="•"/>
             </a:pPr>
             <a:r>
-              <a:rPr lang="en-US" dirty="0">
+              <a:rPr lang="en-US">
                 <a:solidFill>
                   <a:schemeClr val="accent3"/>
                 </a:solidFill>
@@ -7311,7 +7653,7 @@
               <a:t>Any:</a:t>
             </a:r>
             <a:r>
-              <a:rPr lang="en-US" dirty="0">
+              <a:rPr lang="en-US">
                 <a:solidFill>
                   <a:srgbClr val="92D050"/>
                 </a:solidFill>
@@ -7319,19 +7661,19 @@
               <a:t> </a:t>
             </a:r>
             <a:r>
-              <a:rPr lang="en-US" dirty="0"/>
+              <a:rPr lang="en-US"/>
               <a:t>superclass of all classes, like </a:t>
             </a:r>
             <a:r>
-              <a:rPr lang="en-US" dirty="0" err="1"/>
+              <a:rPr lang="en-US" err="1"/>
               <a:t>golang</a:t>
             </a:r>
             <a:r>
-              <a:rPr lang="en-US" dirty="0"/>
+              <a:rPr lang="en-US"/>
               <a:t> </a:t>
             </a:r>
             <a:r>
-              <a:rPr lang="en-US" dirty="0">
+              <a:rPr lang="en-US">
                 <a:solidFill>
                   <a:schemeClr val="accent3"/>
                 </a:solidFill>
@@ -7345,7 +7687,7 @@
               <a:buChar char="•"/>
             </a:pPr>
             <a:r>
-              <a:rPr lang="en-US" dirty="0">
+              <a:rPr lang="en-US">
                 <a:solidFill>
                   <a:schemeClr val="accent1"/>
                 </a:solidFill>
@@ -7353,11 +7695,11 @@
               <a:t>Nothing: </a:t>
             </a:r>
             <a:r>
-              <a:rPr lang="en-US" dirty="0"/>
+              <a:rPr lang="en-US"/>
               <a:t>class with </a:t>
             </a:r>
             <a:r>
-              <a:rPr lang="en-US" dirty="0">
+              <a:rPr lang="en-US">
                 <a:solidFill>
                   <a:schemeClr val="accent1"/>
                 </a:solidFill>
@@ -7365,11 +7707,11 @@
               <a:t>no instances</a:t>
             </a:r>
             <a:r>
-              <a:rPr lang="en-US" dirty="0"/>
+              <a:rPr lang="en-US"/>
               <a:t>, will always </a:t>
             </a:r>
             <a:r>
-              <a:rPr lang="en-US" dirty="0">
+              <a:rPr lang="en-US">
                 <a:solidFill>
                   <a:schemeClr val="accent1"/>
                 </a:solidFill>
@@ -7377,11 +7719,11 @@
               <a:t>throw</a:t>
             </a:r>
             <a:r>
-              <a:rPr lang="en-US" dirty="0"/>
+              <a:rPr lang="en-US"/>
               <a:t> </a:t>
             </a:r>
             <a:r>
-              <a:rPr lang="en-US" dirty="0">
+              <a:rPr lang="en-US">
                 <a:solidFill>
                   <a:schemeClr val="accent1"/>
                 </a:solidFill>
@@ -7389,7 +7731,7 @@
               <a:t>exception</a:t>
             </a:r>
             <a:r>
-              <a:rPr lang="en-US" dirty="0"/>
+              <a:rPr lang="en-US"/>
               <a:t> as return type</a:t>
             </a:r>
           </a:p>
@@ -7399,7 +7741,7 @@
               <a:buChar char="•"/>
             </a:pPr>
             <a:r>
-              <a:rPr lang="en-US" dirty="0">
+              <a:rPr lang="en-US">
                 <a:solidFill>
                   <a:srgbClr val="0070C0"/>
                 </a:solidFill>
@@ -7407,11 +7749,11 @@
               <a:t>Unit: </a:t>
             </a:r>
             <a:r>
-              <a:rPr lang="en-US" dirty="0"/>
+              <a:rPr lang="en-US"/>
               <a:t>corresponds to </a:t>
             </a:r>
             <a:r>
-              <a:rPr lang="en-US" dirty="0">
+              <a:rPr lang="en-US">
                 <a:solidFill>
                   <a:srgbClr val="0070C0"/>
                 </a:solidFill>
@@ -7419,7 +7761,7 @@
               <a:t>void</a:t>
             </a:r>
             <a:r>
-              <a:rPr lang="en-US" dirty="0"/>
+              <a:rPr lang="en-US"/>
               <a:t> type</a:t>
             </a:r>
           </a:p>
@@ -7428,7 +7770,7 @@
               <a:buFont typeface="Arial" panose="020B0604020202020204" pitchFamily="34" charset="0"/>
               <a:buChar char="•"/>
             </a:pPr>
-            <a:endParaRPr lang="en-US" dirty="0">
+            <a:endParaRPr lang="en-US">
               <a:solidFill>
                 <a:srgbClr val="FFFF00"/>
               </a:solidFill>
@@ -7440,7 +7782,7 @@
               <a:buChar char="•"/>
             </a:pPr>
             <a:r>
-              <a:rPr lang="en-US" dirty="0"/>
+              <a:rPr lang="en-US"/>
               <a:t>no semicolons at end of code lines</a:t>
             </a:r>
           </a:p>
@@ -7476,10 +7818,10 @@
           <a:p>
             <a:pPr algn="r"/>
             <a:r>
-              <a:rPr lang="de-DE" sz="1000" dirty="0"/>
+              <a:rPr lang="de-DE" sz="1000"/>
               <a:t>Source: https://kotlinlang.org/docs/types-overview.html</a:t>
             </a:r>
-            <a:endParaRPr lang="en-US" sz="1000" dirty="0"/>
+            <a:endParaRPr lang="en-US" sz="1000"/>
           </a:p>
         </p:txBody>
       </p:sp>
@@ -7493,10 +7835,13 @@
   <p:clrMapOvr>
     <a:masterClrMapping/>
   </p:clrMapOvr>
+  <p:transition spd="slow">
+    <p:cover/>
+  </p:transition>
 </p:sld>
 </file>
 
-<file path=ppt/slides/slide4.xml><?xml version="1.0" encoding="utf-8"?>
+<file path=ppt/slides/slide5.xml><?xml version="1.0" encoding="utf-8"?>
 <p:sld xmlns:a="http://schemas.openxmlformats.org/drawingml/2006/main" xmlns:r="http://schemas.openxmlformats.org/officeDocument/2006/relationships" xmlns:p="http://schemas.openxmlformats.org/presentationml/2006/main" showMasterSp="0">
   <p:cSld>
     <p:bg>
@@ -7749,7 +8094,7 @@
                 <a:effectLst/>
                 <a:latin typeface="JetBrains Mono"/>
               </a:rPr>
-              <a:t>//infers String data type </a:t>
+              <a:t>//infers String data type</a:t>
             </a:r>
             <a:br>
               <a:rPr lang="en-US" sz="1800">
@@ -8185,10 +8530,10 @@
           <a:p>
             <a:pPr algn="r"/>
             <a:r>
-              <a:rPr lang="de-DE" sz="1000" dirty="0"/>
+              <a:rPr lang="de-DE" sz="1000"/>
               <a:t>Source: https://kotlinlang.org/docs/basic-syntax.html</a:t>
             </a:r>
-            <a:endParaRPr lang="en-US" sz="1000" dirty="0"/>
+            <a:endParaRPr lang="en-US" sz="1000"/>
           </a:p>
         </p:txBody>
       </p:sp>
@@ -8202,10 +8547,13 @@
   <p:clrMapOvr>
     <a:masterClrMapping/>
   </p:clrMapOvr>
+  <p:transition spd="slow">
+    <p:cover/>
+  </p:transition>
 </p:sld>
 </file>
 
-<file path=ppt/slides/slide5.xml><?xml version="1.0" encoding="utf-8"?>
+<file path=ppt/slides/slide6.xml><?xml version="1.0" encoding="utf-8"?>
 <p:sld xmlns:a="http://schemas.openxmlformats.org/drawingml/2006/main" xmlns:r="http://schemas.openxmlformats.org/officeDocument/2006/relationships" xmlns:p="http://schemas.openxmlformats.org/presentationml/2006/main" showMasterSp="0">
   <p:cSld>
     <p:bg>
@@ -8568,11 +8916,11 @@
               <a:buChar char="•"/>
             </a:pPr>
             <a:r>
-              <a:rPr lang="en-US" dirty="0"/>
+              <a:rPr lang="en-US"/>
               <a:t>Function body as </a:t>
             </a:r>
             <a:r>
-              <a:rPr lang="en-US" dirty="0">
+              <a:rPr lang="en-US">
                 <a:solidFill>
                   <a:srgbClr val="92D050"/>
                 </a:solidFill>
@@ -8586,7 +8934,7 @@
               <a:buChar char="•"/>
             </a:pPr>
             <a:r>
-              <a:rPr lang="en-US" dirty="0">
+              <a:rPr lang="en-US">
                 <a:solidFill>
                   <a:schemeClr val="accent6">
                     <a:lumMod val="75000"/>
@@ -8596,7 +8944,7 @@
               <a:t>Return</a:t>
             </a:r>
             <a:r>
-              <a:rPr lang="en-US" dirty="0"/>
+              <a:rPr lang="en-US"/>
               <a:t> type is inferred</a:t>
             </a:r>
           </a:p>
@@ -8856,10 +9204,10 @@
           <a:p>
             <a:pPr algn="r"/>
             <a:r>
-              <a:rPr lang="de-DE" sz="1000" dirty="0"/>
+              <a:rPr lang="de-DE" sz="1000"/>
               <a:t>Source: https://kotlinlang.org/docs/functions.html</a:t>
             </a:r>
-            <a:endParaRPr lang="en-US" sz="1000" dirty="0"/>
+            <a:endParaRPr lang="en-US" sz="1000"/>
           </a:p>
         </p:txBody>
       </p:sp>
@@ -8873,10 +9221,13 @@
   <p:clrMapOvr>
     <a:masterClrMapping/>
   </p:clrMapOvr>
+  <p:transition spd="slow">
+    <p:cover/>
+  </p:transition>
 </p:sld>
 </file>
 
-<file path=ppt/slides/slide6.xml><?xml version="1.0" encoding="utf-8"?>
+<file path=ppt/slides/slide7.xml><?xml version="1.0" encoding="utf-8"?>
 <p:sld xmlns:a="http://schemas.openxmlformats.org/drawingml/2006/main" xmlns:r="http://schemas.openxmlformats.org/officeDocument/2006/relationships" xmlns:p="http://schemas.openxmlformats.org/presentationml/2006/main" showMasterSp="0">
   <p:cSld>
     <p:bg>
@@ -9123,7 +9474,7 @@
         <p:spPr>
           <a:xfrm>
             <a:off x="1200726" y="861903"/>
-            <a:ext cx="9790545" cy="3693319"/>
+            <a:ext cx="9790545" cy="3970318"/>
           </a:xfrm>
           <a:prstGeom prst="rect">
             <a:avLst/>
@@ -9279,7 +9630,7 @@
                 <a:effectLst/>
                 <a:latin typeface="JetBrains Mono"/>
               </a:rPr>
-              <a:t>constructor(): </a:t>
+              <a:t>constructor(val name: String, var repeats: Int): </a:t>
             </a:r>
             <a:r>
               <a:rPr lang="en-US" sz="1800">
@@ -9289,7 +9640,7 @@
                 <a:effectLst/>
                 <a:latin typeface="JetBrains Mono"/>
               </a:rPr>
-              <a:t>this("World", 5)</a:t>
+              <a:t>this(name, repeats)</a:t>
             </a:r>
             <a:r>
               <a:rPr lang="en-US" sz="1800">
@@ -9309,7 +9660,32 @@
                 <a:effectLst/>
                 <a:latin typeface="JetBrains Mono"/>
               </a:rPr>
-              <a:t>        println("\"Greeting\" instance created with \"$name\", configured to repeat $repeats times")</a:t>
+              <a:t>        println(</a:t>
+            </a:r>
+            <a:r>
+              <a:rPr lang="en-US">
+                <a:latin typeface="JetBrains Mono"/>
+              </a:rPr>
+              <a:t>"</a:t>
+            </a:r>
+            <a:r>
+              <a:rPr lang="en-US" sz="1800">
+                <a:effectLst/>
+                <a:latin typeface="JetBrains Mono"/>
+              </a:rPr>
+              <a:t>\"Greeting\" instance created with non-default name \"$name\", configured to repeat</a:t>
+            </a:r>
+          </a:p>
+          <a:p>
+            <a:pPr>
+              <a:buNone/>
+            </a:pPr>
+            <a:r>
+              <a:rPr lang="en-US" sz="1800">
+                <a:effectLst/>
+                <a:latin typeface="JetBrains Mono"/>
+              </a:rPr>
+              <a:t>        $repeats times")</a:t>
             </a:r>
             <a:br>
               <a:rPr lang="en-US" sz="1800">
@@ -9475,7 +9851,7 @@
             </a:pPr>
             <a:r>
               <a:rPr lang="en-US"/>
-              <a:t>Class with </a:t>
+              <a:t>Class (final by default) with </a:t>
             </a:r>
             <a:r>
               <a:rPr lang="en-US">
@@ -9501,7 +9877,7 @@
             </a:r>
             <a:r>
               <a:rPr lang="en-US"/>
-              <a:t> constructor (executed after primary)</a:t>
+              <a:t> constructor</a:t>
             </a:r>
           </a:p>
           <a:p>
@@ -9670,10 +10046,10 @@
           <a:p>
             <a:pPr algn="r"/>
             <a:r>
-              <a:rPr lang="de-DE" sz="1000" dirty="0"/>
+              <a:rPr lang="de-DE" sz="1000"/>
               <a:t>Source: https://kotlinlang.org/docs/basic-syntax.html</a:t>
             </a:r>
-            <a:endParaRPr lang="en-US" sz="1000" dirty="0"/>
+            <a:endParaRPr lang="en-US" sz="1000"/>
           </a:p>
         </p:txBody>
       </p:sp>
@@ -9687,10 +10063,13 @@
   <p:clrMapOvr>
     <a:masterClrMapping/>
   </p:clrMapOvr>
+  <p:transition spd="slow">
+    <p:cover/>
+  </p:transition>
 </p:sld>
 </file>
 
-<file path=ppt/slides/slide7.xml><?xml version="1.0" encoding="utf-8"?>
+<file path=ppt/slides/slide8.xml><?xml version="1.0" encoding="utf-8"?>
 <p:sld xmlns:a="http://schemas.openxmlformats.org/drawingml/2006/main" xmlns:r="http://schemas.openxmlformats.org/officeDocument/2006/relationships" xmlns:p="http://schemas.openxmlformats.org/presentationml/2006/main" showMasterSp="0">
   <p:cSld>
     <p:bg>
@@ -10028,14 +10407,14 @@
               <a:buNone/>
             </a:pPr>
             <a:r>
-              <a:rPr lang="en-US" sz="1800" dirty="0" err="1">
+              <a:rPr lang="en-US" sz="1800" err="1">
                 <a:effectLst/>
                 <a:latin typeface="JetBrains Mono"/>
               </a:rPr>
               <a:t>val</a:t>
             </a:r>
             <a:r>
-              <a:rPr lang="en-US" sz="1800" dirty="0">
+              <a:rPr lang="en-US" sz="1800">
                 <a:effectLst/>
                 <a:latin typeface="JetBrains Mono"/>
               </a:rPr>
@@ -10046,7 +10425,7 @@
             <a:pPr>
               <a:buNone/>
             </a:pPr>
-            <a:endParaRPr lang="en-US" sz="1800" dirty="0">
+            <a:endParaRPr lang="en-US" sz="1800">
               <a:effectLst/>
               <a:latin typeface="JetBrains Mono"/>
             </a:endParaRPr>
@@ -10056,21 +10435,21 @@
               <a:buNone/>
             </a:pPr>
             <a:r>
-              <a:rPr lang="en-US" sz="1800" dirty="0" err="1">
+              <a:rPr lang="en-US" sz="1800" err="1">
                 <a:effectLst/>
                 <a:latin typeface="JetBrains Mono"/>
               </a:rPr>
               <a:t>val</a:t>
             </a:r>
             <a:r>
-              <a:rPr lang="en-US" sz="1800" dirty="0">
+              <a:rPr lang="en-US" sz="1800">
                 <a:effectLst/>
                 <a:latin typeface="JetBrains Mono"/>
               </a:rPr>
               <a:t> result = </a:t>
             </a:r>
             <a:r>
-              <a:rPr lang="en-US" sz="1800" dirty="0">
+              <a:rPr lang="en-US" sz="1800">
                 <a:solidFill>
                   <a:schemeClr val="accent3"/>
                 </a:solidFill>
@@ -10080,7 +10459,7 @@
               <a:t>when (day) </a:t>
             </a:r>
             <a:r>
-              <a:rPr lang="en-US" sz="1800" dirty="0">
+              <a:rPr lang="en-US" sz="1800">
                 <a:effectLst/>
                 <a:latin typeface="JetBrains Mono"/>
               </a:rPr>
@@ -10092,14 +10471,14 @@
               <a:buNone/>
             </a:pPr>
             <a:r>
-              <a:rPr lang="en-US" sz="1800" dirty="0">
+              <a:rPr lang="en-US" sz="1800">
                 <a:effectLst/>
                 <a:latin typeface="JetBrains Mono"/>
               </a:rPr>
               <a:t>  </a:t>
             </a:r>
             <a:r>
-              <a:rPr lang="en-US" sz="1800" dirty="0">
+              <a:rPr lang="en-US" sz="1800">
                 <a:solidFill>
                   <a:srgbClr val="00B0F0"/>
                 </a:solidFill>
@@ -10114,7 +10493,7 @@
               <a:buNone/>
             </a:pPr>
             <a:r>
-              <a:rPr lang="en-US" sz="1800" dirty="0">
+              <a:rPr lang="en-US" sz="1800">
                 <a:effectLst/>
                 <a:latin typeface="JetBrains Mono"/>
               </a:rPr>
@@ -10126,7 +10505,7 @@
               <a:buNone/>
             </a:pPr>
             <a:r>
-              <a:rPr lang="en-US" sz="1800" dirty="0">
+              <a:rPr lang="en-US" sz="1800">
                 <a:effectLst/>
                 <a:latin typeface="JetBrains Mono"/>
               </a:rPr>
@@ -10138,7 +10517,7 @@
               <a:buNone/>
             </a:pPr>
             <a:r>
-              <a:rPr lang="en-US" sz="1800" dirty="0">
+              <a:rPr lang="en-US" sz="1800">
                 <a:effectLst/>
                 <a:latin typeface="JetBrains Mono"/>
               </a:rPr>
@@ -10150,7 +10529,7 @@
               <a:buNone/>
             </a:pPr>
             <a:r>
-              <a:rPr lang="en-US" sz="1800" dirty="0">
+              <a:rPr lang="en-US" sz="1800">
                 <a:effectLst/>
                 <a:latin typeface="JetBrains Mono"/>
               </a:rPr>
@@ -10162,7 +10541,7 @@
               <a:buNone/>
             </a:pPr>
             <a:r>
-              <a:rPr lang="en-US" sz="1800" dirty="0">
+              <a:rPr lang="en-US" sz="1800">
                 <a:effectLst/>
                 <a:latin typeface="JetBrains Mono"/>
               </a:rPr>
@@ -10174,7 +10553,7 @@
               <a:buNone/>
             </a:pPr>
             <a:r>
-              <a:rPr lang="en-US" sz="1800" dirty="0">
+              <a:rPr lang="en-US" sz="1800">
                 <a:effectLst/>
                 <a:latin typeface="JetBrains Mono"/>
               </a:rPr>
@@ -10186,14 +10565,14 @@
               <a:buNone/>
             </a:pPr>
             <a:r>
-              <a:rPr lang="en-US" sz="1800" dirty="0">
+              <a:rPr lang="en-US" sz="1800">
                 <a:effectLst/>
                 <a:latin typeface="JetBrains Mono"/>
               </a:rPr>
               <a:t>  </a:t>
             </a:r>
             <a:r>
-              <a:rPr lang="en-US" sz="1800" dirty="0">
+              <a:rPr lang="en-US" sz="1800">
                 <a:solidFill>
                   <a:srgbClr val="92D050"/>
                 </a:solidFill>
@@ -10208,7 +10587,7 @@
               <a:buNone/>
             </a:pPr>
             <a:r>
-              <a:rPr lang="en-US" sz="1800" dirty="0">
+              <a:rPr lang="en-US" sz="1800">
                 <a:effectLst/>
                 <a:latin typeface="JetBrains Mono"/>
               </a:rPr>
@@ -10220,14 +10599,14 @@
               <a:buNone/>
             </a:pPr>
             <a:r>
-              <a:rPr lang="en-US" sz="1800" dirty="0" err="1">
+              <a:rPr lang="en-US" sz="1800" err="1">
                 <a:effectLst/>
                 <a:latin typeface="JetBrains Mono"/>
               </a:rPr>
               <a:t>println</a:t>
             </a:r>
             <a:r>
-              <a:rPr lang="en-US" sz="1800" dirty="0">
+              <a:rPr lang="en-US" sz="1800">
                 <a:effectLst/>
                 <a:latin typeface="JetBrains Mono"/>
               </a:rPr>
@@ -10266,7 +10645,7 @@
           <a:p>
             <a:pPr algn="r"/>
             <a:r>
-              <a:rPr lang="fr-FR" sz="1000" dirty="0"/>
+              <a:rPr lang="fr-FR" sz="1000"/>
               <a:t>Source:  https://www.w3schools.com/kotlin/kotlin_when.php</a:t>
             </a:r>
           </a:p>
@@ -10282,6 +10661,9 @@
   <p:clrMapOvr>
     <a:masterClrMapping/>
   </p:clrMapOvr>
+  <p:transition spd="slow">
+    <p:cover/>
+  </p:transition>
 </p:sld>
 </file>
 
